--- a/segmentation/Market_Segmentation_Mixed.pptx
+++ b/segmentation/Market_Segmentation_Mixed.pptx
@@ -13,6 +13,7 @@
     <p:sldId id="261" r:id="rId12"/>
     <p:sldId id="262" r:id="rId13"/>
     <p:sldId id="263" r:id="rId14"/>
+    <p:sldId id="264" r:id="rId15"/>
   </p:sldIdLst>
   <p:sldSz cx="12192000" cy="6858000"/>
   <p:notesSz cx="6858000" cy="9144000"/>
@@ -1167,7 +1168,7 @@
           <a:lstStyle/>
           <a:p>
             <a:r>
-              <a:t>I scored each segment from 1 to 5 on five factors: search interest, growth and spread across Nigeria from Google Trends, and ability to pay and competition from my own judgement. Each factor has a weight, and the weighted total is out of 5. Cybersecurity learners score 4.50, the highest.</a:t>
+              <a:t>Other research supports the Google Trends results. The CAC confirmed a cyber breach in April 2026, which explains the jump to 100. Nigeria has very few cybersecurity professionals, about 8,352 in 2023 against 57,269 in South Africa, while attacks on Nigerian organisations rose by 47% in a year. So employers need trained people. About 14 million small businesses use Facebook, Instagram and WhatsApp, which supports digital marketing as the second segment. The government's 3MTT programme shows demand for tech skills is growing, but its free training is also competition.</a:t>
             </a:r>
           </a:p>
         </p:txBody>
@@ -1237,7 +1238,7 @@
           <a:lstStyle/>
           <a:p>
             <a:r>
-              <a:t>This bar chart shows the weighted scores. Cybersecurity learners come first with 4.50 out of 5, then digital marketing learners with 3.50.</a:t>
+              <a:t>I scored each segment from 1 to 5 on five factors: search interest, growth and spread across Nigeria from Google Trends, and ability to pay and competition from my own judgement. Each factor has a weight, and the weighted total is out of 5. Cybersecurity learners score 4.50, the highest.</a:t>
             </a:r>
           </a:p>
         </p:txBody>
@@ -1307,7 +1308,7 @@
           <a:lstStyle/>
           <a:p>
             <a:r>
-              <a:t>Cybersecurity learners are the most attractive segment because they search the most, their interest is growing and urgent after the CAC breach news, they are spread across the country, and they or their employers can pay. So I would launch with a cybersecurity course and add digital marketing next.</a:t>
+              <a:t>This bar chart shows the weighted scores. Cybersecurity learners come first with 4.50 out of 5, then digital marketing learners with 3.50.</a:t>
             </a:r>
           </a:p>
         </p:txBody>
@@ -1333,6 +1334,76 @@
 </file>
 
 <file path=ppt/notesSlides/notesSlide8.xml><?xml version="1.0" encoding="utf-8"?>
+<p:notes xmlns:a="http://schemas.openxmlformats.org/drawingml/2006/main" xmlns:p="http://schemas.openxmlformats.org/presentationml/2006/main" xmlns:r="http://schemas.openxmlformats.org/officeDocument/2006/relationships">
+  <p:cSld>
+    <p:spTree>
+      <p:nvGrpSpPr>
+        <p:cNvPr id="1" name=""/>
+        <p:cNvGrpSpPr/>
+        <p:nvPr/>
+      </p:nvGrpSpPr>
+      <p:grpSpPr>
+        <a:xfrm>
+          <a:off x="0" y="0"/>
+          <a:ext cx="0" cy="0"/>
+          <a:chOff x="0" y="0"/>
+          <a:chExt cx="0" cy="0"/>
+        </a:xfrm>
+      </p:grpSpPr>
+      <p:sp>
+        <p:nvSpPr>
+          <p:cNvPr id="2" name="Slide Image Placeholder 1"/>
+          <p:cNvSpPr>
+            <a:spLocks noGrp="1"/>
+          </p:cNvSpPr>
+          <p:nvPr>
+            <p:ph type="sldImg" idx="2"/>
+          </p:nvPr>
+        </p:nvSpPr>
+        <p:spPr/>
+      </p:sp>
+      <p:sp>
+        <p:nvSpPr>
+          <p:cNvPr id="3" name="Notes Placeholder 2"/>
+          <p:cNvSpPr>
+            <a:spLocks noGrp="1"/>
+          </p:cNvSpPr>
+          <p:nvPr>
+            <p:ph type="body" idx="3" sz="quarter"/>
+          </p:nvPr>
+        </p:nvSpPr>
+        <p:spPr/>
+        <p:txBody>
+          <a:bodyPr/>
+          <a:lstStyle/>
+          <a:p>
+            <a:r>
+              <a:t>Cybersecurity learners are the most attractive segment because they search the most, their interest is growing and urgent after the CAC breach, there are too few trained experts in Nigeria, and they or their employers can pay. So I would launch with a cybersecurity course and add digital marketing next.</a:t>
+            </a:r>
+          </a:p>
+        </p:txBody>
+      </p:sp>
+      <p:sp>
+        <p:nvSpPr>
+          <p:cNvPr id="4" name="Slide Number Placeholder 3"/>
+          <p:cNvSpPr>
+            <a:spLocks noGrp="1"/>
+          </p:cNvSpPr>
+          <p:nvPr>
+            <p:ph type="sldNum" idx="5" sz="quarter"/>
+          </p:nvPr>
+        </p:nvSpPr>
+        <p:spPr/>
+      </p:sp>
+    </p:spTree>
+  </p:cSld>
+  <p:clrMapOvr>
+    <a:masterClrMapping/>
+  </p:clrMapOvr>
+</p:notes>
+</file>
+
+<file path=ppt/notesSlides/notesSlide9.xml><?xml version="1.0" encoding="utf-8"?>
 <p:notes xmlns:a="http://schemas.openxmlformats.org/drawingml/2006/main" xmlns:p="http://schemas.openxmlformats.org/presentationml/2006/main" xmlns:r="http://schemas.openxmlformats.org/officeDocument/2006/relationships">
   <p:cSld>
     <p:spTree>
@@ -4587,9 +4658,187 @@
   <p:clrMapOvr>
     <a:masterClrMapping/>
   </p:clrMapOvr>
-  <p:transition spd="med">
+  <p:transition spd="med" advTm="10000">
     <p:fade/>
   </p:transition>
+  <p:timing>
+    <p:tnLst>
+      <p:par>
+        <p:cTn id="1" dur="indefinite" restart="never" nodeType="tmRoot">
+          <p:childTnLst>
+            <p:seq concurrent="1" nextAc="seek">
+              <p:cTn id="2" dur="indefinite" nodeType="mainSeq">
+                <p:childTnLst>
+                  <p:par>
+                    <p:cTn id="3" fill="hold">
+                      <p:stCondLst>
+                        <p:cond delay="indefinite"/>
+                        <p:cond evt="onBegin" delay="0">
+                          <p:tn val="2"/>
+                        </p:cond>
+                      </p:stCondLst>
+                      <p:childTnLst>
+                        <p:par>
+                          <p:cTn id="4" fill="hold">
+                            <p:stCondLst>
+                              <p:cond delay="0"/>
+                            </p:stCondLst>
+                            <p:childTnLst>
+                              <p:par>
+                                <p:cTn id="5" presetID="10" presetClass="entr" presetSubtype="0" fill="hold" grpId="0" nodeType="afterEffect">
+                                  <p:stCondLst>
+                                    <p:cond delay="0"/>
+                                  </p:stCondLst>
+                                  <p:childTnLst>
+                                    <p:set>
+                                      <p:cBhvr>
+                                        <p:cTn id="6" dur="1" fill="hold">
+                                          <p:stCondLst>
+                                            <p:cond delay="0"/>
+                                          </p:stCondLst>
+                                        </p:cTn>
+                                        <p:tgtEl>
+                                          <p:spTgt spid="2"/>
+                                        </p:tgtEl>
+                                        <p:attrNameLst>
+                                          <p:attrName>style.visibility</p:attrName>
+                                        </p:attrNameLst>
+                                      </p:cBhvr>
+                                      <p:to>
+                                        <p:strVal val="visible"/>
+                                      </p:to>
+                                    </p:set>
+                                    <p:animEffect transition="in" filter="fade">
+                                      <p:cBhvr>
+                                        <p:cTn id="7" dur="500"/>
+                                        <p:tgtEl>
+                                          <p:spTgt spid="2"/>
+                                        </p:tgtEl>
+                                      </p:cBhvr>
+                                    </p:animEffect>
+                                  </p:childTnLst>
+                                </p:cTn>
+                              </p:par>
+                            </p:childTnLst>
+                          </p:cTn>
+                        </p:par>
+                        <p:par>
+                          <p:cTn id="8" fill="hold">
+                            <p:stCondLst>
+                              <p:cond delay="500"/>
+                            </p:stCondLst>
+                            <p:childTnLst>
+                              <p:par>
+                                <p:cTn id="9" presetID="22" presetClass="entr" presetSubtype="8" fill="hold" nodeType="afterEffect">
+                                  <p:stCondLst>
+                                    <p:cond delay="0"/>
+                                  </p:stCondLst>
+                                  <p:childTnLst>
+                                    <p:set>
+                                      <p:cBhvr>
+                                        <p:cTn id="10" dur="1" fill="hold">
+                                          <p:stCondLst>
+                                            <p:cond delay="0"/>
+                                          </p:stCondLst>
+                                        </p:cTn>
+                                        <p:tgtEl>
+                                          <p:spTgt spid="8"/>
+                                        </p:tgtEl>
+                                        <p:attrNameLst>
+                                          <p:attrName>style.visibility</p:attrName>
+                                        </p:attrNameLst>
+                                      </p:cBhvr>
+                                      <p:to>
+                                        <p:strVal val="visible"/>
+                                      </p:to>
+                                    </p:set>
+                                    <p:animEffect transition="in" filter="wipe(right)">
+                                      <p:cBhvr>
+                                        <p:cTn id="11" dur="500"/>
+                                        <p:tgtEl>
+                                          <p:spTgt spid="8"/>
+                                        </p:tgtEl>
+                                      </p:cBhvr>
+                                    </p:animEffect>
+                                  </p:childTnLst>
+                                </p:cTn>
+                              </p:par>
+                            </p:childTnLst>
+                          </p:cTn>
+                        </p:par>
+                        <p:par>
+                          <p:cTn id="12" fill="hold">
+                            <p:stCondLst>
+                              <p:cond delay="1000"/>
+                            </p:stCondLst>
+                            <p:childTnLst>
+                              <p:par>
+                                <p:cTn id="13" presetID="10" presetClass="entr" presetSubtype="0" fill="hold" grpId="0" nodeType="afterEffect">
+                                  <p:stCondLst>
+                                    <p:cond delay="0"/>
+                                  </p:stCondLst>
+                                  <p:childTnLst>
+                                    <p:set>
+                                      <p:cBhvr>
+                                        <p:cTn id="14" dur="1" fill="hold">
+                                          <p:stCondLst>
+                                            <p:cond delay="0"/>
+                                          </p:stCondLst>
+                                        </p:cTn>
+                                        <p:tgtEl>
+                                          <p:spTgt spid="3"/>
+                                        </p:tgtEl>
+                                        <p:attrNameLst>
+                                          <p:attrName>style.visibility</p:attrName>
+                                        </p:attrNameLst>
+                                      </p:cBhvr>
+                                      <p:to>
+                                        <p:strVal val="visible"/>
+                                      </p:to>
+                                    </p:set>
+                                    <p:animEffect transition="in" filter="fade">
+                                      <p:cBhvr>
+                                        <p:cTn id="15" dur="500"/>
+                                        <p:tgtEl>
+                                          <p:spTgt spid="3"/>
+                                        </p:tgtEl>
+                                      </p:cBhvr>
+                                    </p:animEffect>
+                                  </p:childTnLst>
+                                </p:cTn>
+                              </p:par>
+                            </p:childTnLst>
+                          </p:cTn>
+                        </p:par>
+                      </p:childTnLst>
+                    </p:cTn>
+                  </p:par>
+                </p:childTnLst>
+              </p:cTn>
+              <p:prevCondLst>
+                <p:cond evt="onPrev" delay="0">
+                  <p:tgtEl>
+                    <p:sldTgt/>
+                  </p:tgtEl>
+                </p:cond>
+              </p:prevCondLst>
+              <p:nextCondLst>
+                <p:cond evt="onNext" delay="0">
+                  <p:tgtEl>
+                    <p:sldTgt/>
+                  </p:tgtEl>
+                </p:cond>
+              </p:nextCondLst>
+            </p:seq>
+          </p:childTnLst>
+        </p:cTn>
+      </p:par>
+    </p:tnLst>
+    <p:bldLst>
+      <p:bldP spid="2" grpId="0" animBg="1"/>
+      <p:bldP spid="3" grpId="0" animBg="1"/>
+    </p:bldLst>
+  </p:timing>
 </p:sld>
 </file>
 
@@ -4909,9 +5158,259 @@
   <p:clrMapOvr>
     <a:masterClrMapping/>
   </p:clrMapOvr>
-  <p:transition spd="med">
+  <p:transition spd="med" advTm="25000">
     <p:push dir="u"/>
   </p:transition>
+  <p:timing>
+    <p:tnLst>
+      <p:par>
+        <p:cTn id="1" dur="indefinite" restart="never" nodeType="tmRoot">
+          <p:childTnLst>
+            <p:seq concurrent="1" nextAc="seek">
+              <p:cTn id="2" dur="indefinite" nodeType="mainSeq">
+                <p:childTnLst>
+                  <p:par>
+                    <p:cTn id="3" fill="hold">
+                      <p:stCondLst>
+                        <p:cond delay="indefinite"/>
+                        <p:cond evt="onBegin" delay="0">
+                          <p:tn val="2"/>
+                        </p:cond>
+                      </p:stCondLst>
+                      <p:childTnLst>
+                        <p:par>
+                          <p:cTn id="4" fill="hold">
+                            <p:stCondLst>
+                              <p:cond delay="0"/>
+                            </p:stCondLst>
+                            <p:childTnLst>
+                              <p:par>
+                                <p:cTn id="5" presetID="10" presetClass="entr" presetSubtype="0" fill="hold" grpId="0" nodeType="afterEffect">
+                                  <p:stCondLst>
+                                    <p:cond delay="0"/>
+                                  </p:stCondLst>
+                                  <p:childTnLst>
+                                    <p:set>
+                                      <p:cBhvr>
+                                        <p:cTn id="6" dur="1" fill="hold">
+                                          <p:stCondLst>
+                                            <p:cond delay="0"/>
+                                          </p:stCondLst>
+                                        </p:cTn>
+                                        <p:tgtEl>
+                                          <p:spTgt spid="2"/>
+                                        </p:tgtEl>
+                                        <p:attrNameLst>
+                                          <p:attrName>style.visibility</p:attrName>
+                                        </p:attrNameLst>
+                                      </p:cBhvr>
+                                      <p:to>
+                                        <p:strVal val="visible"/>
+                                      </p:to>
+                                    </p:set>
+                                    <p:animEffect transition="in" filter="fade">
+                                      <p:cBhvr>
+                                        <p:cTn id="7" dur="500"/>
+                                        <p:tgtEl>
+                                          <p:spTgt spid="2"/>
+                                        </p:tgtEl>
+                                      </p:cBhvr>
+                                    </p:animEffect>
+                                  </p:childTnLst>
+                                </p:cTn>
+                              </p:par>
+                              <p:par>
+                                <p:cTn id="8" presetID="22" presetClass="entr" presetSubtype="8" fill="hold" nodeType="withEffect">
+                                  <p:stCondLst>
+                                    <p:cond delay="0"/>
+                                  </p:stCondLst>
+                                  <p:childTnLst>
+                                    <p:set>
+                                      <p:cBhvr>
+                                        <p:cTn id="9" dur="1" fill="hold">
+                                          <p:stCondLst>
+                                            <p:cond delay="0"/>
+                                          </p:stCondLst>
+                                        </p:cTn>
+                                        <p:tgtEl>
+                                          <p:spTgt spid="5"/>
+                                        </p:tgtEl>
+                                        <p:attrNameLst>
+                                          <p:attrName>style.visibility</p:attrName>
+                                        </p:attrNameLst>
+                                      </p:cBhvr>
+                                      <p:to>
+                                        <p:strVal val="visible"/>
+                                      </p:to>
+                                    </p:set>
+                                    <p:animEffect transition="in" filter="wipe(right)">
+                                      <p:cBhvr>
+                                        <p:cTn id="10" dur="500"/>
+                                        <p:tgtEl>
+                                          <p:spTgt spid="5"/>
+                                        </p:tgtEl>
+                                      </p:cBhvr>
+                                    </p:animEffect>
+                                  </p:childTnLst>
+                                </p:cTn>
+                              </p:par>
+                            </p:childTnLst>
+                          </p:cTn>
+                        </p:par>
+                        <p:par>
+                          <p:cTn id="11" fill="hold">
+                            <p:stCondLst>
+                              <p:cond delay="500"/>
+                            </p:stCondLst>
+                            <p:childTnLst>
+                              <p:par>
+                                <p:cTn id="12" presetID="10" presetClass="entr" presetSubtype="0" fill="hold" grpId="0" nodeType="afterEffect">
+                                  <p:stCondLst>
+                                    <p:cond delay="0"/>
+                                  </p:stCondLst>
+                                  <p:childTnLst>
+                                    <p:set>
+                                      <p:cBhvr>
+                                        <p:cTn id="13" dur="1" fill="hold">
+                                          <p:stCondLst>
+                                            <p:cond delay="0"/>
+                                          </p:stCondLst>
+                                        </p:cTn>
+                                        <p:tgtEl>
+                                          <p:spTgt spid="6"/>
+                                        </p:tgtEl>
+                                        <p:attrNameLst>
+                                          <p:attrName>style.visibility</p:attrName>
+                                        </p:attrNameLst>
+                                      </p:cBhvr>
+                                      <p:to>
+                                        <p:strVal val="visible"/>
+                                      </p:to>
+                                    </p:set>
+                                    <p:animEffect transition="in" filter="fade">
+                                      <p:cBhvr>
+                                        <p:cTn id="14" dur="500"/>
+                                        <p:tgtEl>
+                                          <p:spTgt spid="6"/>
+                                        </p:tgtEl>
+                                      </p:cBhvr>
+                                    </p:animEffect>
+                                  </p:childTnLst>
+                                </p:cTn>
+                              </p:par>
+                            </p:childTnLst>
+                          </p:cTn>
+                        </p:par>
+                        <p:par>
+                          <p:cTn id="15" fill="hold">
+                            <p:stCondLst>
+                              <p:cond delay="1000"/>
+                            </p:stCondLst>
+                            <p:childTnLst>
+                              <p:par>
+                                <p:cTn id="16" presetID="10" presetClass="entr" presetSubtype="0" fill="hold" grpId="0" nodeType="afterEffect">
+                                  <p:stCondLst>
+                                    <p:cond delay="0"/>
+                                  </p:stCondLst>
+                                  <p:childTnLst>
+                                    <p:set>
+                                      <p:cBhvr>
+                                        <p:cTn id="17" dur="1" fill="hold">
+                                          <p:stCondLst>
+                                            <p:cond delay="0"/>
+                                          </p:stCondLst>
+                                        </p:cTn>
+                                        <p:tgtEl>
+                                          <p:spTgt spid="7"/>
+                                        </p:tgtEl>
+                                        <p:attrNameLst>
+                                          <p:attrName>style.visibility</p:attrName>
+                                        </p:attrNameLst>
+                                      </p:cBhvr>
+                                      <p:to>
+                                        <p:strVal val="visible"/>
+                                      </p:to>
+                                    </p:set>
+                                    <p:animEffect transition="in" filter="fade">
+                                      <p:cBhvr>
+                                        <p:cTn id="18" dur="500"/>
+                                        <p:tgtEl>
+                                          <p:spTgt spid="7"/>
+                                        </p:tgtEl>
+                                      </p:cBhvr>
+                                    </p:animEffect>
+                                  </p:childTnLst>
+                                </p:cTn>
+                              </p:par>
+                              <p:par>
+                                <p:cTn id="19" presetID="10" presetClass="entr" presetSubtype="0" fill="hold" grpId="0" nodeType="withEffect">
+                                  <p:stCondLst>
+                                    <p:cond delay="0"/>
+                                  </p:stCondLst>
+                                  <p:childTnLst>
+                                    <p:set>
+                                      <p:cBhvr>
+                                        <p:cTn id="20" dur="1" fill="hold">
+                                          <p:stCondLst>
+                                            <p:cond delay="0"/>
+                                          </p:stCondLst>
+                                        </p:cTn>
+                                        <p:tgtEl>
+                                          <p:spTgt spid="3"/>
+                                        </p:tgtEl>
+                                        <p:attrNameLst>
+                                          <p:attrName>style.visibility</p:attrName>
+                                        </p:attrNameLst>
+                                      </p:cBhvr>
+                                      <p:to>
+                                        <p:strVal val="visible"/>
+                                      </p:to>
+                                    </p:set>
+                                    <p:animEffect transition="in" filter="fade">
+                                      <p:cBhvr>
+                                        <p:cTn id="21" dur="500"/>
+                                        <p:tgtEl>
+                                          <p:spTgt spid="3"/>
+                                        </p:tgtEl>
+                                      </p:cBhvr>
+                                    </p:animEffect>
+                                  </p:childTnLst>
+                                </p:cTn>
+                              </p:par>
+                            </p:childTnLst>
+                          </p:cTn>
+                        </p:par>
+                      </p:childTnLst>
+                    </p:cTn>
+                  </p:par>
+                </p:childTnLst>
+              </p:cTn>
+              <p:prevCondLst>
+                <p:cond evt="onPrev" delay="0">
+                  <p:tgtEl>
+                    <p:sldTgt/>
+                  </p:tgtEl>
+                </p:cond>
+              </p:prevCondLst>
+              <p:nextCondLst>
+                <p:cond evt="onNext" delay="0">
+                  <p:tgtEl>
+                    <p:sldTgt/>
+                  </p:tgtEl>
+                </p:cond>
+              </p:nextCondLst>
+            </p:seq>
+          </p:childTnLst>
+        </p:cTn>
+      </p:par>
+    </p:tnLst>
+    <p:bldLst>
+      <p:bldP spid="2" grpId="0" animBg="1"/>
+      <p:bldP spid="6" grpId="0" animBg="1"/>
+      <p:bldP spid="7" grpId="0" animBg="1"/>
+      <p:bldP spid="3" grpId="0" animBg="1"/>
+    </p:bldLst>
+  </p:timing>
 </p:sld>
 </file>
 
@@ -6545,9 +7044,267 @@
   <p:clrMapOvr>
     <a:masterClrMapping/>
   </p:clrMapOvr>
-  <p:transition spd="med">
+  <p:transition spd="med" advTm="35000">
     <p:wipe dir="r"/>
   </p:transition>
+  <p:timing>
+    <p:tnLst>
+      <p:par>
+        <p:cTn id="1" dur="indefinite" restart="never" nodeType="tmRoot">
+          <p:childTnLst>
+            <p:seq concurrent="1" nextAc="seek">
+              <p:cTn id="2" dur="indefinite" nodeType="mainSeq">
+                <p:childTnLst>
+                  <p:par>
+                    <p:cTn id="3" fill="hold">
+                      <p:stCondLst>
+                        <p:cond delay="indefinite"/>
+                        <p:cond evt="onBegin" delay="0">
+                          <p:tn val="2"/>
+                        </p:cond>
+                      </p:stCondLst>
+                      <p:childTnLst>
+                        <p:par>
+                          <p:cTn id="4" fill="hold">
+                            <p:stCondLst>
+                              <p:cond delay="0"/>
+                            </p:stCondLst>
+                            <p:childTnLst>
+                              <p:par>
+                                <p:cTn id="5" presetID="10" presetClass="entr" presetSubtype="0" fill="hold" grpId="0" nodeType="afterEffect">
+                                  <p:stCondLst>
+                                    <p:cond delay="0"/>
+                                  </p:stCondLst>
+                                  <p:childTnLst>
+                                    <p:set>
+                                      <p:cBhvr>
+                                        <p:cTn id="6" dur="1" fill="hold">
+                                          <p:stCondLst>
+                                            <p:cond delay="0"/>
+                                          </p:stCondLst>
+                                        </p:cTn>
+                                        <p:tgtEl>
+                                          <p:spTgt spid="2"/>
+                                        </p:tgtEl>
+                                        <p:attrNameLst>
+                                          <p:attrName>style.visibility</p:attrName>
+                                        </p:attrNameLst>
+                                      </p:cBhvr>
+                                      <p:to>
+                                        <p:strVal val="visible"/>
+                                      </p:to>
+                                    </p:set>
+                                    <p:animEffect transition="in" filter="fade">
+                                      <p:cBhvr>
+                                        <p:cTn id="7" dur="500"/>
+                                        <p:tgtEl>
+                                          <p:spTgt spid="2"/>
+                                        </p:tgtEl>
+                                      </p:cBhvr>
+                                    </p:animEffect>
+                                  </p:childTnLst>
+                                </p:cTn>
+                              </p:par>
+                              <p:par>
+                                <p:cTn id="8" presetID="22" presetClass="entr" presetSubtype="8" fill="hold" nodeType="withEffect">
+                                  <p:stCondLst>
+                                    <p:cond delay="0"/>
+                                  </p:stCondLst>
+                                  <p:childTnLst>
+                                    <p:set>
+                                      <p:cBhvr>
+                                        <p:cTn id="9" dur="1" fill="hold">
+                                          <p:stCondLst>
+                                            <p:cond delay="0"/>
+                                          </p:stCondLst>
+                                        </p:cTn>
+                                        <p:tgtEl>
+                                          <p:spTgt spid="5"/>
+                                        </p:tgtEl>
+                                        <p:attrNameLst>
+                                          <p:attrName>style.visibility</p:attrName>
+                                        </p:attrNameLst>
+                                      </p:cBhvr>
+                                      <p:to>
+                                        <p:strVal val="visible"/>
+                                      </p:to>
+                                    </p:set>
+                                    <p:animEffect transition="in" filter="wipe(right)">
+                                      <p:cBhvr>
+                                        <p:cTn id="10" dur="500"/>
+                                        <p:tgtEl>
+                                          <p:spTgt spid="5"/>
+                                        </p:tgtEl>
+                                      </p:cBhvr>
+                                    </p:animEffect>
+                                  </p:childTnLst>
+                                </p:cTn>
+                              </p:par>
+                            </p:childTnLst>
+                          </p:cTn>
+                        </p:par>
+                        <p:par>
+                          <p:cTn id="11" fill="hold">
+                            <p:stCondLst>
+                              <p:cond delay="500"/>
+                            </p:stCondLst>
+                            <p:childTnLst>
+                              <p:par>
+                                <p:cTn id="12" presetID="10" presetClass="entr" presetSubtype="0" fill="hold" grpId="0" nodeType="afterEffect">
+                                  <p:stCondLst>
+                                    <p:cond delay="0"/>
+                                  </p:stCondLst>
+                                  <p:childTnLst>
+                                    <p:set>
+                                      <p:cBhvr>
+                                        <p:cTn id="13" dur="1" fill="hold">
+                                          <p:stCondLst>
+                                            <p:cond delay="0"/>
+                                          </p:stCondLst>
+                                        </p:cTn>
+                                        <p:tgtEl>
+                                          <p:spTgt spid="6"/>
+                                        </p:tgtEl>
+                                        <p:attrNameLst>
+                                          <p:attrName>style.visibility</p:attrName>
+                                        </p:attrNameLst>
+                                      </p:cBhvr>
+                                      <p:to>
+                                        <p:strVal val="visible"/>
+                                      </p:to>
+                                    </p:set>
+                                    <p:animEffect transition="in" filter="fade">
+                                      <p:cBhvr>
+                                        <p:cTn id="14" dur="500"/>
+                                        <p:tgtEl>
+                                          <p:spTgt spid="6"/>
+                                        </p:tgtEl>
+                                      </p:cBhvr>
+                                    </p:animEffect>
+                                  </p:childTnLst>
+                                </p:cTn>
+                              </p:par>
+                            </p:childTnLst>
+                          </p:cTn>
+                        </p:par>
+                        <p:par>
+                          <p:cTn id="15" fill="hold">
+                            <p:stCondLst>
+                              <p:cond delay="1000"/>
+                            </p:stCondLst>
+                            <p:childTnLst>
+                              <p:par>
+                                <p:cTn id="16" presetID="22" presetClass="entr" presetSubtype="1" fill="hold" nodeType="afterEffect">
+                                  <p:stCondLst>
+                                    <p:cond delay="0"/>
+                                  </p:stCondLst>
+                                  <p:childTnLst>
+                                    <p:set>
+                                      <p:cBhvr>
+                                        <p:cTn id="17" dur="1" fill="hold">
+                                          <p:stCondLst>
+                                            <p:cond delay="0"/>
+                                          </p:stCondLst>
+                                        </p:cTn>
+                                        <p:tgtEl>
+                                          <p:spTgt spid="3"/>
+                                        </p:tgtEl>
+                                        <p:attrNameLst>
+                                          <p:attrName>style.visibility</p:attrName>
+                                        </p:attrNameLst>
+                                      </p:cBhvr>
+                                      <p:to>
+                                        <p:strVal val="visible"/>
+                                      </p:to>
+                                    </p:set>
+                                    <p:animEffect transition="in" filter="wipe(down)">
+                                      <p:cBhvr>
+                                        <p:cTn id="18" dur="500"/>
+                                        <p:tgtEl>
+                                          <p:spTgt spid="3"/>
+                                        </p:tgtEl>
+                                      </p:cBhvr>
+                                    </p:animEffect>
+                                  </p:childTnLst>
+                                </p:cTn>
+                              </p:par>
+                            </p:childTnLst>
+                          </p:cTn>
+                        </p:par>
+                        <p:par>
+                          <p:cTn id="19" fill="hold">
+                            <p:stCondLst>
+                              <p:cond delay="1500"/>
+                            </p:stCondLst>
+                            <p:childTnLst>
+                              <p:par>
+                                <p:cTn id="20" presetID="10" presetClass="entr" presetSubtype="0" fill="hold" grpId="0" nodeType="afterEffect">
+                                  <p:stCondLst>
+                                    <p:cond delay="0"/>
+                                  </p:stCondLst>
+                                  <p:childTnLst>
+                                    <p:set>
+                                      <p:cBhvr>
+                                        <p:cTn id="21" dur="1" fill="hold">
+                                          <p:stCondLst>
+                                            <p:cond delay="0"/>
+                                          </p:stCondLst>
+                                        </p:cTn>
+                                        <p:tgtEl>
+                                          <p:spTgt spid="7"/>
+                                        </p:tgtEl>
+                                        <p:attrNameLst>
+                                          <p:attrName>style.visibility</p:attrName>
+                                        </p:attrNameLst>
+                                      </p:cBhvr>
+                                      <p:to>
+                                        <p:strVal val="visible"/>
+                                      </p:to>
+                                    </p:set>
+                                    <p:animEffect transition="in" filter="fade">
+                                      <p:cBhvr>
+                                        <p:cTn id="22" dur="500"/>
+                                        <p:tgtEl>
+                                          <p:spTgt spid="7"/>
+                                        </p:tgtEl>
+                                      </p:cBhvr>
+                                    </p:animEffect>
+                                  </p:childTnLst>
+                                </p:cTn>
+                              </p:par>
+                            </p:childTnLst>
+                          </p:cTn>
+                        </p:par>
+                      </p:childTnLst>
+                    </p:cTn>
+                  </p:par>
+                </p:childTnLst>
+              </p:cTn>
+              <p:prevCondLst>
+                <p:cond evt="onPrev" delay="0">
+                  <p:tgtEl>
+                    <p:sldTgt/>
+                  </p:tgtEl>
+                </p:cond>
+              </p:prevCondLst>
+              <p:nextCondLst>
+                <p:cond evt="onNext" delay="0">
+                  <p:tgtEl>
+                    <p:sldTgt/>
+                  </p:tgtEl>
+                </p:cond>
+              </p:nextCondLst>
+            </p:seq>
+          </p:childTnLst>
+        </p:cTn>
+      </p:par>
+    </p:tnLst>
+    <p:bldLst>
+      <p:bldP spid="2" grpId="0" animBg="1"/>
+      <p:bldP spid="6" grpId="0" animBg="1"/>
+      <p:bldP spid="7" grpId="0" animBg="1"/>
+    </p:bldLst>
+  </p:timing>
 </p:sld>
 </file>
 
@@ -6873,9 +7630,306 @@
   <p:clrMapOvr>
     <a:masterClrMapping/>
   </p:clrMapOvr>
-  <p:transition spd="med">
+  <p:transition spd="med" advTm="35000">
     <p:split orient="vert" dir="out"/>
   </p:transition>
+  <p:timing>
+    <p:tnLst>
+      <p:par>
+        <p:cTn id="1" dur="indefinite" restart="never" nodeType="tmRoot">
+          <p:childTnLst>
+            <p:seq concurrent="1" nextAc="seek">
+              <p:cTn id="2" dur="indefinite" nodeType="mainSeq">
+                <p:childTnLst>
+                  <p:par>
+                    <p:cTn id="3" fill="hold">
+                      <p:stCondLst>
+                        <p:cond delay="indefinite"/>
+                        <p:cond evt="onBegin" delay="0">
+                          <p:tn val="2"/>
+                        </p:cond>
+                      </p:stCondLst>
+                      <p:childTnLst>
+                        <p:par>
+                          <p:cTn id="4" fill="hold">
+                            <p:stCondLst>
+                              <p:cond delay="0"/>
+                            </p:stCondLst>
+                            <p:childTnLst>
+                              <p:par>
+                                <p:cTn id="5" presetID="10" presetClass="entr" presetSubtype="0" fill="hold" grpId="0" nodeType="afterEffect">
+                                  <p:stCondLst>
+                                    <p:cond delay="0"/>
+                                  </p:stCondLst>
+                                  <p:childTnLst>
+                                    <p:set>
+                                      <p:cBhvr>
+                                        <p:cTn id="6" dur="1" fill="hold">
+                                          <p:stCondLst>
+                                            <p:cond delay="0"/>
+                                          </p:stCondLst>
+                                        </p:cTn>
+                                        <p:tgtEl>
+                                          <p:spTgt spid="2"/>
+                                        </p:tgtEl>
+                                        <p:attrNameLst>
+                                          <p:attrName>style.visibility</p:attrName>
+                                        </p:attrNameLst>
+                                      </p:cBhvr>
+                                      <p:to>
+                                        <p:strVal val="visible"/>
+                                      </p:to>
+                                    </p:set>
+                                    <p:animEffect transition="in" filter="fade">
+                                      <p:cBhvr>
+                                        <p:cTn id="7" dur="500"/>
+                                        <p:tgtEl>
+                                          <p:spTgt spid="2"/>
+                                        </p:tgtEl>
+                                      </p:cBhvr>
+                                    </p:animEffect>
+                                  </p:childTnLst>
+                                </p:cTn>
+                              </p:par>
+                              <p:par>
+                                <p:cTn id="8" presetID="22" presetClass="entr" presetSubtype="8" fill="hold" nodeType="withEffect">
+                                  <p:stCondLst>
+                                    <p:cond delay="0"/>
+                                  </p:stCondLst>
+                                  <p:childTnLst>
+                                    <p:set>
+                                      <p:cBhvr>
+                                        <p:cTn id="9" dur="1" fill="hold">
+                                          <p:stCondLst>
+                                            <p:cond delay="0"/>
+                                          </p:stCondLst>
+                                        </p:cTn>
+                                        <p:tgtEl>
+                                          <p:spTgt spid="5"/>
+                                        </p:tgtEl>
+                                        <p:attrNameLst>
+                                          <p:attrName>style.visibility</p:attrName>
+                                        </p:attrNameLst>
+                                      </p:cBhvr>
+                                      <p:to>
+                                        <p:strVal val="visible"/>
+                                      </p:to>
+                                    </p:set>
+                                    <p:animEffect transition="in" filter="wipe(right)">
+                                      <p:cBhvr>
+                                        <p:cTn id="10" dur="500"/>
+                                        <p:tgtEl>
+                                          <p:spTgt spid="5"/>
+                                        </p:tgtEl>
+                                      </p:cBhvr>
+                                    </p:animEffect>
+                                  </p:childTnLst>
+                                </p:cTn>
+                              </p:par>
+                            </p:childTnLst>
+                          </p:cTn>
+                        </p:par>
+                        <p:par>
+                          <p:cTn id="11" fill="hold">
+                            <p:stCondLst>
+                              <p:cond delay="500"/>
+                            </p:stCondLst>
+                            <p:childTnLst>
+                              <p:par>
+                                <p:cTn id="12" presetID="10" presetClass="entr" presetSubtype="0" fill="hold" grpId="0" nodeType="afterEffect">
+                                  <p:stCondLst>
+                                    <p:cond delay="0"/>
+                                  </p:stCondLst>
+                                  <p:childTnLst>
+                                    <p:set>
+                                      <p:cBhvr>
+                                        <p:cTn id="13" dur="1" fill="hold">
+                                          <p:stCondLst>
+                                            <p:cond delay="0"/>
+                                          </p:stCondLst>
+                                        </p:cTn>
+                                        <p:tgtEl>
+                                          <p:spTgt spid="6"/>
+                                        </p:tgtEl>
+                                        <p:attrNameLst>
+                                          <p:attrName>style.visibility</p:attrName>
+                                        </p:attrNameLst>
+                                      </p:cBhvr>
+                                      <p:to>
+                                        <p:strVal val="visible"/>
+                                      </p:to>
+                                    </p:set>
+                                    <p:animEffect transition="in" filter="fade">
+                                      <p:cBhvr>
+                                        <p:cTn id="14" dur="500"/>
+                                        <p:tgtEl>
+                                          <p:spTgt spid="6"/>
+                                        </p:tgtEl>
+                                      </p:cBhvr>
+                                    </p:animEffect>
+                                  </p:childTnLst>
+                                </p:cTn>
+                              </p:par>
+                            </p:childTnLst>
+                          </p:cTn>
+                        </p:par>
+                        <p:par>
+                          <p:cTn id="15" fill="hold">
+                            <p:stCondLst>
+                              <p:cond delay="1000"/>
+                            </p:stCondLst>
+                            <p:childTnLst>
+                              <p:par>
+                                <p:cTn id="16" presetID="22" presetClass="entr" presetSubtype="8" fill="hold" grpId="0" nodeType="afterEffect">
+                                  <p:stCondLst>
+                                    <p:cond delay="0"/>
+                                  </p:stCondLst>
+                                  <p:childTnLst>
+                                    <p:set>
+                                      <p:cBhvr>
+                                        <p:cTn id="17" dur="1" fill="hold">
+                                          <p:stCondLst>
+                                            <p:cond delay="0"/>
+                                          </p:stCondLst>
+                                        </p:cTn>
+                                        <p:tgtEl>
+                                          <p:spTgt spid="3"/>
+                                        </p:tgtEl>
+                                        <p:attrNameLst>
+                                          <p:attrName>style.visibility</p:attrName>
+                                        </p:attrNameLst>
+                                      </p:cBhvr>
+                                      <p:to>
+                                        <p:strVal val="visible"/>
+                                      </p:to>
+                                    </p:set>
+                                    <p:animEffect transition="in" filter="wipe(right)">
+                                      <p:cBhvr>
+                                        <p:cTn id="18" dur="500"/>
+                                        <p:tgtEl>
+                                          <p:spTgt spid="3"/>
+                                        </p:tgtEl>
+                                      </p:cBhvr>
+                                    </p:animEffect>
+                                  </p:childTnLst>
+                                </p:cTn>
+                              </p:par>
+                            </p:childTnLst>
+                          </p:cTn>
+                        </p:par>
+                        <p:par>
+                          <p:cTn id="19" fill="hold">
+                            <p:stCondLst>
+                              <p:cond delay="1500"/>
+                            </p:stCondLst>
+                            <p:childTnLst>
+                              <p:par>
+                                <p:cTn id="20" presetID="10" presetClass="entr" presetSubtype="0" fill="hold" grpId="0" nodeType="afterEffect">
+                                  <p:stCondLst>
+                                    <p:cond delay="0"/>
+                                  </p:stCondLst>
+                                  <p:childTnLst>
+                                    <p:set>
+                                      <p:cBhvr>
+                                        <p:cTn id="21" dur="1" fill="hold">
+                                          <p:stCondLst>
+                                            <p:cond delay="0"/>
+                                          </p:stCondLst>
+                                        </p:cTn>
+                                        <p:tgtEl>
+                                          <p:spTgt spid="7"/>
+                                        </p:tgtEl>
+                                        <p:attrNameLst>
+                                          <p:attrName>style.visibility</p:attrName>
+                                        </p:attrNameLst>
+                                      </p:cBhvr>
+                                      <p:to>
+                                        <p:strVal val="visible"/>
+                                      </p:to>
+                                    </p:set>
+                                    <p:animEffect transition="in" filter="fade">
+                                      <p:cBhvr>
+                                        <p:cTn id="22" dur="500"/>
+                                        <p:tgtEl>
+                                          <p:spTgt spid="7"/>
+                                        </p:tgtEl>
+                                      </p:cBhvr>
+                                    </p:animEffect>
+                                  </p:childTnLst>
+                                </p:cTn>
+                              </p:par>
+                              <p:par>
+                                <p:cTn id="23" presetID="10" presetClass="entr" presetSubtype="0" fill="hold" grpId="0" nodeType="withEffect">
+                                  <p:stCondLst>
+                                    <p:cond delay="0"/>
+                                  </p:stCondLst>
+                                  <p:childTnLst>
+                                    <p:set>
+                                      <p:cBhvr>
+                                        <p:cTn id="24" dur="1" fill="hold">
+                                          <p:stCondLst>
+                                            <p:cond delay="0"/>
+                                          </p:stCondLst>
+                                        </p:cTn>
+                                        <p:tgtEl>
+                                          <p:spTgt spid="8"/>
+                                        </p:tgtEl>
+                                        <p:attrNameLst>
+                                          <p:attrName>style.visibility</p:attrName>
+                                        </p:attrNameLst>
+                                      </p:cBhvr>
+                                      <p:to>
+                                        <p:strVal val="visible"/>
+                                      </p:to>
+                                    </p:set>
+                                    <p:animEffect transition="in" filter="fade">
+                                      <p:cBhvr>
+                                        <p:cTn id="25" dur="500"/>
+                                        <p:tgtEl>
+                                          <p:spTgt spid="8"/>
+                                        </p:tgtEl>
+                                      </p:cBhvr>
+                                    </p:animEffect>
+                                  </p:childTnLst>
+                                </p:cTn>
+                              </p:par>
+                            </p:childTnLst>
+                          </p:cTn>
+                        </p:par>
+                      </p:childTnLst>
+                    </p:cTn>
+                  </p:par>
+                </p:childTnLst>
+              </p:cTn>
+              <p:prevCondLst>
+                <p:cond evt="onPrev" delay="0">
+                  <p:tgtEl>
+                    <p:sldTgt/>
+                  </p:tgtEl>
+                </p:cond>
+              </p:prevCondLst>
+              <p:nextCondLst>
+                <p:cond evt="onNext" delay="0">
+                  <p:tgtEl>
+                    <p:sldTgt/>
+                  </p:tgtEl>
+                </p:cond>
+              </p:nextCondLst>
+            </p:seq>
+          </p:childTnLst>
+        </p:cTn>
+      </p:par>
+    </p:tnLst>
+    <p:bldLst>
+      <p:bldP spid="2" grpId="0" animBg="1"/>
+      <p:bldP spid="6" grpId="0" animBg="1"/>
+      <p:bldGraphic spid="3" grpId="0">
+        <p:bldAsOne/>
+      </p:bldGraphic>
+      <p:bldP spid="7" grpId="0" animBg="1"/>
+      <p:bldP spid="8" grpId="0" animBg="1"/>
+    </p:bldLst>
+  </p:timing>
 </p:sld>
 </file>
 
@@ -6960,7 +8014,7 @@
                 </a:solidFill>
                 <a:latin typeface="Cambria"/>
               </a:rPr>
-              <a:t>Attractiveness Scores</a:t>
+              <a:t>Other Research</a:t>
             </a:r>
           </a:p>
         </p:txBody>
@@ -6976,8 +8030,8 @@
           </p:nvPr>
         </p:nvGraphicFramePr>
         <p:xfrm>
-          <a:off x="723900" y="1965960"/>
-          <a:ext cx="10744200" cy="3383280"/>
+          <a:off x="701040" y="1920240"/>
+          <a:ext cx="10789920" cy="4023360"/>
         </p:xfrm>
         <a:graphic>
           <a:graphicData uri="http://schemas.openxmlformats.org/drawingml/2006/table">
@@ -6986,15 +8040,11 @@
                 <a:tableStyleId>{5940675A-B579-460E-94D1-54222C63F5DA}</a:tableStyleId>
               </a:tblPr>
               <a:tblGrid>
-                <a:gridCol w="2743200"/>
-                <a:gridCol w="1325880"/>
-                <a:gridCol w="1325880"/>
-                <a:gridCol w="1325880"/>
-                <a:gridCol w="1325880"/>
-                <a:gridCol w="1325880"/>
-                <a:gridCol w="1371600"/>
+                <a:gridCol w="6035040"/>
+                <a:gridCol w="1737360"/>
+                <a:gridCol w="3017520"/>
               </a:tblGrid>
-              <a:tr h="731520">
+              <a:tr h="457200">
                 <a:tc>
                   <a:txBody>
                     <a:bodyPr/>
@@ -7002,13 +8052,13 @@
                     <a:p>
                       <a:pPr algn="l"/>
                       <a:r>
-                        <a:rPr sz="1600" b="1">
+                        <a:rPr sz="1400" b="1">
                           <a:solidFill>
                             <a:srgbClr val="FFFFFF"/>
                           </a:solidFill>
                           <a:latin typeface="Calibri"/>
                         </a:rPr>
-                        <a:t>Segment</a:t>
+                        <a:t>What the research found</a:t>
                       </a:r>
                     </a:p>
                   </a:txBody>
@@ -7061,13 +8111,13 @@
                     <a:p>
                       <a:pPr algn="ctr"/>
                       <a:r>
-                        <a:rPr sz="1600" b="1">
+                        <a:rPr sz="1400" b="1">
                           <a:solidFill>
                             <a:srgbClr val="FFFFFF"/>
                           </a:solidFill>
                           <a:latin typeface="Calibri"/>
                         </a:rPr>
-                        <a:t>Interest (30%)</a:t>
+                        <a:t>Supports</a:t>
                       </a:r>
                     </a:p>
                   </a:txBody>
@@ -7120,249 +8170,13 @@
                     <a:p>
                       <a:pPr algn="ctr"/>
                       <a:r>
-                        <a:rPr sz="1600" b="1">
+                        <a:rPr sz="1400" b="1">
                           <a:solidFill>
                             <a:srgbClr val="FFFFFF"/>
                           </a:solidFill>
                           <a:latin typeface="Calibri"/>
                         </a:rPr>
-                        <a:t>Growth (20%)</a:t>
-                      </a:r>
-                    </a:p>
-                  </a:txBody>
-                  <a:tcPr anchor="ctr">
-                    <a:lnL w="12700" cap="flat" cmpd="sng" algn="ctr">
-                      <a:solidFill>
-                        <a:srgbClr val="BFBFBF"/>
-                      </a:solidFill>
-                      <a:prstDash val="solid"/>
-                      <a:round/>
-                      <a:headEnd type="none" w="med" len="med"/>
-                      <a:tailEnd type="none" w="med" len="med"/>
-                    </a:lnL>
-                    <a:lnR w="12700" cap="flat" cmpd="sng" algn="ctr">
-                      <a:solidFill>
-                        <a:srgbClr val="BFBFBF"/>
-                      </a:solidFill>
-                      <a:prstDash val="solid"/>
-                      <a:round/>
-                      <a:headEnd type="none" w="med" len="med"/>
-                      <a:tailEnd type="none" w="med" len="med"/>
-                    </a:lnR>
-                    <a:lnT w="12700" cap="flat" cmpd="sng" algn="ctr">
-                      <a:solidFill>
-                        <a:srgbClr val="BFBFBF"/>
-                      </a:solidFill>
-                      <a:prstDash val="solid"/>
-                      <a:round/>
-                      <a:headEnd type="none" w="med" len="med"/>
-                      <a:tailEnd type="none" w="med" len="med"/>
-                    </a:lnT>
-                    <a:lnB w="12700" cap="flat" cmpd="sng" algn="ctr">
-                      <a:solidFill>
-                        <a:srgbClr val="BFBFBF"/>
-                      </a:solidFill>
-                      <a:prstDash val="solid"/>
-                      <a:round/>
-                      <a:headEnd type="none" w="med" len="med"/>
-                      <a:tailEnd type="none" w="med" len="med"/>
-                    </a:lnB>
-                    <a:solidFill>
-                      <a:srgbClr val="1F3864"/>
-                    </a:solidFill>
-                  </a:tcPr>
-                </a:tc>
-                <a:tc>
-                  <a:txBody>
-                    <a:bodyPr/>
-                    <a:lstStyle/>
-                    <a:p>
-                      <a:pPr algn="ctr"/>
-                      <a:r>
-                        <a:rPr sz="1600" b="1">
-                          <a:solidFill>
-                            <a:srgbClr val="FFFFFF"/>
-                          </a:solidFill>
-                          <a:latin typeface="Calibri"/>
-                        </a:rPr>
-                        <a:t>Spread (15%)</a:t>
-                      </a:r>
-                    </a:p>
-                  </a:txBody>
-                  <a:tcPr anchor="ctr">
-                    <a:lnL w="12700" cap="flat" cmpd="sng" algn="ctr">
-                      <a:solidFill>
-                        <a:srgbClr val="BFBFBF"/>
-                      </a:solidFill>
-                      <a:prstDash val="solid"/>
-                      <a:round/>
-                      <a:headEnd type="none" w="med" len="med"/>
-                      <a:tailEnd type="none" w="med" len="med"/>
-                    </a:lnL>
-                    <a:lnR w="12700" cap="flat" cmpd="sng" algn="ctr">
-                      <a:solidFill>
-                        <a:srgbClr val="BFBFBF"/>
-                      </a:solidFill>
-                      <a:prstDash val="solid"/>
-                      <a:round/>
-                      <a:headEnd type="none" w="med" len="med"/>
-                      <a:tailEnd type="none" w="med" len="med"/>
-                    </a:lnR>
-                    <a:lnT w="12700" cap="flat" cmpd="sng" algn="ctr">
-                      <a:solidFill>
-                        <a:srgbClr val="BFBFBF"/>
-                      </a:solidFill>
-                      <a:prstDash val="solid"/>
-                      <a:round/>
-                      <a:headEnd type="none" w="med" len="med"/>
-                      <a:tailEnd type="none" w="med" len="med"/>
-                    </a:lnT>
-                    <a:lnB w="12700" cap="flat" cmpd="sng" algn="ctr">
-                      <a:solidFill>
-                        <a:srgbClr val="BFBFBF"/>
-                      </a:solidFill>
-                      <a:prstDash val="solid"/>
-                      <a:round/>
-                      <a:headEnd type="none" w="med" len="med"/>
-                      <a:tailEnd type="none" w="med" len="med"/>
-                    </a:lnB>
-                    <a:solidFill>
-                      <a:srgbClr val="1F3864"/>
-                    </a:solidFill>
-                  </a:tcPr>
-                </a:tc>
-                <a:tc>
-                  <a:txBody>
-                    <a:bodyPr/>
-                    <a:lstStyle/>
-                    <a:p>
-                      <a:pPr algn="ctr"/>
-                      <a:r>
-                        <a:rPr sz="1600" b="1">
-                          <a:solidFill>
-                            <a:srgbClr val="FFFFFF"/>
-                          </a:solidFill>
-                          <a:latin typeface="Calibri"/>
-                        </a:rPr>
-                        <a:t>Ability to pay (20%)</a:t>
-                      </a:r>
-                    </a:p>
-                  </a:txBody>
-                  <a:tcPr anchor="ctr">
-                    <a:lnL w="12700" cap="flat" cmpd="sng" algn="ctr">
-                      <a:solidFill>
-                        <a:srgbClr val="BFBFBF"/>
-                      </a:solidFill>
-                      <a:prstDash val="solid"/>
-                      <a:round/>
-                      <a:headEnd type="none" w="med" len="med"/>
-                      <a:tailEnd type="none" w="med" len="med"/>
-                    </a:lnL>
-                    <a:lnR w="12700" cap="flat" cmpd="sng" algn="ctr">
-                      <a:solidFill>
-                        <a:srgbClr val="BFBFBF"/>
-                      </a:solidFill>
-                      <a:prstDash val="solid"/>
-                      <a:round/>
-                      <a:headEnd type="none" w="med" len="med"/>
-                      <a:tailEnd type="none" w="med" len="med"/>
-                    </a:lnR>
-                    <a:lnT w="12700" cap="flat" cmpd="sng" algn="ctr">
-                      <a:solidFill>
-                        <a:srgbClr val="BFBFBF"/>
-                      </a:solidFill>
-                      <a:prstDash val="solid"/>
-                      <a:round/>
-                      <a:headEnd type="none" w="med" len="med"/>
-                      <a:tailEnd type="none" w="med" len="med"/>
-                    </a:lnT>
-                    <a:lnB w="12700" cap="flat" cmpd="sng" algn="ctr">
-                      <a:solidFill>
-                        <a:srgbClr val="BFBFBF"/>
-                      </a:solidFill>
-                      <a:prstDash val="solid"/>
-                      <a:round/>
-                      <a:headEnd type="none" w="med" len="med"/>
-                      <a:tailEnd type="none" w="med" len="med"/>
-                    </a:lnB>
-                    <a:solidFill>
-                      <a:srgbClr val="1F3864"/>
-                    </a:solidFill>
-                  </a:tcPr>
-                </a:tc>
-                <a:tc>
-                  <a:txBody>
-                    <a:bodyPr/>
-                    <a:lstStyle/>
-                    <a:p>
-                      <a:pPr algn="ctr"/>
-                      <a:r>
-                        <a:rPr sz="1600" b="1">
-                          <a:solidFill>
-                            <a:srgbClr val="FFFFFF"/>
-                          </a:solidFill>
-                          <a:latin typeface="Calibri"/>
-                        </a:rPr>
-                        <a:t>Competition (15%)</a:t>
-                      </a:r>
-                    </a:p>
-                  </a:txBody>
-                  <a:tcPr anchor="ctr">
-                    <a:lnL w="12700" cap="flat" cmpd="sng" algn="ctr">
-                      <a:solidFill>
-                        <a:srgbClr val="BFBFBF"/>
-                      </a:solidFill>
-                      <a:prstDash val="solid"/>
-                      <a:round/>
-                      <a:headEnd type="none" w="med" len="med"/>
-                      <a:tailEnd type="none" w="med" len="med"/>
-                    </a:lnL>
-                    <a:lnR w="12700" cap="flat" cmpd="sng" algn="ctr">
-                      <a:solidFill>
-                        <a:srgbClr val="BFBFBF"/>
-                      </a:solidFill>
-                      <a:prstDash val="solid"/>
-                      <a:round/>
-                      <a:headEnd type="none" w="med" len="med"/>
-                      <a:tailEnd type="none" w="med" len="med"/>
-                    </a:lnR>
-                    <a:lnT w="12700" cap="flat" cmpd="sng" algn="ctr">
-                      <a:solidFill>
-                        <a:srgbClr val="BFBFBF"/>
-                      </a:solidFill>
-                      <a:prstDash val="solid"/>
-                      <a:round/>
-                      <a:headEnd type="none" w="med" len="med"/>
-                      <a:tailEnd type="none" w="med" len="med"/>
-                    </a:lnT>
-                    <a:lnB w="12700" cap="flat" cmpd="sng" algn="ctr">
-                      <a:solidFill>
-                        <a:srgbClr val="BFBFBF"/>
-                      </a:solidFill>
-                      <a:prstDash val="solid"/>
-                      <a:round/>
-                      <a:headEnd type="none" w="med" len="med"/>
-                      <a:tailEnd type="none" w="med" len="med"/>
-                    </a:lnB>
-                    <a:solidFill>
-                      <a:srgbClr val="1F3864"/>
-                    </a:solidFill>
-                  </a:tcPr>
-                </a:tc>
-                <a:tc>
-                  <a:txBody>
-                    <a:bodyPr/>
-                    <a:lstStyle/>
-                    <a:p>
-                      <a:pPr algn="ctr"/>
-                      <a:r>
-                        <a:rPr sz="1600" b="1">
-                          <a:solidFill>
-                            <a:srgbClr val="FFFFFF"/>
-                          </a:solidFill>
-                          <a:latin typeface="Calibri"/>
-                        </a:rPr>
-                        <a:t>Score (of 5)</a:t>
+                        <a:t>Source</a:t>
                       </a:r>
                     </a:p>
                   </a:txBody>
@@ -7409,7 +8223,7 @@
                   </a:tcPr>
                 </a:tc>
               </a:tr>
-              <a:tr h="530352">
+              <a:tr h="713232">
                 <a:tc>
                   <a:txBody>
                     <a:bodyPr/>
@@ -7417,13 +8231,13 @@
                     <a:p>
                       <a:pPr algn="l"/>
                       <a:r>
-                        <a:rPr sz="1600" b="1">
+                        <a:rPr sz="1400" b="0">
                           <a:solidFill>
                             <a:srgbClr val="000000"/>
                           </a:solidFill>
                           <a:latin typeface="Calibri"/>
                         </a:rPr>
-                        <a:t>Cybersecurity learners</a:t>
+                        <a:t>The CAC confirmed a cyber breach of its systems in April 2026, and the data protection commission (NDPC) opened an investigation.</a:t>
                       </a:r>
                     </a:p>
                   </a:txBody>
@@ -7474,13 +8288,13 @@
                     <a:p>
                       <a:pPr algn="ctr"/>
                       <a:r>
-                        <a:rPr sz="1600" b="1">
+                        <a:rPr sz="1400" b="1">
                           <a:solidFill>
                             <a:srgbClr val="000000"/>
                           </a:solidFill>
                           <a:latin typeface="Calibri"/>
                         </a:rPr>
-                        <a:t>5</a:t>
+                        <a:t>Cybersecurity</a:t>
                       </a:r>
                     </a:p>
                   </a:txBody>
@@ -7531,13 +8345,13 @@
                     <a:p>
                       <a:pPr algn="ctr"/>
                       <a:r>
-                        <a:rPr sz="1600" b="1">
+                        <a:rPr sz="1400" b="0">
                           <a:solidFill>
                             <a:srgbClr val="000000"/>
                           </a:solidFill>
                           <a:latin typeface="Calibri"/>
                         </a:rPr>
-                        <a:t>5</a:t>
+                        <a:t>AllAfrica, 16 April 2026</a:t>
                       </a:r>
                     </a:p>
                   </a:txBody>
@@ -7581,236 +8395,8 @@
                     <a:noFill/>
                   </a:tcPr>
                 </a:tc>
-                <a:tc>
-                  <a:txBody>
-                    <a:bodyPr/>
-                    <a:lstStyle/>
-                    <a:p>
-                      <a:pPr algn="ctr"/>
-                      <a:r>
-                        <a:rPr sz="1600" b="1">
-                          <a:solidFill>
-                            <a:srgbClr val="000000"/>
-                          </a:solidFill>
-                          <a:latin typeface="Calibri"/>
-                        </a:rPr>
-                        <a:t>5</a:t>
-                      </a:r>
-                    </a:p>
-                  </a:txBody>
-                  <a:tcPr anchor="ctr">
-                    <a:lnL w="12700" cap="flat" cmpd="sng" algn="ctr">
-                      <a:solidFill>
-                        <a:srgbClr val="BFBFBF"/>
-                      </a:solidFill>
-                      <a:prstDash val="solid"/>
-                      <a:round/>
-                      <a:headEnd type="none" w="med" len="med"/>
-                      <a:tailEnd type="none" w="med" len="med"/>
-                    </a:lnL>
-                    <a:lnR w="12700" cap="flat" cmpd="sng" algn="ctr">
-                      <a:solidFill>
-                        <a:srgbClr val="BFBFBF"/>
-                      </a:solidFill>
-                      <a:prstDash val="solid"/>
-                      <a:round/>
-                      <a:headEnd type="none" w="med" len="med"/>
-                      <a:tailEnd type="none" w="med" len="med"/>
-                    </a:lnR>
-                    <a:lnT w="12700" cap="flat" cmpd="sng" algn="ctr">
-                      <a:solidFill>
-                        <a:srgbClr val="BFBFBF"/>
-                      </a:solidFill>
-                      <a:prstDash val="solid"/>
-                      <a:round/>
-                      <a:headEnd type="none" w="med" len="med"/>
-                      <a:tailEnd type="none" w="med" len="med"/>
-                    </a:lnT>
-                    <a:lnB w="12700" cap="flat" cmpd="sng" algn="ctr">
-                      <a:solidFill>
-                        <a:srgbClr val="BFBFBF"/>
-                      </a:solidFill>
-                      <a:prstDash val="solid"/>
-                      <a:round/>
-                      <a:headEnd type="none" w="med" len="med"/>
-                      <a:tailEnd type="none" w="med" len="med"/>
-                    </a:lnB>
-                    <a:noFill/>
-                  </a:tcPr>
-                </a:tc>
-                <a:tc>
-                  <a:txBody>
-                    <a:bodyPr/>
-                    <a:lstStyle/>
-                    <a:p>
-                      <a:pPr algn="ctr"/>
-                      <a:r>
-                        <a:rPr sz="1600" b="1">
-                          <a:solidFill>
-                            <a:srgbClr val="000000"/>
-                          </a:solidFill>
-                          <a:latin typeface="Calibri"/>
-                        </a:rPr>
-                        <a:t>4</a:t>
-                      </a:r>
-                    </a:p>
-                  </a:txBody>
-                  <a:tcPr anchor="ctr">
-                    <a:lnL w="12700" cap="flat" cmpd="sng" algn="ctr">
-                      <a:solidFill>
-                        <a:srgbClr val="BFBFBF"/>
-                      </a:solidFill>
-                      <a:prstDash val="solid"/>
-                      <a:round/>
-                      <a:headEnd type="none" w="med" len="med"/>
-                      <a:tailEnd type="none" w="med" len="med"/>
-                    </a:lnL>
-                    <a:lnR w="12700" cap="flat" cmpd="sng" algn="ctr">
-                      <a:solidFill>
-                        <a:srgbClr val="BFBFBF"/>
-                      </a:solidFill>
-                      <a:prstDash val="solid"/>
-                      <a:round/>
-                      <a:headEnd type="none" w="med" len="med"/>
-                      <a:tailEnd type="none" w="med" len="med"/>
-                    </a:lnR>
-                    <a:lnT w="12700" cap="flat" cmpd="sng" algn="ctr">
-                      <a:solidFill>
-                        <a:srgbClr val="BFBFBF"/>
-                      </a:solidFill>
-                      <a:prstDash val="solid"/>
-                      <a:round/>
-                      <a:headEnd type="none" w="med" len="med"/>
-                      <a:tailEnd type="none" w="med" len="med"/>
-                    </a:lnT>
-                    <a:lnB w="12700" cap="flat" cmpd="sng" algn="ctr">
-                      <a:solidFill>
-                        <a:srgbClr val="BFBFBF"/>
-                      </a:solidFill>
-                      <a:prstDash val="solid"/>
-                      <a:round/>
-                      <a:headEnd type="none" w="med" len="med"/>
-                      <a:tailEnd type="none" w="med" len="med"/>
-                    </a:lnB>
-                    <a:noFill/>
-                  </a:tcPr>
-                </a:tc>
-                <a:tc>
-                  <a:txBody>
-                    <a:bodyPr/>
-                    <a:lstStyle/>
-                    <a:p>
-                      <a:pPr algn="ctr"/>
-                      <a:r>
-                        <a:rPr sz="1600" b="1">
-                          <a:solidFill>
-                            <a:srgbClr val="000000"/>
-                          </a:solidFill>
-                          <a:latin typeface="Calibri"/>
-                        </a:rPr>
-                        <a:t>3</a:t>
-                      </a:r>
-                    </a:p>
-                  </a:txBody>
-                  <a:tcPr anchor="ctr">
-                    <a:lnL w="12700" cap="flat" cmpd="sng" algn="ctr">
-                      <a:solidFill>
-                        <a:srgbClr val="BFBFBF"/>
-                      </a:solidFill>
-                      <a:prstDash val="solid"/>
-                      <a:round/>
-                      <a:headEnd type="none" w="med" len="med"/>
-                      <a:tailEnd type="none" w="med" len="med"/>
-                    </a:lnL>
-                    <a:lnR w="12700" cap="flat" cmpd="sng" algn="ctr">
-                      <a:solidFill>
-                        <a:srgbClr val="BFBFBF"/>
-                      </a:solidFill>
-                      <a:prstDash val="solid"/>
-                      <a:round/>
-                      <a:headEnd type="none" w="med" len="med"/>
-                      <a:tailEnd type="none" w="med" len="med"/>
-                    </a:lnR>
-                    <a:lnT w="12700" cap="flat" cmpd="sng" algn="ctr">
-                      <a:solidFill>
-                        <a:srgbClr val="BFBFBF"/>
-                      </a:solidFill>
-                      <a:prstDash val="solid"/>
-                      <a:round/>
-                      <a:headEnd type="none" w="med" len="med"/>
-                      <a:tailEnd type="none" w="med" len="med"/>
-                    </a:lnT>
-                    <a:lnB w="12700" cap="flat" cmpd="sng" algn="ctr">
-                      <a:solidFill>
-                        <a:srgbClr val="BFBFBF"/>
-                      </a:solidFill>
-                      <a:prstDash val="solid"/>
-                      <a:round/>
-                      <a:headEnd type="none" w="med" len="med"/>
-                      <a:tailEnd type="none" w="med" len="med"/>
-                    </a:lnB>
-                    <a:noFill/>
-                  </a:tcPr>
-                </a:tc>
-                <a:tc>
-                  <a:txBody>
-                    <a:bodyPr/>
-                    <a:lstStyle/>
-                    <a:p>
-                      <a:pPr algn="ctr"/>
-                      <a:r>
-                        <a:rPr sz="1600" b="1">
-                          <a:solidFill>
-                            <a:srgbClr val="000000"/>
-                          </a:solidFill>
-                          <a:latin typeface="Calibri"/>
-                        </a:rPr>
-                        <a:t>4.50</a:t>
-                      </a:r>
-                    </a:p>
-                  </a:txBody>
-                  <a:tcPr anchor="ctr">
-                    <a:lnL w="12700" cap="flat" cmpd="sng" algn="ctr">
-                      <a:solidFill>
-                        <a:srgbClr val="BFBFBF"/>
-                      </a:solidFill>
-                      <a:prstDash val="solid"/>
-                      <a:round/>
-                      <a:headEnd type="none" w="med" len="med"/>
-                      <a:tailEnd type="none" w="med" len="med"/>
-                    </a:lnL>
-                    <a:lnR w="12700" cap="flat" cmpd="sng" algn="ctr">
-                      <a:solidFill>
-                        <a:srgbClr val="BFBFBF"/>
-                      </a:solidFill>
-                      <a:prstDash val="solid"/>
-                      <a:round/>
-                      <a:headEnd type="none" w="med" len="med"/>
-                      <a:tailEnd type="none" w="med" len="med"/>
-                    </a:lnR>
-                    <a:lnT w="12700" cap="flat" cmpd="sng" algn="ctr">
-                      <a:solidFill>
-                        <a:srgbClr val="BFBFBF"/>
-                      </a:solidFill>
-                      <a:prstDash val="solid"/>
-                      <a:round/>
-                      <a:headEnd type="none" w="med" len="med"/>
-                      <a:tailEnd type="none" w="med" len="med"/>
-                    </a:lnT>
-                    <a:lnB w="12700" cap="flat" cmpd="sng" algn="ctr">
-                      <a:solidFill>
-                        <a:srgbClr val="BFBFBF"/>
-                      </a:solidFill>
-                      <a:prstDash val="solid"/>
-                      <a:round/>
-                      <a:headEnd type="none" w="med" len="med"/>
-                      <a:tailEnd type="none" w="med" len="med"/>
-                    </a:lnB>
-                    <a:noFill/>
-                  </a:tcPr>
-                </a:tc>
               </a:tr>
-              <a:tr h="530352">
+              <a:tr h="713232">
                 <a:tc>
                   <a:txBody>
                     <a:bodyPr/>
@@ -7818,13 +8404,13 @@
                     <a:p>
                       <a:pPr algn="l"/>
                       <a:r>
-                        <a:rPr sz="1600" b="0">
+                        <a:rPr sz="1400" b="0">
                           <a:solidFill>
                             <a:srgbClr val="000000"/>
                           </a:solidFill>
                           <a:latin typeface="Calibri"/>
                         </a:rPr>
-                        <a:t>Digital marketing learners</a:t>
+                        <a:t>Nigeria had only about 8,352 cybersecurity professionals in 2023, against 57,269 in South Africa.</a:t>
                       </a:r>
                     </a:p>
                   </a:txBody>
@@ -7877,13 +8463,13 @@
                     <a:p>
                       <a:pPr algn="ctr"/>
                       <a:r>
-                        <a:rPr sz="1600" b="0">
+                        <a:rPr sz="1400" b="1">
                           <a:solidFill>
                             <a:srgbClr val="000000"/>
                           </a:solidFill>
                           <a:latin typeface="Calibri"/>
                         </a:rPr>
-                        <a:t>4</a:t>
+                        <a:t>Cybersecurity</a:t>
                       </a:r>
                     </a:p>
                   </a:txBody>
@@ -7936,13 +8522,247 @@
                     <a:p>
                       <a:pPr algn="ctr"/>
                       <a:r>
-                        <a:rPr sz="1600" b="0">
+                        <a:rPr sz="1400" b="0">
                           <a:solidFill>
                             <a:srgbClr val="000000"/>
                           </a:solidFill>
                           <a:latin typeface="Calibri"/>
                         </a:rPr>
-                        <a:t>3</a:t>
+                        <a:t>ISC2 figures, reported by CompTIA</a:t>
+                      </a:r>
+                    </a:p>
+                  </a:txBody>
+                  <a:tcPr anchor="ctr">
+                    <a:lnL w="12700" cap="flat" cmpd="sng" algn="ctr">
+                      <a:solidFill>
+                        <a:srgbClr val="BFBFBF"/>
+                      </a:solidFill>
+                      <a:prstDash val="solid"/>
+                      <a:round/>
+                      <a:headEnd type="none" w="med" len="med"/>
+                      <a:tailEnd type="none" w="med" len="med"/>
+                    </a:lnL>
+                    <a:lnR w="12700" cap="flat" cmpd="sng" algn="ctr">
+                      <a:solidFill>
+                        <a:srgbClr val="BFBFBF"/>
+                      </a:solidFill>
+                      <a:prstDash val="solid"/>
+                      <a:round/>
+                      <a:headEnd type="none" w="med" len="med"/>
+                      <a:tailEnd type="none" w="med" len="med"/>
+                    </a:lnR>
+                    <a:lnT w="12700" cap="flat" cmpd="sng" algn="ctr">
+                      <a:solidFill>
+                        <a:srgbClr val="BFBFBF"/>
+                      </a:solidFill>
+                      <a:prstDash val="solid"/>
+                      <a:round/>
+                      <a:headEnd type="none" w="med" len="med"/>
+                      <a:tailEnd type="none" w="med" len="med"/>
+                    </a:lnT>
+                    <a:lnB w="12700" cap="flat" cmpd="sng" algn="ctr">
+                      <a:solidFill>
+                        <a:srgbClr val="BFBFBF"/>
+                      </a:solidFill>
+                      <a:prstDash val="solid"/>
+                      <a:round/>
+                      <a:headEnd type="none" w="med" len="med"/>
+                      <a:tailEnd type="none" w="med" len="med"/>
+                    </a:lnB>
+                    <a:solidFill>
+                      <a:srgbClr val="FBE5D6"/>
+                    </a:solidFill>
+                  </a:tcPr>
+                </a:tc>
+              </a:tr>
+              <a:tr h="713232">
+                <a:tc>
+                  <a:txBody>
+                    <a:bodyPr/>
+                    <a:lstStyle/>
+                    <a:p>
+                      <a:pPr algn="l"/>
+                      <a:r>
+                        <a:rPr sz="1400" b="0">
+                          <a:solidFill>
+                            <a:srgbClr val="000000"/>
+                          </a:solidFill>
+                          <a:latin typeface="Calibri"/>
+                        </a:rPr>
+                        <a:t>Nigerian organisations faced about 4,388 cyber attacks a week in early 2025, 47% more than a year before.</a:t>
+                      </a:r>
+                    </a:p>
+                  </a:txBody>
+                  <a:tcPr anchor="ctr">
+                    <a:lnL w="12700" cap="flat" cmpd="sng" algn="ctr">
+                      <a:solidFill>
+                        <a:srgbClr val="BFBFBF"/>
+                      </a:solidFill>
+                      <a:prstDash val="solid"/>
+                      <a:round/>
+                      <a:headEnd type="none" w="med" len="med"/>
+                      <a:tailEnd type="none" w="med" len="med"/>
+                    </a:lnL>
+                    <a:lnR w="12700" cap="flat" cmpd="sng" algn="ctr">
+                      <a:solidFill>
+                        <a:srgbClr val="BFBFBF"/>
+                      </a:solidFill>
+                      <a:prstDash val="solid"/>
+                      <a:round/>
+                      <a:headEnd type="none" w="med" len="med"/>
+                      <a:tailEnd type="none" w="med" len="med"/>
+                    </a:lnR>
+                    <a:lnT w="12700" cap="flat" cmpd="sng" algn="ctr">
+                      <a:solidFill>
+                        <a:srgbClr val="BFBFBF"/>
+                      </a:solidFill>
+                      <a:prstDash val="solid"/>
+                      <a:round/>
+                      <a:headEnd type="none" w="med" len="med"/>
+                      <a:tailEnd type="none" w="med" len="med"/>
+                    </a:lnT>
+                    <a:lnB w="12700" cap="flat" cmpd="sng" algn="ctr">
+                      <a:solidFill>
+                        <a:srgbClr val="BFBFBF"/>
+                      </a:solidFill>
+                      <a:prstDash val="solid"/>
+                      <a:round/>
+                      <a:headEnd type="none" w="med" len="med"/>
+                      <a:tailEnd type="none" w="med" len="med"/>
+                    </a:lnB>
+                    <a:noFill/>
+                  </a:tcPr>
+                </a:tc>
+                <a:tc>
+                  <a:txBody>
+                    <a:bodyPr/>
+                    <a:lstStyle/>
+                    <a:p>
+                      <a:pPr algn="ctr"/>
+                      <a:r>
+                        <a:rPr sz="1400" b="1">
+                          <a:solidFill>
+                            <a:srgbClr val="000000"/>
+                          </a:solidFill>
+                          <a:latin typeface="Calibri"/>
+                        </a:rPr>
+                        <a:t>Cybersecurity</a:t>
+                      </a:r>
+                    </a:p>
+                  </a:txBody>
+                  <a:tcPr anchor="ctr">
+                    <a:lnL w="12700" cap="flat" cmpd="sng" algn="ctr">
+                      <a:solidFill>
+                        <a:srgbClr val="BFBFBF"/>
+                      </a:solidFill>
+                      <a:prstDash val="solid"/>
+                      <a:round/>
+                      <a:headEnd type="none" w="med" len="med"/>
+                      <a:tailEnd type="none" w="med" len="med"/>
+                    </a:lnL>
+                    <a:lnR w="12700" cap="flat" cmpd="sng" algn="ctr">
+                      <a:solidFill>
+                        <a:srgbClr val="BFBFBF"/>
+                      </a:solidFill>
+                      <a:prstDash val="solid"/>
+                      <a:round/>
+                      <a:headEnd type="none" w="med" len="med"/>
+                      <a:tailEnd type="none" w="med" len="med"/>
+                    </a:lnR>
+                    <a:lnT w="12700" cap="flat" cmpd="sng" algn="ctr">
+                      <a:solidFill>
+                        <a:srgbClr val="BFBFBF"/>
+                      </a:solidFill>
+                      <a:prstDash val="solid"/>
+                      <a:round/>
+                      <a:headEnd type="none" w="med" len="med"/>
+                      <a:tailEnd type="none" w="med" len="med"/>
+                    </a:lnT>
+                    <a:lnB w="12700" cap="flat" cmpd="sng" algn="ctr">
+                      <a:solidFill>
+                        <a:srgbClr val="BFBFBF"/>
+                      </a:solidFill>
+                      <a:prstDash val="solid"/>
+                      <a:round/>
+                      <a:headEnd type="none" w="med" len="med"/>
+                      <a:tailEnd type="none" w="med" len="med"/>
+                    </a:lnB>
+                    <a:noFill/>
+                  </a:tcPr>
+                </a:tc>
+                <a:tc>
+                  <a:txBody>
+                    <a:bodyPr/>
+                    <a:lstStyle/>
+                    <a:p>
+                      <a:pPr algn="ctr"/>
+                      <a:r>
+                        <a:rPr sz="1400" b="0">
+                          <a:solidFill>
+                            <a:srgbClr val="000000"/>
+                          </a:solidFill>
+                          <a:latin typeface="Calibri"/>
+                        </a:rPr>
+                        <a:t>Check Point, reported by BusinessDay</a:t>
+                      </a:r>
+                    </a:p>
+                  </a:txBody>
+                  <a:tcPr anchor="ctr">
+                    <a:lnL w="12700" cap="flat" cmpd="sng" algn="ctr">
+                      <a:solidFill>
+                        <a:srgbClr val="BFBFBF"/>
+                      </a:solidFill>
+                      <a:prstDash val="solid"/>
+                      <a:round/>
+                      <a:headEnd type="none" w="med" len="med"/>
+                      <a:tailEnd type="none" w="med" len="med"/>
+                    </a:lnL>
+                    <a:lnR w="12700" cap="flat" cmpd="sng" algn="ctr">
+                      <a:solidFill>
+                        <a:srgbClr val="BFBFBF"/>
+                      </a:solidFill>
+                      <a:prstDash val="solid"/>
+                      <a:round/>
+                      <a:headEnd type="none" w="med" len="med"/>
+                      <a:tailEnd type="none" w="med" len="med"/>
+                    </a:lnR>
+                    <a:lnT w="12700" cap="flat" cmpd="sng" algn="ctr">
+                      <a:solidFill>
+                        <a:srgbClr val="BFBFBF"/>
+                      </a:solidFill>
+                      <a:prstDash val="solid"/>
+                      <a:round/>
+                      <a:headEnd type="none" w="med" len="med"/>
+                      <a:tailEnd type="none" w="med" len="med"/>
+                    </a:lnT>
+                    <a:lnB w="12700" cap="flat" cmpd="sng" algn="ctr">
+                      <a:solidFill>
+                        <a:srgbClr val="BFBFBF"/>
+                      </a:solidFill>
+                      <a:prstDash val="solid"/>
+                      <a:round/>
+                      <a:headEnd type="none" w="med" len="med"/>
+                      <a:tailEnd type="none" w="med" len="med"/>
+                    </a:lnB>
+                    <a:noFill/>
+                  </a:tcPr>
+                </a:tc>
+              </a:tr>
+              <a:tr h="713232">
+                <a:tc>
+                  <a:txBody>
+                    <a:bodyPr/>
+                    <a:lstStyle/>
+                    <a:p>
+                      <a:pPr algn="l"/>
+                      <a:r>
+                        <a:rPr sz="1400" b="0">
+                          <a:solidFill>
+                            <a:srgbClr val="000000"/>
+                          </a:solidFill>
+                          <a:latin typeface="Calibri"/>
+                        </a:rPr>
+                        <a:t>About 14 million Nigerian small businesses used Facebook, Instagram and WhatsApp in 2025.</a:t>
                       </a:r>
                     </a:p>
                   </a:txBody>
@@ -7995,13 +8815,13 @@
                     <a:p>
                       <a:pPr algn="ctr"/>
                       <a:r>
-                        <a:rPr sz="1600" b="0">
+                        <a:rPr sz="1400" b="1">
                           <a:solidFill>
                             <a:srgbClr val="000000"/>
                           </a:solidFill>
                           <a:latin typeface="Calibri"/>
                         </a:rPr>
-                        <a:t>4</a:t>
+                        <a:t>Digital marketing</a:t>
                       </a:r>
                     </a:p>
                   </a:txBody>
@@ -8054,131 +8874,13 @@
                     <a:p>
                       <a:pPr algn="ctr"/>
                       <a:r>
-                        <a:rPr sz="1600" b="0">
+                        <a:rPr sz="1400" b="0">
                           <a:solidFill>
                             <a:srgbClr val="000000"/>
                           </a:solidFill>
                           <a:latin typeface="Calibri"/>
                         </a:rPr>
-                        <a:t>4</a:t>
-                      </a:r>
-                    </a:p>
-                  </a:txBody>
-                  <a:tcPr anchor="ctr">
-                    <a:lnL w="12700" cap="flat" cmpd="sng" algn="ctr">
-                      <a:solidFill>
-                        <a:srgbClr val="BFBFBF"/>
-                      </a:solidFill>
-                      <a:prstDash val="solid"/>
-                      <a:round/>
-                      <a:headEnd type="none" w="med" len="med"/>
-                      <a:tailEnd type="none" w="med" len="med"/>
-                    </a:lnL>
-                    <a:lnR w="12700" cap="flat" cmpd="sng" algn="ctr">
-                      <a:solidFill>
-                        <a:srgbClr val="BFBFBF"/>
-                      </a:solidFill>
-                      <a:prstDash val="solid"/>
-                      <a:round/>
-                      <a:headEnd type="none" w="med" len="med"/>
-                      <a:tailEnd type="none" w="med" len="med"/>
-                    </a:lnR>
-                    <a:lnT w="12700" cap="flat" cmpd="sng" algn="ctr">
-                      <a:solidFill>
-                        <a:srgbClr val="BFBFBF"/>
-                      </a:solidFill>
-                      <a:prstDash val="solid"/>
-                      <a:round/>
-                      <a:headEnd type="none" w="med" len="med"/>
-                      <a:tailEnd type="none" w="med" len="med"/>
-                    </a:lnT>
-                    <a:lnB w="12700" cap="flat" cmpd="sng" algn="ctr">
-                      <a:solidFill>
-                        <a:srgbClr val="BFBFBF"/>
-                      </a:solidFill>
-                      <a:prstDash val="solid"/>
-                      <a:round/>
-                      <a:headEnd type="none" w="med" len="med"/>
-                      <a:tailEnd type="none" w="med" len="med"/>
-                    </a:lnB>
-                    <a:solidFill>
-                      <a:srgbClr val="FBE5D6"/>
-                    </a:solidFill>
-                  </a:tcPr>
-                </a:tc>
-                <a:tc>
-                  <a:txBody>
-                    <a:bodyPr/>
-                    <a:lstStyle/>
-                    <a:p>
-                      <a:pPr algn="ctr"/>
-                      <a:r>
-                        <a:rPr sz="1600" b="0">
-                          <a:solidFill>
-                            <a:srgbClr val="000000"/>
-                          </a:solidFill>
-                          <a:latin typeface="Calibri"/>
-                        </a:rPr>
-                        <a:t>2</a:t>
-                      </a:r>
-                    </a:p>
-                  </a:txBody>
-                  <a:tcPr anchor="ctr">
-                    <a:lnL w="12700" cap="flat" cmpd="sng" algn="ctr">
-                      <a:solidFill>
-                        <a:srgbClr val="BFBFBF"/>
-                      </a:solidFill>
-                      <a:prstDash val="solid"/>
-                      <a:round/>
-                      <a:headEnd type="none" w="med" len="med"/>
-                      <a:tailEnd type="none" w="med" len="med"/>
-                    </a:lnL>
-                    <a:lnR w="12700" cap="flat" cmpd="sng" algn="ctr">
-                      <a:solidFill>
-                        <a:srgbClr val="BFBFBF"/>
-                      </a:solidFill>
-                      <a:prstDash val="solid"/>
-                      <a:round/>
-                      <a:headEnd type="none" w="med" len="med"/>
-                      <a:tailEnd type="none" w="med" len="med"/>
-                    </a:lnR>
-                    <a:lnT w="12700" cap="flat" cmpd="sng" algn="ctr">
-                      <a:solidFill>
-                        <a:srgbClr val="BFBFBF"/>
-                      </a:solidFill>
-                      <a:prstDash val="solid"/>
-                      <a:round/>
-                      <a:headEnd type="none" w="med" len="med"/>
-                      <a:tailEnd type="none" w="med" len="med"/>
-                    </a:lnT>
-                    <a:lnB w="12700" cap="flat" cmpd="sng" algn="ctr">
-                      <a:solidFill>
-                        <a:srgbClr val="BFBFBF"/>
-                      </a:solidFill>
-                      <a:prstDash val="solid"/>
-                      <a:round/>
-                      <a:headEnd type="none" w="med" len="med"/>
-                      <a:tailEnd type="none" w="med" len="med"/>
-                    </a:lnB>
-                    <a:solidFill>
-                      <a:srgbClr val="FBE5D6"/>
-                    </a:solidFill>
-                  </a:tcPr>
-                </a:tc>
-                <a:tc>
-                  <a:txBody>
-                    <a:bodyPr/>
-                    <a:lstStyle/>
-                    <a:p>
-                      <a:pPr algn="ctr"/>
-                      <a:r>
-                        <a:rPr sz="1600" b="0">
-                          <a:solidFill>
-                            <a:srgbClr val="000000"/>
-                          </a:solidFill>
-                          <a:latin typeface="Calibri"/>
-                        </a:rPr>
-                        <a:t>3.50</a:t>
+                        <a:t>Public First report for Meta, reported by IT Edge News</a:t>
                       </a:r>
                     </a:p>
                   </a:txBody>
@@ -8225,7 +8927,7 @@
                   </a:tcPr>
                 </a:tc>
               </a:tr>
-              <a:tr h="530352">
+              <a:tr h="713232">
                 <a:tc>
                   <a:txBody>
                     <a:bodyPr/>
@@ -8233,13 +8935,13 @@
                     <a:p>
                       <a:pPr algn="l"/>
                       <a:r>
-                        <a:rPr sz="1600" b="0">
+                        <a:rPr sz="1400" b="0">
                           <a:solidFill>
                             <a:srgbClr val="000000"/>
                           </a:solidFill>
                           <a:latin typeface="Calibri"/>
                         </a:rPr>
-                        <a:t>Data analytics learners</a:t>
+                        <a:t>The government's 3MTT programme aims to train three million tech talents by 2027, so demand for tech skills is growing, but free training also competes.</a:t>
                       </a:r>
                     </a:p>
                   </a:txBody>
@@ -8290,13 +8992,13 @@
                     <a:p>
                       <a:pPr algn="ctr"/>
                       <a:r>
-                        <a:rPr sz="1600" b="0">
+                        <a:rPr sz="1400" b="1">
                           <a:solidFill>
                             <a:srgbClr val="000000"/>
                           </a:solidFill>
                           <a:latin typeface="Calibri"/>
                         </a:rPr>
-                        <a:t>2</a:t>
+                        <a:t>All five</a:t>
                       </a:r>
                     </a:p>
                   </a:txBody>
@@ -8347,1057 +9049,13 @@
                     <a:p>
                       <a:pPr algn="ctr"/>
                       <a:r>
-                        <a:rPr sz="1600" b="0">
+                        <a:rPr sz="1400" b="0">
                           <a:solidFill>
                             <a:srgbClr val="000000"/>
                           </a:solidFill>
                           <a:latin typeface="Calibri"/>
                         </a:rPr>
-                        <a:t>3</a:t>
-                      </a:r>
-                    </a:p>
-                  </a:txBody>
-                  <a:tcPr anchor="ctr">
-                    <a:lnL w="12700" cap="flat" cmpd="sng" algn="ctr">
-                      <a:solidFill>
-                        <a:srgbClr val="BFBFBF"/>
-                      </a:solidFill>
-                      <a:prstDash val="solid"/>
-                      <a:round/>
-                      <a:headEnd type="none" w="med" len="med"/>
-                      <a:tailEnd type="none" w="med" len="med"/>
-                    </a:lnL>
-                    <a:lnR w="12700" cap="flat" cmpd="sng" algn="ctr">
-                      <a:solidFill>
-                        <a:srgbClr val="BFBFBF"/>
-                      </a:solidFill>
-                      <a:prstDash val="solid"/>
-                      <a:round/>
-                      <a:headEnd type="none" w="med" len="med"/>
-                      <a:tailEnd type="none" w="med" len="med"/>
-                    </a:lnR>
-                    <a:lnT w="12700" cap="flat" cmpd="sng" algn="ctr">
-                      <a:solidFill>
-                        <a:srgbClr val="BFBFBF"/>
-                      </a:solidFill>
-                      <a:prstDash val="solid"/>
-                      <a:round/>
-                      <a:headEnd type="none" w="med" len="med"/>
-                      <a:tailEnd type="none" w="med" len="med"/>
-                    </a:lnT>
-                    <a:lnB w="12700" cap="flat" cmpd="sng" algn="ctr">
-                      <a:solidFill>
-                        <a:srgbClr val="BFBFBF"/>
-                      </a:solidFill>
-                      <a:prstDash val="solid"/>
-                      <a:round/>
-                      <a:headEnd type="none" w="med" len="med"/>
-                      <a:tailEnd type="none" w="med" len="med"/>
-                    </a:lnB>
-                    <a:noFill/>
-                  </a:tcPr>
-                </a:tc>
-                <a:tc>
-                  <a:txBody>
-                    <a:bodyPr/>
-                    <a:lstStyle/>
-                    <a:p>
-                      <a:pPr algn="ctr"/>
-                      <a:r>
-                        <a:rPr sz="1600" b="0">
-                          <a:solidFill>
-                            <a:srgbClr val="000000"/>
-                          </a:solidFill>
-                          <a:latin typeface="Calibri"/>
-                        </a:rPr>
-                        <a:t>2</a:t>
-                      </a:r>
-                    </a:p>
-                  </a:txBody>
-                  <a:tcPr anchor="ctr">
-                    <a:lnL w="12700" cap="flat" cmpd="sng" algn="ctr">
-                      <a:solidFill>
-                        <a:srgbClr val="BFBFBF"/>
-                      </a:solidFill>
-                      <a:prstDash val="solid"/>
-                      <a:round/>
-                      <a:headEnd type="none" w="med" len="med"/>
-                      <a:tailEnd type="none" w="med" len="med"/>
-                    </a:lnL>
-                    <a:lnR w="12700" cap="flat" cmpd="sng" algn="ctr">
-                      <a:solidFill>
-                        <a:srgbClr val="BFBFBF"/>
-                      </a:solidFill>
-                      <a:prstDash val="solid"/>
-                      <a:round/>
-                      <a:headEnd type="none" w="med" len="med"/>
-                      <a:tailEnd type="none" w="med" len="med"/>
-                    </a:lnR>
-                    <a:lnT w="12700" cap="flat" cmpd="sng" algn="ctr">
-                      <a:solidFill>
-                        <a:srgbClr val="BFBFBF"/>
-                      </a:solidFill>
-                      <a:prstDash val="solid"/>
-                      <a:round/>
-                      <a:headEnd type="none" w="med" len="med"/>
-                      <a:tailEnd type="none" w="med" len="med"/>
-                    </a:lnT>
-                    <a:lnB w="12700" cap="flat" cmpd="sng" algn="ctr">
-                      <a:solidFill>
-                        <a:srgbClr val="BFBFBF"/>
-                      </a:solidFill>
-                      <a:prstDash val="solid"/>
-                      <a:round/>
-                      <a:headEnd type="none" w="med" len="med"/>
-                      <a:tailEnd type="none" w="med" len="med"/>
-                    </a:lnB>
-                    <a:noFill/>
-                  </a:tcPr>
-                </a:tc>
-                <a:tc>
-                  <a:txBody>
-                    <a:bodyPr/>
-                    <a:lstStyle/>
-                    <a:p>
-                      <a:pPr algn="ctr"/>
-                      <a:r>
-                        <a:rPr sz="1600" b="0">
-                          <a:solidFill>
-                            <a:srgbClr val="000000"/>
-                          </a:solidFill>
-                          <a:latin typeface="Calibri"/>
-                        </a:rPr>
-                        <a:t>4</a:t>
-                      </a:r>
-                    </a:p>
-                  </a:txBody>
-                  <a:tcPr anchor="ctr">
-                    <a:lnL w="12700" cap="flat" cmpd="sng" algn="ctr">
-                      <a:solidFill>
-                        <a:srgbClr val="BFBFBF"/>
-                      </a:solidFill>
-                      <a:prstDash val="solid"/>
-                      <a:round/>
-                      <a:headEnd type="none" w="med" len="med"/>
-                      <a:tailEnd type="none" w="med" len="med"/>
-                    </a:lnL>
-                    <a:lnR w="12700" cap="flat" cmpd="sng" algn="ctr">
-                      <a:solidFill>
-                        <a:srgbClr val="BFBFBF"/>
-                      </a:solidFill>
-                      <a:prstDash val="solid"/>
-                      <a:round/>
-                      <a:headEnd type="none" w="med" len="med"/>
-                      <a:tailEnd type="none" w="med" len="med"/>
-                    </a:lnR>
-                    <a:lnT w="12700" cap="flat" cmpd="sng" algn="ctr">
-                      <a:solidFill>
-                        <a:srgbClr val="BFBFBF"/>
-                      </a:solidFill>
-                      <a:prstDash val="solid"/>
-                      <a:round/>
-                      <a:headEnd type="none" w="med" len="med"/>
-                      <a:tailEnd type="none" w="med" len="med"/>
-                    </a:lnT>
-                    <a:lnB w="12700" cap="flat" cmpd="sng" algn="ctr">
-                      <a:solidFill>
-                        <a:srgbClr val="BFBFBF"/>
-                      </a:solidFill>
-                      <a:prstDash val="solid"/>
-                      <a:round/>
-                      <a:headEnd type="none" w="med" len="med"/>
-                      <a:tailEnd type="none" w="med" len="med"/>
-                    </a:lnB>
-                    <a:noFill/>
-                  </a:tcPr>
-                </a:tc>
-                <a:tc>
-                  <a:txBody>
-                    <a:bodyPr/>
-                    <a:lstStyle/>
-                    <a:p>
-                      <a:pPr algn="ctr"/>
-                      <a:r>
-                        <a:rPr sz="1600" b="0">
-                          <a:solidFill>
-                            <a:srgbClr val="000000"/>
-                          </a:solidFill>
-                          <a:latin typeface="Calibri"/>
-                        </a:rPr>
-                        <a:t>3</a:t>
-                      </a:r>
-                    </a:p>
-                  </a:txBody>
-                  <a:tcPr anchor="ctr">
-                    <a:lnL w="12700" cap="flat" cmpd="sng" algn="ctr">
-                      <a:solidFill>
-                        <a:srgbClr val="BFBFBF"/>
-                      </a:solidFill>
-                      <a:prstDash val="solid"/>
-                      <a:round/>
-                      <a:headEnd type="none" w="med" len="med"/>
-                      <a:tailEnd type="none" w="med" len="med"/>
-                    </a:lnL>
-                    <a:lnR w="12700" cap="flat" cmpd="sng" algn="ctr">
-                      <a:solidFill>
-                        <a:srgbClr val="BFBFBF"/>
-                      </a:solidFill>
-                      <a:prstDash val="solid"/>
-                      <a:round/>
-                      <a:headEnd type="none" w="med" len="med"/>
-                      <a:tailEnd type="none" w="med" len="med"/>
-                    </a:lnR>
-                    <a:lnT w="12700" cap="flat" cmpd="sng" algn="ctr">
-                      <a:solidFill>
-                        <a:srgbClr val="BFBFBF"/>
-                      </a:solidFill>
-                      <a:prstDash val="solid"/>
-                      <a:round/>
-                      <a:headEnd type="none" w="med" len="med"/>
-                      <a:tailEnd type="none" w="med" len="med"/>
-                    </a:lnT>
-                    <a:lnB w="12700" cap="flat" cmpd="sng" algn="ctr">
-                      <a:solidFill>
-                        <a:srgbClr val="BFBFBF"/>
-                      </a:solidFill>
-                      <a:prstDash val="solid"/>
-                      <a:round/>
-                      <a:headEnd type="none" w="med" len="med"/>
-                      <a:tailEnd type="none" w="med" len="med"/>
-                    </a:lnB>
-                    <a:noFill/>
-                  </a:tcPr>
-                </a:tc>
-                <a:tc>
-                  <a:txBody>
-                    <a:bodyPr/>
-                    <a:lstStyle/>
-                    <a:p>
-                      <a:pPr algn="ctr"/>
-                      <a:r>
-                        <a:rPr sz="1600" b="0">
-                          <a:solidFill>
-                            <a:srgbClr val="000000"/>
-                          </a:solidFill>
-                          <a:latin typeface="Calibri"/>
-                        </a:rPr>
-                        <a:t>2.75</a:t>
-                      </a:r>
-                    </a:p>
-                  </a:txBody>
-                  <a:tcPr anchor="ctr">
-                    <a:lnL w="12700" cap="flat" cmpd="sng" algn="ctr">
-                      <a:solidFill>
-                        <a:srgbClr val="BFBFBF"/>
-                      </a:solidFill>
-                      <a:prstDash val="solid"/>
-                      <a:round/>
-                      <a:headEnd type="none" w="med" len="med"/>
-                      <a:tailEnd type="none" w="med" len="med"/>
-                    </a:lnL>
-                    <a:lnR w="12700" cap="flat" cmpd="sng" algn="ctr">
-                      <a:solidFill>
-                        <a:srgbClr val="BFBFBF"/>
-                      </a:solidFill>
-                      <a:prstDash val="solid"/>
-                      <a:round/>
-                      <a:headEnd type="none" w="med" len="med"/>
-                      <a:tailEnd type="none" w="med" len="med"/>
-                    </a:lnR>
-                    <a:lnT w="12700" cap="flat" cmpd="sng" algn="ctr">
-                      <a:solidFill>
-                        <a:srgbClr val="BFBFBF"/>
-                      </a:solidFill>
-                      <a:prstDash val="solid"/>
-                      <a:round/>
-                      <a:headEnd type="none" w="med" len="med"/>
-                      <a:tailEnd type="none" w="med" len="med"/>
-                    </a:lnT>
-                    <a:lnB w="12700" cap="flat" cmpd="sng" algn="ctr">
-                      <a:solidFill>
-                        <a:srgbClr val="BFBFBF"/>
-                      </a:solidFill>
-                      <a:prstDash val="solid"/>
-                      <a:round/>
-                      <a:headEnd type="none" w="med" len="med"/>
-                      <a:tailEnd type="none" w="med" len="med"/>
-                    </a:lnB>
-                    <a:noFill/>
-                  </a:tcPr>
-                </a:tc>
-              </a:tr>
-              <a:tr h="530352">
-                <a:tc>
-                  <a:txBody>
-                    <a:bodyPr/>
-                    <a:lstStyle/>
-                    <a:p>
-                      <a:pPr algn="l"/>
-                      <a:r>
-                        <a:rPr sz="1600" b="0">
-                          <a:solidFill>
-                            <a:srgbClr val="000000"/>
-                          </a:solidFill>
-                          <a:latin typeface="Calibri"/>
-                        </a:rPr>
-                        <a:t>Generative AI learners</a:t>
-                      </a:r>
-                    </a:p>
-                  </a:txBody>
-                  <a:tcPr anchor="ctr">
-                    <a:lnL w="12700" cap="flat" cmpd="sng" algn="ctr">
-                      <a:solidFill>
-                        <a:srgbClr val="BFBFBF"/>
-                      </a:solidFill>
-                      <a:prstDash val="solid"/>
-                      <a:round/>
-                      <a:headEnd type="none" w="med" len="med"/>
-                      <a:tailEnd type="none" w="med" len="med"/>
-                    </a:lnL>
-                    <a:lnR w="12700" cap="flat" cmpd="sng" algn="ctr">
-                      <a:solidFill>
-                        <a:srgbClr val="BFBFBF"/>
-                      </a:solidFill>
-                      <a:prstDash val="solid"/>
-                      <a:round/>
-                      <a:headEnd type="none" w="med" len="med"/>
-                      <a:tailEnd type="none" w="med" len="med"/>
-                    </a:lnR>
-                    <a:lnT w="12700" cap="flat" cmpd="sng" algn="ctr">
-                      <a:solidFill>
-                        <a:srgbClr val="BFBFBF"/>
-                      </a:solidFill>
-                      <a:prstDash val="solid"/>
-                      <a:round/>
-                      <a:headEnd type="none" w="med" len="med"/>
-                      <a:tailEnd type="none" w="med" len="med"/>
-                    </a:lnT>
-                    <a:lnB w="12700" cap="flat" cmpd="sng" algn="ctr">
-                      <a:solidFill>
-                        <a:srgbClr val="BFBFBF"/>
-                      </a:solidFill>
-                      <a:prstDash val="solid"/>
-                      <a:round/>
-                      <a:headEnd type="none" w="med" len="med"/>
-                      <a:tailEnd type="none" w="med" len="med"/>
-                    </a:lnB>
-                    <a:solidFill>
-                      <a:srgbClr val="FBE5D6"/>
-                    </a:solidFill>
-                  </a:tcPr>
-                </a:tc>
-                <a:tc>
-                  <a:txBody>
-                    <a:bodyPr/>
-                    <a:lstStyle/>
-                    <a:p>
-                      <a:pPr algn="ctr"/>
-                      <a:r>
-                        <a:rPr sz="1600" b="0">
-                          <a:solidFill>
-                            <a:srgbClr val="000000"/>
-                          </a:solidFill>
-                          <a:latin typeface="Calibri"/>
-                        </a:rPr>
-                        <a:t>2</a:t>
-                      </a:r>
-                    </a:p>
-                  </a:txBody>
-                  <a:tcPr anchor="ctr">
-                    <a:lnL w="12700" cap="flat" cmpd="sng" algn="ctr">
-                      <a:solidFill>
-                        <a:srgbClr val="BFBFBF"/>
-                      </a:solidFill>
-                      <a:prstDash val="solid"/>
-                      <a:round/>
-                      <a:headEnd type="none" w="med" len="med"/>
-                      <a:tailEnd type="none" w="med" len="med"/>
-                    </a:lnL>
-                    <a:lnR w="12700" cap="flat" cmpd="sng" algn="ctr">
-                      <a:solidFill>
-                        <a:srgbClr val="BFBFBF"/>
-                      </a:solidFill>
-                      <a:prstDash val="solid"/>
-                      <a:round/>
-                      <a:headEnd type="none" w="med" len="med"/>
-                      <a:tailEnd type="none" w="med" len="med"/>
-                    </a:lnR>
-                    <a:lnT w="12700" cap="flat" cmpd="sng" algn="ctr">
-                      <a:solidFill>
-                        <a:srgbClr val="BFBFBF"/>
-                      </a:solidFill>
-                      <a:prstDash val="solid"/>
-                      <a:round/>
-                      <a:headEnd type="none" w="med" len="med"/>
-                      <a:tailEnd type="none" w="med" len="med"/>
-                    </a:lnT>
-                    <a:lnB w="12700" cap="flat" cmpd="sng" algn="ctr">
-                      <a:solidFill>
-                        <a:srgbClr val="BFBFBF"/>
-                      </a:solidFill>
-                      <a:prstDash val="solid"/>
-                      <a:round/>
-                      <a:headEnd type="none" w="med" len="med"/>
-                      <a:tailEnd type="none" w="med" len="med"/>
-                    </a:lnB>
-                    <a:solidFill>
-                      <a:srgbClr val="FBE5D6"/>
-                    </a:solidFill>
-                  </a:tcPr>
-                </a:tc>
-                <a:tc>
-                  <a:txBody>
-                    <a:bodyPr/>
-                    <a:lstStyle/>
-                    <a:p>
-                      <a:pPr algn="ctr"/>
-                      <a:r>
-                        <a:rPr sz="1600" b="0">
-                          <a:solidFill>
-                            <a:srgbClr val="000000"/>
-                          </a:solidFill>
-                          <a:latin typeface="Calibri"/>
-                        </a:rPr>
-                        <a:t>3</a:t>
-                      </a:r>
-                    </a:p>
-                  </a:txBody>
-                  <a:tcPr anchor="ctr">
-                    <a:lnL w="12700" cap="flat" cmpd="sng" algn="ctr">
-                      <a:solidFill>
-                        <a:srgbClr val="BFBFBF"/>
-                      </a:solidFill>
-                      <a:prstDash val="solid"/>
-                      <a:round/>
-                      <a:headEnd type="none" w="med" len="med"/>
-                      <a:tailEnd type="none" w="med" len="med"/>
-                    </a:lnL>
-                    <a:lnR w="12700" cap="flat" cmpd="sng" algn="ctr">
-                      <a:solidFill>
-                        <a:srgbClr val="BFBFBF"/>
-                      </a:solidFill>
-                      <a:prstDash val="solid"/>
-                      <a:round/>
-                      <a:headEnd type="none" w="med" len="med"/>
-                      <a:tailEnd type="none" w="med" len="med"/>
-                    </a:lnR>
-                    <a:lnT w="12700" cap="flat" cmpd="sng" algn="ctr">
-                      <a:solidFill>
-                        <a:srgbClr val="BFBFBF"/>
-                      </a:solidFill>
-                      <a:prstDash val="solid"/>
-                      <a:round/>
-                      <a:headEnd type="none" w="med" len="med"/>
-                      <a:tailEnd type="none" w="med" len="med"/>
-                    </a:lnT>
-                    <a:lnB w="12700" cap="flat" cmpd="sng" algn="ctr">
-                      <a:solidFill>
-                        <a:srgbClr val="BFBFBF"/>
-                      </a:solidFill>
-                      <a:prstDash val="solid"/>
-                      <a:round/>
-                      <a:headEnd type="none" w="med" len="med"/>
-                      <a:tailEnd type="none" w="med" len="med"/>
-                    </a:lnB>
-                    <a:solidFill>
-                      <a:srgbClr val="FBE5D6"/>
-                    </a:solidFill>
-                  </a:tcPr>
-                </a:tc>
-                <a:tc>
-                  <a:txBody>
-                    <a:bodyPr/>
-                    <a:lstStyle/>
-                    <a:p>
-                      <a:pPr algn="ctr"/>
-                      <a:r>
-                        <a:rPr sz="1600" b="0">
-                          <a:solidFill>
-                            <a:srgbClr val="000000"/>
-                          </a:solidFill>
-                          <a:latin typeface="Calibri"/>
-                        </a:rPr>
-                        <a:t>3</a:t>
-                      </a:r>
-                    </a:p>
-                  </a:txBody>
-                  <a:tcPr anchor="ctr">
-                    <a:lnL w="12700" cap="flat" cmpd="sng" algn="ctr">
-                      <a:solidFill>
-                        <a:srgbClr val="BFBFBF"/>
-                      </a:solidFill>
-                      <a:prstDash val="solid"/>
-                      <a:round/>
-                      <a:headEnd type="none" w="med" len="med"/>
-                      <a:tailEnd type="none" w="med" len="med"/>
-                    </a:lnL>
-                    <a:lnR w="12700" cap="flat" cmpd="sng" algn="ctr">
-                      <a:solidFill>
-                        <a:srgbClr val="BFBFBF"/>
-                      </a:solidFill>
-                      <a:prstDash val="solid"/>
-                      <a:round/>
-                      <a:headEnd type="none" w="med" len="med"/>
-                      <a:tailEnd type="none" w="med" len="med"/>
-                    </a:lnR>
-                    <a:lnT w="12700" cap="flat" cmpd="sng" algn="ctr">
-                      <a:solidFill>
-                        <a:srgbClr val="BFBFBF"/>
-                      </a:solidFill>
-                      <a:prstDash val="solid"/>
-                      <a:round/>
-                      <a:headEnd type="none" w="med" len="med"/>
-                      <a:tailEnd type="none" w="med" len="med"/>
-                    </a:lnT>
-                    <a:lnB w="12700" cap="flat" cmpd="sng" algn="ctr">
-                      <a:solidFill>
-                        <a:srgbClr val="BFBFBF"/>
-                      </a:solidFill>
-                      <a:prstDash val="solid"/>
-                      <a:round/>
-                      <a:headEnd type="none" w="med" len="med"/>
-                      <a:tailEnd type="none" w="med" len="med"/>
-                    </a:lnB>
-                    <a:solidFill>
-                      <a:srgbClr val="FBE5D6"/>
-                    </a:solidFill>
-                  </a:tcPr>
-                </a:tc>
-                <a:tc>
-                  <a:txBody>
-                    <a:bodyPr/>
-                    <a:lstStyle/>
-                    <a:p>
-                      <a:pPr algn="ctr"/>
-                      <a:r>
-                        <a:rPr sz="1600" b="0">
-                          <a:solidFill>
-                            <a:srgbClr val="000000"/>
-                          </a:solidFill>
-                          <a:latin typeface="Calibri"/>
-                        </a:rPr>
-                        <a:t>3</a:t>
-                      </a:r>
-                    </a:p>
-                  </a:txBody>
-                  <a:tcPr anchor="ctr">
-                    <a:lnL w="12700" cap="flat" cmpd="sng" algn="ctr">
-                      <a:solidFill>
-                        <a:srgbClr val="BFBFBF"/>
-                      </a:solidFill>
-                      <a:prstDash val="solid"/>
-                      <a:round/>
-                      <a:headEnd type="none" w="med" len="med"/>
-                      <a:tailEnd type="none" w="med" len="med"/>
-                    </a:lnL>
-                    <a:lnR w="12700" cap="flat" cmpd="sng" algn="ctr">
-                      <a:solidFill>
-                        <a:srgbClr val="BFBFBF"/>
-                      </a:solidFill>
-                      <a:prstDash val="solid"/>
-                      <a:round/>
-                      <a:headEnd type="none" w="med" len="med"/>
-                      <a:tailEnd type="none" w="med" len="med"/>
-                    </a:lnR>
-                    <a:lnT w="12700" cap="flat" cmpd="sng" algn="ctr">
-                      <a:solidFill>
-                        <a:srgbClr val="BFBFBF"/>
-                      </a:solidFill>
-                      <a:prstDash val="solid"/>
-                      <a:round/>
-                      <a:headEnd type="none" w="med" len="med"/>
-                      <a:tailEnd type="none" w="med" len="med"/>
-                    </a:lnT>
-                    <a:lnB w="12700" cap="flat" cmpd="sng" algn="ctr">
-                      <a:solidFill>
-                        <a:srgbClr val="BFBFBF"/>
-                      </a:solidFill>
-                      <a:prstDash val="solid"/>
-                      <a:round/>
-                      <a:headEnd type="none" w="med" len="med"/>
-                      <a:tailEnd type="none" w="med" len="med"/>
-                    </a:lnB>
-                    <a:solidFill>
-                      <a:srgbClr val="FBE5D6"/>
-                    </a:solidFill>
-                  </a:tcPr>
-                </a:tc>
-                <a:tc>
-                  <a:txBody>
-                    <a:bodyPr/>
-                    <a:lstStyle/>
-                    <a:p>
-                      <a:pPr algn="ctr"/>
-                      <a:r>
-                        <a:rPr sz="1600" b="0">
-                          <a:solidFill>
-                            <a:srgbClr val="000000"/>
-                          </a:solidFill>
-                          <a:latin typeface="Calibri"/>
-                        </a:rPr>
-                        <a:t>4</a:t>
-                      </a:r>
-                    </a:p>
-                  </a:txBody>
-                  <a:tcPr anchor="ctr">
-                    <a:lnL w="12700" cap="flat" cmpd="sng" algn="ctr">
-                      <a:solidFill>
-                        <a:srgbClr val="BFBFBF"/>
-                      </a:solidFill>
-                      <a:prstDash val="solid"/>
-                      <a:round/>
-                      <a:headEnd type="none" w="med" len="med"/>
-                      <a:tailEnd type="none" w="med" len="med"/>
-                    </a:lnL>
-                    <a:lnR w="12700" cap="flat" cmpd="sng" algn="ctr">
-                      <a:solidFill>
-                        <a:srgbClr val="BFBFBF"/>
-                      </a:solidFill>
-                      <a:prstDash val="solid"/>
-                      <a:round/>
-                      <a:headEnd type="none" w="med" len="med"/>
-                      <a:tailEnd type="none" w="med" len="med"/>
-                    </a:lnR>
-                    <a:lnT w="12700" cap="flat" cmpd="sng" algn="ctr">
-                      <a:solidFill>
-                        <a:srgbClr val="BFBFBF"/>
-                      </a:solidFill>
-                      <a:prstDash val="solid"/>
-                      <a:round/>
-                      <a:headEnd type="none" w="med" len="med"/>
-                      <a:tailEnd type="none" w="med" len="med"/>
-                    </a:lnT>
-                    <a:lnB w="12700" cap="flat" cmpd="sng" algn="ctr">
-                      <a:solidFill>
-                        <a:srgbClr val="BFBFBF"/>
-                      </a:solidFill>
-                      <a:prstDash val="solid"/>
-                      <a:round/>
-                      <a:headEnd type="none" w="med" len="med"/>
-                      <a:tailEnd type="none" w="med" len="med"/>
-                    </a:lnB>
-                    <a:solidFill>
-                      <a:srgbClr val="FBE5D6"/>
-                    </a:solidFill>
-                  </a:tcPr>
-                </a:tc>
-                <a:tc>
-                  <a:txBody>
-                    <a:bodyPr/>
-                    <a:lstStyle/>
-                    <a:p>
-                      <a:pPr algn="ctr"/>
-                      <a:r>
-                        <a:rPr sz="1600" b="0">
-                          <a:solidFill>
-                            <a:srgbClr val="000000"/>
-                          </a:solidFill>
-                          <a:latin typeface="Calibri"/>
-                        </a:rPr>
-                        <a:t>2.85</a:t>
-                      </a:r>
-                    </a:p>
-                  </a:txBody>
-                  <a:tcPr anchor="ctr">
-                    <a:lnL w="12700" cap="flat" cmpd="sng" algn="ctr">
-                      <a:solidFill>
-                        <a:srgbClr val="BFBFBF"/>
-                      </a:solidFill>
-                      <a:prstDash val="solid"/>
-                      <a:round/>
-                      <a:headEnd type="none" w="med" len="med"/>
-                      <a:tailEnd type="none" w="med" len="med"/>
-                    </a:lnL>
-                    <a:lnR w="12700" cap="flat" cmpd="sng" algn="ctr">
-                      <a:solidFill>
-                        <a:srgbClr val="BFBFBF"/>
-                      </a:solidFill>
-                      <a:prstDash val="solid"/>
-                      <a:round/>
-                      <a:headEnd type="none" w="med" len="med"/>
-                      <a:tailEnd type="none" w="med" len="med"/>
-                    </a:lnR>
-                    <a:lnT w="12700" cap="flat" cmpd="sng" algn="ctr">
-                      <a:solidFill>
-                        <a:srgbClr val="BFBFBF"/>
-                      </a:solidFill>
-                      <a:prstDash val="solid"/>
-                      <a:round/>
-                      <a:headEnd type="none" w="med" len="med"/>
-                      <a:tailEnd type="none" w="med" len="med"/>
-                    </a:lnT>
-                    <a:lnB w="12700" cap="flat" cmpd="sng" algn="ctr">
-                      <a:solidFill>
-                        <a:srgbClr val="BFBFBF"/>
-                      </a:solidFill>
-                      <a:prstDash val="solid"/>
-                      <a:round/>
-                      <a:headEnd type="none" w="med" len="med"/>
-                      <a:tailEnd type="none" w="med" len="med"/>
-                    </a:lnB>
-                    <a:solidFill>
-                      <a:srgbClr val="FBE5D6"/>
-                    </a:solidFill>
-                  </a:tcPr>
-                </a:tc>
-              </a:tr>
-              <a:tr h="530352">
-                <a:tc>
-                  <a:txBody>
-                    <a:bodyPr/>
-                    <a:lstStyle/>
-                    <a:p>
-                      <a:pPr algn="l"/>
-                      <a:r>
-                        <a:rPr sz="1600" b="0">
-                          <a:solidFill>
-                            <a:srgbClr val="000000"/>
-                          </a:solidFill>
-                          <a:latin typeface="Calibri"/>
-                        </a:rPr>
-                        <a:t>Web development learners</a:t>
-                      </a:r>
-                    </a:p>
-                  </a:txBody>
-                  <a:tcPr anchor="ctr">
-                    <a:lnL w="12700" cap="flat" cmpd="sng" algn="ctr">
-                      <a:solidFill>
-                        <a:srgbClr val="BFBFBF"/>
-                      </a:solidFill>
-                      <a:prstDash val="solid"/>
-                      <a:round/>
-                      <a:headEnd type="none" w="med" len="med"/>
-                      <a:tailEnd type="none" w="med" len="med"/>
-                    </a:lnL>
-                    <a:lnR w="12700" cap="flat" cmpd="sng" algn="ctr">
-                      <a:solidFill>
-                        <a:srgbClr val="BFBFBF"/>
-                      </a:solidFill>
-                      <a:prstDash val="solid"/>
-                      <a:round/>
-                      <a:headEnd type="none" w="med" len="med"/>
-                      <a:tailEnd type="none" w="med" len="med"/>
-                    </a:lnR>
-                    <a:lnT w="12700" cap="flat" cmpd="sng" algn="ctr">
-                      <a:solidFill>
-                        <a:srgbClr val="BFBFBF"/>
-                      </a:solidFill>
-                      <a:prstDash val="solid"/>
-                      <a:round/>
-                      <a:headEnd type="none" w="med" len="med"/>
-                      <a:tailEnd type="none" w="med" len="med"/>
-                    </a:lnT>
-                    <a:lnB w="12700" cap="flat" cmpd="sng" algn="ctr">
-                      <a:solidFill>
-                        <a:srgbClr val="BFBFBF"/>
-                      </a:solidFill>
-                      <a:prstDash val="solid"/>
-                      <a:round/>
-                      <a:headEnd type="none" w="med" len="med"/>
-                      <a:tailEnd type="none" w="med" len="med"/>
-                    </a:lnB>
-                    <a:noFill/>
-                  </a:tcPr>
-                </a:tc>
-                <a:tc>
-                  <a:txBody>
-                    <a:bodyPr/>
-                    <a:lstStyle/>
-                    <a:p>
-                      <a:pPr algn="ctr"/>
-                      <a:r>
-                        <a:rPr sz="1600" b="0">
-                          <a:solidFill>
-                            <a:srgbClr val="000000"/>
-                          </a:solidFill>
-                          <a:latin typeface="Calibri"/>
-                        </a:rPr>
-                        <a:t>2</a:t>
-                      </a:r>
-                    </a:p>
-                  </a:txBody>
-                  <a:tcPr anchor="ctr">
-                    <a:lnL w="12700" cap="flat" cmpd="sng" algn="ctr">
-                      <a:solidFill>
-                        <a:srgbClr val="BFBFBF"/>
-                      </a:solidFill>
-                      <a:prstDash val="solid"/>
-                      <a:round/>
-                      <a:headEnd type="none" w="med" len="med"/>
-                      <a:tailEnd type="none" w="med" len="med"/>
-                    </a:lnL>
-                    <a:lnR w="12700" cap="flat" cmpd="sng" algn="ctr">
-                      <a:solidFill>
-                        <a:srgbClr val="BFBFBF"/>
-                      </a:solidFill>
-                      <a:prstDash val="solid"/>
-                      <a:round/>
-                      <a:headEnd type="none" w="med" len="med"/>
-                      <a:tailEnd type="none" w="med" len="med"/>
-                    </a:lnR>
-                    <a:lnT w="12700" cap="flat" cmpd="sng" algn="ctr">
-                      <a:solidFill>
-                        <a:srgbClr val="BFBFBF"/>
-                      </a:solidFill>
-                      <a:prstDash val="solid"/>
-                      <a:round/>
-                      <a:headEnd type="none" w="med" len="med"/>
-                      <a:tailEnd type="none" w="med" len="med"/>
-                    </a:lnT>
-                    <a:lnB w="12700" cap="flat" cmpd="sng" algn="ctr">
-                      <a:solidFill>
-                        <a:srgbClr val="BFBFBF"/>
-                      </a:solidFill>
-                      <a:prstDash val="solid"/>
-                      <a:round/>
-                      <a:headEnd type="none" w="med" len="med"/>
-                      <a:tailEnd type="none" w="med" len="med"/>
-                    </a:lnB>
-                    <a:noFill/>
-                  </a:tcPr>
-                </a:tc>
-                <a:tc>
-                  <a:txBody>
-                    <a:bodyPr/>
-                    <a:lstStyle/>
-                    <a:p>
-                      <a:pPr algn="ctr"/>
-                      <a:r>
-                        <a:rPr sz="1600" b="0">
-                          <a:solidFill>
-                            <a:srgbClr val="000000"/>
-                          </a:solidFill>
-                          <a:latin typeface="Calibri"/>
-                        </a:rPr>
-                        <a:t>2</a:t>
-                      </a:r>
-                    </a:p>
-                  </a:txBody>
-                  <a:tcPr anchor="ctr">
-                    <a:lnL w="12700" cap="flat" cmpd="sng" algn="ctr">
-                      <a:solidFill>
-                        <a:srgbClr val="BFBFBF"/>
-                      </a:solidFill>
-                      <a:prstDash val="solid"/>
-                      <a:round/>
-                      <a:headEnd type="none" w="med" len="med"/>
-                      <a:tailEnd type="none" w="med" len="med"/>
-                    </a:lnL>
-                    <a:lnR w="12700" cap="flat" cmpd="sng" algn="ctr">
-                      <a:solidFill>
-                        <a:srgbClr val="BFBFBF"/>
-                      </a:solidFill>
-                      <a:prstDash val="solid"/>
-                      <a:round/>
-                      <a:headEnd type="none" w="med" len="med"/>
-                      <a:tailEnd type="none" w="med" len="med"/>
-                    </a:lnR>
-                    <a:lnT w="12700" cap="flat" cmpd="sng" algn="ctr">
-                      <a:solidFill>
-                        <a:srgbClr val="BFBFBF"/>
-                      </a:solidFill>
-                      <a:prstDash val="solid"/>
-                      <a:round/>
-                      <a:headEnd type="none" w="med" len="med"/>
-                      <a:tailEnd type="none" w="med" len="med"/>
-                    </a:lnT>
-                    <a:lnB w="12700" cap="flat" cmpd="sng" algn="ctr">
-                      <a:solidFill>
-                        <a:srgbClr val="BFBFBF"/>
-                      </a:solidFill>
-                      <a:prstDash val="solid"/>
-                      <a:round/>
-                      <a:headEnd type="none" w="med" len="med"/>
-                      <a:tailEnd type="none" w="med" len="med"/>
-                    </a:lnB>
-                    <a:noFill/>
-                  </a:tcPr>
-                </a:tc>
-                <a:tc>
-                  <a:txBody>
-                    <a:bodyPr/>
-                    <a:lstStyle/>
-                    <a:p>
-                      <a:pPr algn="ctr"/>
-                      <a:r>
-                        <a:rPr sz="1600" b="0">
-                          <a:solidFill>
-                            <a:srgbClr val="000000"/>
-                          </a:solidFill>
-                          <a:latin typeface="Calibri"/>
-                        </a:rPr>
-                        <a:t>2</a:t>
-                      </a:r>
-                    </a:p>
-                  </a:txBody>
-                  <a:tcPr anchor="ctr">
-                    <a:lnL w="12700" cap="flat" cmpd="sng" algn="ctr">
-                      <a:solidFill>
-                        <a:srgbClr val="BFBFBF"/>
-                      </a:solidFill>
-                      <a:prstDash val="solid"/>
-                      <a:round/>
-                      <a:headEnd type="none" w="med" len="med"/>
-                      <a:tailEnd type="none" w="med" len="med"/>
-                    </a:lnL>
-                    <a:lnR w="12700" cap="flat" cmpd="sng" algn="ctr">
-                      <a:solidFill>
-                        <a:srgbClr val="BFBFBF"/>
-                      </a:solidFill>
-                      <a:prstDash val="solid"/>
-                      <a:round/>
-                      <a:headEnd type="none" w="med" len="med"/>
-                      <a:tailEnd type="none" w="med" len="med"/>
-                    </a:lnR>
-                    <a:lnT w="12700" cap="flat" cmpd="sng" algn="ctr">
-                      <a:solidFill>
-                        <a:srgbClr val="BFBFBF"/>
-                      </a:solidFill>
-                      <a:prstDash val="solid"/>
-                      <a:round/>
-                      <a:headEnd type="none" w="med" len="med"/>
-                      <a:tailEnd type="none" w="med" len="med"/>
-                    </a:lnT>
-                    <a:lnB w="12700" cap="flat" cmpd="sng" algn="ctr">
-                      <a:solidFill>
-                        <a:srgbClr val="BFBFBF"/>
-                      </a:solidFill>
-                      <a:prstDash val="solid"/>
-                      <a:round/>
-                      <a:headEnd type="none" w="med" len="med"/>
-                      <a:tailEnd type="none" w="med" len="med"/>
-                    </a:lnB>
-                    <a:noFill/>
-                  </a:tcPr>
-                </a:tc>
-                <a:tc>
-                  <a:txBody>
-                    <a:bodyPr/>
-                    <a:lstStyle/>
-                    <a:p>
-                      <a:pPr algn="ctr"/>
-                      <a:r>
-                        <a:rPr sz="1600" b="0">
-                          <a:solidFill>
-                            <a:srgbClr val="000000"/>
-                          </a:solidFill>
-                          <a:latin typeface="Calibri"/>
-                        </a:rPr>
-                        <a:t>3</a:t>
-                      </a:r>
-                    </a:p>
-                  </a:txBody>
-                  <a:tcPr anchor="ctr">
-                    <a:lnL w="12700" cap="flat" cmpd="sng" algn="ctr">
-                      <a:solidFill>
-                        <a:srgbClr val="BFBFBF"/>
-                      </a:solidFill>
-                      <a:prstDash val="solid"/>
-                      <a:round/>
-                      <a:headEnd type="none" w="med" len="med"/>
-                      <a:tailEnd type="none" w="med" len="med"/>
-                    </a:lnL>
-                    <a:lnR w="12700" cap="flat" cmpd="sng" algn="ctr">
-                      <a:solidFill>
-                        <a:srgbClr val="BFBFBF"/>
-                      </a:solidFill>
-                      <a:prstDash val="solid"/>
-                      <a:round/>
-                      <a:headEnd type="none" w="med" len="med"/>
-                      <a:tailEnd type="none" w="med" len="med"/>
-                    </a:lnR>
-                    <a:lnT w="12700" cap="flat" cmpd="sng" algn="ctr">
-                      <a:solidFill>
-                        <a:srgbClr val="BFBFBF"/>
-                      </a:solidFill>
-                      <a:prstDash val="solid"/>
-                      <a:round/>
-                      <a:headEnd type="none" w="med" len="med"/>
-                      <a:tailEnd type="none" w="med" len="med"/>
-                    </a:lnT>
-                    <a:lnB w="12700" cap="flat" cmpd="sng" algn="ctr">
-                      <a:solidFill>
-                        <a:srgbClr val="BFBFBF"/>
-                      </a:solidFill>
-                      <a:prstDash val="solid"/>
-                      <a:round/>
-                      <a:headEnd type="none" w="med" len="med"/>
-                      <a:tailEnd type="none" w="med" len="med"/>
-                    </a:lnB>
-                    <a:noFill/>
-                  </a:tcPr>
-                </a:tc>
-                <a:tc>
-                  <a:txBody>
-                    <a:bodyPr/>
-                    <a:lstStyle/>
-                    <a:p>
-                      <a:pPr algn="ctr"/>
-                      <a:r>
-                        <a:rPr sz="1600" b="0">
-                          <a:solidFill>
-                            <a:srgbClr val="000000"/>
-                          </a:solidFill>
-                          <a:latin typeface="Calibri"/>
-                        </a:rPr>
-                        <a:t>2</a:t>
-                      </a:r>
-                    </a:p>
-                  </a:txBody>
-                  <a:tcPr anchor="ctr">
-                    <a:lnL w="12700" cap="flat" cmpd="sng" algn="ctr">
-                      <a:solidFill>
-                        <a:srgbClr val="BFBFBF"/>
-                      </a:solidFill>
-                      <a:prstDash val="solid"/>
-                      <a:round/>
-                      <a:headEnd type="none" w="med" len="med"/>
-                      <a:tailEnd type="none" w="med" len="med"/>
-                    </a:lnL>
-                    <a:lnR w="12700" cap="flat" cmpd="sng" algn="ctr">
-                      <a:solidFill>
-                        <a:srgbClr val="BFBFBF"/>
-                      </a:solidFill>
-                      <a:prstDash val="solid"/>
-                      <a:round/>
-                      <a:headEnd type="none" w="med" len="med"/>
-                      <a:tailEnd type="none" w="med" len="med"/>
-                    </a:lnR>
-                    <a:lnT w="12700" cap="flat" cmpd="sng" algn="ctr">
-                      <a:solidFill>
-                        <a:srgbClr val="BFBFBF"/>
-                      </a:solidFill>
-                      <a:prstDash val="solid"/>
-                      <a:round/>
-                      <a:headEnd type="none" w="med" len="med"/>
-                      <a:tailEnd type="none" w="med" len="med"/>
-                    </a:lnT>
-                    <a:lnB w="12700" cap="flat" cmpd="sng" algn="ctr">
-                      <a:solidFill>
-                        <a:srgbClr val="BFBFBF"/>
-                      </a:solidFill>
-                      <a:prstDash val="solid"/>
-                      <a:round/>
-                      <a:headEnd type="none" w="med" len="med"/>
-                      <a:tailEnd type="none" w="med" len="med"/>
-                    </a:lnB>
-                    <a:noFill/>
-                  </a:tcPr>
-                </a:tc>
-                <a:tc>
-                  <a:txBody>
-                    <a:bodyPr/>
-                    <a:lstStyle/>
-                    <a:p>
-                      <a:pPr algn="ctr"/>
-                      <a:r>
-                        <a:rPr sz="1600" b="0">
-                          <a:solidFill>
-                            <a:srgbClr val="000000"/>
-                          </a:solidFill>
-                          <a:latin typeface="Calibri"/>
-                        </a:rPr>
-                        <a:t>2.20</a:t>
+                        <a:t>Federal Ministry of Communications, Innovation and Digital Economy</a:t>
                       </a:r>
                     </a:p>
                   </a:txBody>
@@ -9511,6 +9169,2947 @@
                 </a:solidFill>
                 <a:latin typeface="Calibri"/>
               </a:rPr>
+              <a:t>Desk research that backs up the Google Trends findings</a:t>
+            </a:r>
+          </a:p>
+        </p:txBody>
+      </p:sp>
+      <p:sp>
+        <p:nvSpPr>
+          <p:cNvPr id="7" name="TextBox 6"/>
+          <p:cNvSpPr txBox="1"/>
+          <p:nvPr/>
+        </p:nvSpPr>
+        <p:spPr>
+          <a:xfrm>
+            <a:off x="731520" y="6035040"/>
+            <a:ext cx="10728960" cy="365760"/>
+          </a:xfrm>
+          <a:prstGeom prst="rect">
+            <a:avLst/>
+          </a:prstGeom>
+          <a:noFill/>
+        </p:spPr>
+        <p:txBody>
+          <a:bodyPr wrap="square">
+            <a:spAutoFit/>
+          </a:bodyPr>
+          <a:lstStyle/>
+          <a:p>
+            <a:pPr algn="ctr"/>
+            <a:r>
+              <a:rPr sz="1400" b="0">
+                <a:solidFill>
+                  <a:srgbClr val="404040"/>
+                </a:solidFill>
+                <a:latin typeface="Calibri"/>
+              </a:rPr>
+              <a:t>The links to every source are in the Research sheet of Segmentation_Matrix.xlsx.</a:t>
+            </a:r>
+          </a:p>
+        </p:txBody>
+      </p:sp>
+    </p:spTree>
+  </p:cSld>
+  <p:clrMapOvr>
+    <a:masterClrMapping/>
+  </p:clrMapOvr>
+  <p:transition spd="med" advTm="35000">
+    <p:cover dir="l"/>
+  </p:transition>
+  <p:timing>
+    <p:tnLst>
+      <p:par>
+        <p:cTn id="1" dur="indefinite" restart="never" nodeType="tmRoot">
+          <p:childTnLst>
+            <p:seq concurrent="1" nextAc="seek">
+              <p:cTn id="2" dur="indefinite" nodeType="mainSeq">
+                <p:childTnLst>
+                  <p:par>
+                    <p:cTn id="3" fill="hold">
+                      <p:stCondLst>
+                        <p:cond delay="indefinite"/>
+                        <p:cond evt="onBegin" delay="0">
+                          <p:tn val="2"/>
+                        </p:cond>
+                      </p:stCondLst>
+                      <p:childTnLst>
+                        <p:par>
+                          <p:cTn id="4" fill="hold">
+                            <p:stCondLst>
+                              <p:cond delay="0"/>
+                            </p:stCondLst>
+                            <p:childTnLst>
+                              <p:par>
+                                <p:cTn id="5" presetID="10" presetClass="entr" presetSubtype="0" fill="hold" grpId="0" nodeType="afterEffect">
+                                  <p:stCondLst>
+                                    <p:cond delay="0"/>
+                                  </p:stCondLst>
+                                  <p:childTnLst>
+                                    <p:set>
+                                      <p:cBhvr>
+                                        <p:cTn id="6" dur="1" fill="hold">
+                                          <p:stCondLst>
+                                            <p:cond delay="0"/>
+                                          </p:stCondLst>
+                                        </p:cTn>
+                                        <p:tgtEl>
+                                          <p:spTgt spid="2"/>
+                                        </p:tgtEl>
+                                        <p:attrNameLst>
+                                          <p:attrName>style.visibility</p:attrName>
+                                        </p:attrNameLst>
+                                      </p:cBhvr>
+                                      <p:to>
+                                        <p:strVal val="visible"/>
+                                      </p:to>
+                                    </p:set>
+                                    <p:animEffect transition="in" filter="fade">
+                                      <p:cBhvr>
+                                        <p:cTn id="7" dur="500"/>
+                                        <p:tgtEl>
+                                          <p:spTgt spid="2"/>
+                                        </p:tgtEl>
+                                      </p:cBhvr>
+                                    </p:animEffect>
+                                  </p:childTnLst>
+                                </p:cTn>
+                              </p:par>
+                              <p:par>
+                                <p:cTn id="8" presetID="22" presetClass="entr" presetSubtype="8" fill="hold" nodeType="withEffect">
+                                  <p:stCondLst>
+                                    <p:cond delay="0"/>
+                                  </p:stCondLst>
+                                  <p:childTnLst>
+                                    <p:set>
+                                      <p:cBhvr>
+                                        <p:cTn id="9" dur="1" fill="hold">
+                                          <p:stCondLst>
+                                            <p:cond delay="0"/>
+                                          </p:stCondLst>
+                                        </p:cTn>
+                                        <p:tgtEl>
+                                          <p:spTgt spid="5"/>
+                                        </p:tgtEl>
+                                        <p:attrNameLst>
+                                          <p:attrName>style.visibility</p:attrName>
+                                        </p:attrNameLst>
+                                      </p:cBhvr>
+                                      <p:to>
+                                        <p:strVal val="visible"/>
+                                      </p:to>
+                                    </p:set>
+                                    <p:animEffect transition="in" filter="wipe(right)">
+                                      <p:cBhvr>
+                                        <p:cTn id="10" dur="500"/>
+                                        <p:tgtEl>
+                                          <p:spTgt spid="5"/>
+                                        </p:tgtEl>
+                                      </p:cBhvr>
+                                    </p:animEffect>
+                                  </p:childTnLst>
+                                </p:cTn>
+                              </p:par>
+                            </p:childTnLst>
+                          </p:cTn>
+                        </p:par>
+                        <p:par>
+                          <p:cTn id="11" fill="hold">
+                            <p:stCondLst>
+                              <p:cond delay="500"/>
+                            </p:stCondLst>
+                            <p:childTnLst>
+                              <p:par>
+                                <p:cTn id="12" presetID="10" presetClass="entr" presetSubtype="0" fill="hold" grpId="0" nodeType="afterEffect">
+                                  <p:stCondLst>
+                                    <p:cond delay="0"/>
+                                  </p:stCondLst>
+                                  <p:childTnLst>
+                                    <p:set>
+                                      <p:cBhvr>
+                                        <p:cTn id="13" dur="1" fill="hold">
+                                          <p:stCondLst>
+                                            <p:cond delay="0"/>
+                                          </p:stCondLst>
+                                        </p:cTn>
+                                        <p:tgtEl>
+                                          <p:spTgt spid="6"/>
+                                        </p:tgtEl>
+                                        <p:attrNameLst>
+                                          <p:attrName>style.visibility</p:attrName>
+                                        </p:attrNameLst>
+                                      </p:cBhvr>
+                                      <p:to>
+                                        <p:strVal val="visible"/>
+                                      </p:to>
+                                    </p:set>
+                                    <p:animEffect transition="in" filter="fade">
+                                      <p:cBhvr>
+                                        <p:cTn id="14" dur="500"/>
+                                        <p:tgtEl>
+                                          <p:spTgt spid="6"/>
+                                        </p:tgtEl>
+                                      </p:cBhvr>
+                                    </p:animEffect>
+                                  </p:childTnLst>
+                                </p:cTn>
+                              </p:par>
+                            </p:childTnLst>
+                          </p:cTn>
+                        </p:par>
+                        <p:par>
+                          <p:cTn id="15" fill="hold">
+                            <p:stCondLst>
+                              <p:cond delay="1000"/>
+                            </p:stCondLst>
+                            <p:childTnLst>
+                              <p:par>
+                                <p:cTn id="16" presetID="22" presetClass="entr" presetSubtype="1" fill="hold" nodeType="afterEffect">
+                                  <p:stCondLst>
+                                    <p:cond delay="0"/>
+                                  </p:stCondLst>
+                                  <p:childTnLst>
+                                    <p:set>
+                                      <p:cBhvr>
+                                        <p:cTn id="17" dur="1" fill="hold">
+                                          <p:stCondLst>
+                                            <p:cond delay="0"/>
+                                          </p:stCondLst>
+                                        </p:cTn>
+                                        <p:tgtEl>
+                                          <p:spTgt spid="3"/>
+                                        </p:tgtEl>
+                                        <p:attrNameLst>
+                                          <p:attrName>style.visibility</p:attrName>
+                                        </p:attrNameLst>
+                                      </p:cBhvr>
+                                      <p:to>
+                                        <p:strVal val="visible"/>
+                                      </p:to>
+                                    </p:set>
+                                    <p:animEffect transition="in" filter="wipe(down)">
+                                      <p:cBhvr>
+                                        <p:cTn id="18" dur="500"/>
+                                        <p:tgtEl>
+                                          <p:spTgt spid="3"/>
+                                        </p:tgtEl>
+                                      </p:cBhvr>
+                                    </p:animEffect>
+                                  </p:childTnLst>
+                                </p:cTn>
+                              </p:par>
+                            </p:childTnLst>
+                          </p:cTn>
+                        </p:par>
+                        <p:par>
+                          <p:cTn id="19" fill="hold">
+                            <p:stCondLst>
+                              <p:cond delay="1500"/>
+                            </p:stCondLst>
+                            <p:childTnLst>
+                              <p:par>
+                                <p:cTn id="20" presetID="10" presetClass="entr" presetSubtype="0" fill="hold" grpId="0" nodeType="afterEffect">
+                                  <p:stCondLst>
+                                    <p:cond delay="0"/>
+                                  </p:stCondLst>
+                                  <p:childTnLst>
+                                    <p:set>
+                                      <p:cBhvr>
+                                        <p:cTn id="21" dur="1" fill="hold">
+                                          <p:stCondLst>
+                                            <p:cond delay="0"/>
+                                          </p:stCondLst>
+                                        </p:cTn>
+                                        <p:tgtEl>
+                                          <p:spTgt spid="7"/>
+                                        </p:tgtEl>
+                                        <p:attrNameLst>
+                                          <p:attrName>style.visibility</p:attrName>
+                                        </p:attrNameLst>
+                                      </p:cBhvr>
+                                      <p:to>
+                                        <p:strVal val="visible"/>
+                                      </p:to>
+                                    </p:set>
+                                    <p:animEffect transition="in" filter="fade">
+                                      <p:cBhvr>
+                                        <p:cTn id="22" dur="500"/>
+                                        <p:tgtEl>
+                                          <p:spTgt spid="7"/>
+                                        </p:tgtEl>
+                                      </p:cBhvr>
+                                    </p:animEffect>
+                                  </p:childTnLst>
+                                </p:cTn>
+                              </p:par>
+                            </p:childTnLst>
+                          </p:cTn>
+                        </p:par>
+                      </p:childTnLst>
+                    </p:cTn>
+                  </p:par>
+                </p:childTnLst>
+              </p:cTn>
+              <p:prevCondLst>
+                <p:cond evt="onPrev" delay="0">
+                  <p:tgtEl>
+                    <p:sldTgt/>
+                  </p:tgtEl>
+                </p:cond>
+              </p:prevCondLst>
+              <p:nextCondLst>
+                <p:cond evt="onNext" delay="0">
+                  <p:tgtEl>
+                    <p:sldTgt/>
+                  </p:tgtEl>
+                </p:cond>
+              </p:nextCondLst>
+            </p:seq>
+          </p:childTnLst>
+        </p:cTn>
+      </p:par>
+    </p:tnLst>
+    <p:bldLst>
+      <p:bldP spid="2" grpId="0" animBg="1"/>
+      <p:bldP spid="6" grpId="0" animBg="1"/>
+      <p:bldP spid="7" grpId="0" animBg="1"/>
+    </p:bldLst>
+  </p:timing>
+</p:sld>
+</file>
+
+<file path=ppt/slides/slide6.xml><?xml version="1.0" encoding="utf-8"?>
+<p:sld xmlns:a="http://schemas.openxmlformats.org/drawingml/2006/main" xmlns:p="http://schemas.openxmlformats.org/presentationml/2006/main" xmlns:r="http://schemas.openxmlformats.org/officeDocument/2006/relationships">
+  <p:cSld>
+    <p:spTree>
+      <p:nvGrpSpPr>
+        <p:cNvPr id="1" name=""/>
+        <p:cNvGrpSpPr/>
+        <p:nvPr/>
+      </p:nvGrpSpPr>
+      <p:grpSpPr/>
+      <p:sp>
+        <p:nvSpPr>
+          <p:cNvPr id="4" name="Rectangle 3"/>
+          <p:cNvSpPr/>
+          <p:nvPr/>
+        </p:nvSpPr>
+        <p:spPr>
+          <a:xfrm>
+            <a:off x="274320" y="274320"/>
+            <a:ext cx="11643360" cy="6309360"/>
+          </a:xfrm>
+          <a:prstGeom prst="rect">
+            <a:avLst/>
+          </a:prstGeom>
+          <a:noFill/>
+          <a:ln w="12700">
+            <a:solidFill>
+              <a:srgbClr val="F4B183"/>
+            </a:solidFill>
+          </a:ln>
+        </p:spPr>
+        <p:style>
+          <a:lnRef idx="1">
+            <a:schemeClr val="accent1"/>
+          </a:lnRef>
+          <a:fillRef idx="3">
+            <a:schemeClr val="accent1"/>
+          </a:fillRef>
+          <a:effectRef idx="2">
+            <a:schemeClr val="accent1"/>
+          </a:effectRef>
+          <a:fontRef idx="minor">
+            <a:schemeClr val="lt1"/>
+          </a:fontRef>
+        </p:style>
+        <p:txBody>
+          <a:bodyPr rtlCol="0" anchor="ctr"/>
+          <a:lstStyle/>
+          <a:p>
+            <a:pPr algn="ctr"/>
+          </a:p>
+        </p:txBody>
+      </p:sp>
+      <p:sp>
+        <p:nvSpPr>
+          <p:cNvPr id="2" name="Title 1"/>
+          <p:cNvSpPr>
+            <a:spLocks noGrp="1"/>
+          </p:cNvSpPr>
+          <p:nvPr>
+            <p:ph type="title"/>
+          </p:nvPr>
+        </p:nvSpPr>
+        <p:spPr>
+          <a:xfrm>
+            <a:off x="731520" y="502920"/>
+            <a:ext cx="10728960" cy="731520"/>
+          </a:xfrm>
+        </p:spPr>
+        <p:txBody>
+          <a:bodyPr anchor="ctr"/>
+          <a:lstStyle/>
+          <a:p>
+            <a:pPr algn="ctr"/>
+            <a:r>
+              <a:rPr sz="3600" b="1">
+                <a:solidFill>
+                  <a:srgbClr val="1F3864"/>
+                </a:solidFill>
+                <a:latin typeface="Cambria"/>
+              </a:rPr>
+              <a:t>Attractiveness Scores</a:t>
+            </a:r>
+          </a:p>
+        </p:txBody>
+      </p:sp>
+      <p:graphicFrame>
+        <p:nvGraphicFramePr>
+          <p:cNvPr id="3" name="Content Placeholder 2"/>
+          <p:cNvGraphicFramePr>
+            <a:graphicFrameLocks noGrp="1"/>
+          </p:cNvGraphicFramePr>
+          <p:nvPr>
+            <p:ph idx="1"/>
+          </p:nvPr>
+        </p:nvGraphicFramePr>
+        <p:xfrm>
+          <a:off x="723900" y="1965960"/>
+          <a:ext cx="10744200" cy="3383280"/>
+        </p:xfrm>
+        <a:graphic>
+          <a:graphicData uri="http://schemas.openxmlformats.org/drawingml/2006/table">
+            <a:tbl>
+              <a:tblPr firstRow="1">
+                <a:tableStyleId>{5940675A-B579-460E-94D1-54222C63F5DA}</a:tableStyleId>
+              </a:tblPr>
+              <a:tblGrid>
+                <a:gridCol w="2743200"/>
+                <a:gridCol w="1325880"/>
+                <a:gridCol w="1325880"/>
+                <a:gridCol w="1325880"/>
+                <a:gridCol w="1325880"/>
+                <a:gridCol w="1325880"/>
+                <a:gridCol w="1371600"/>
+              </a:tblGrid>
+              <a:tr h="731520">
+                <a:tc>
+                  <a:txBody>
+                    <a:bodyPr/>
+                    <a:lstStyle/>
+                    <a:p>
+                      <a:pPr algn="l"/>
+                      <a:r>
+                        <a:rPr sz="1600" b="1">
+                          <a:solidFill>
+                            <a:srgbClr val="FFFFFF"/>
+                          </a:solidFill>
+                          <a:latin typeface="Calibri"/>
+                        </a:rPr>
+                        <a:t>Segment</a:t>
+                      </a:r>
+                    </a:p>
+                  </a:txBody>
+                  <a:tcPr anchor="ctr">
+                    <a:lnL w="12700" cap="flat" cmpd="sng" algn="ctr">
+                      <a:solidFill>
+                        <a:srgbClr val="BFBFBF"/>
+                      </a:solidFill>
+                      <a:prstDash val="solid"/>
+                      <a:round/>
+                      <a:headEnd type="none" w="med" len="med"/>
+                      <a:tailEnd type="none" w="med" len="med"/>
+                    </a:lnL>
+                    <a:lnR w="12700" cap="flat" cmpd="sng" algn="ctr">
+                      <a:solidFill>
+                        <a:srgbClr val="BFBFBF"/>
+                      </a:solidFill>
+                      <a:prstDash val="solid"/>
+                      <a:round/>
+                      <a:headEnd type="none" w="med" len="med"/>
+                      <a:tailEnd type="none" w="med" len="med"/>
+                    </a:lnR>
+                    <a:lnT w="12700" cap="flat" cmpd="sng" algn="ctr">
+                      <a:solidFill>
+                        <a:srgbClr val="BFBFBF"/>
+                      </a:solidFill>
+                      <a:prstDash val="solid"/>
+                      <a:round/>
+                      <a:headEnd type="none" w="med" len="med"/>
+                      <a:tailEnd type="none" w="med" len="med"/>
+                    </a:lnT>
+                    <a:lnB w="12700" cap="flat" cmpd="sng" algn="ctr">
+                      <a:solidFill>
+                        <a:srgbClr val="BFBFBF"/>
+                      </a:solidFill>
+                      <a:prstDash val="solid"/>
+                      <a:round/>
+                      <a:headEnd type="none" w="med" len="med"/>
+                      <a:tailEnd type="none" w="med" len="med"/>
+                    </a:lnB>
+                    <a:solidFill>
+                      <a:srgbClr val="1F3864"/>
+                    </a:solidFill>
+                  </a:tcPr>
+                </a:tc>
+                <a:tc>
+                  <a:txBody>
+                    <a:bodyPr/>
+                    <a:lstStyle/>
+                    <a:p>
+                      <a:pPr algn="ctr"/>
+                      <a:r>
+                        <a:rPr sz="1600" b="1">
+                          <a:solidFill>
+                            <a:srgbClr val="FFFFFF"/>
+                          </a:solidFill>
+                          <a:latin typeface="Calibri"/>
+                        </a:rPr>
+                        <a:t>Interest (30%)</a:t>
+                      </a:r>
+                    </a:p>
+                  </a:txBody>
+                  <a:tcPr anchor="ctr">
+                    <a:lnL w="12700" cap="flat" cmpd="sng" algn="ctr">
+                      <a:solidFill>
+                        <a:srgbClr val="BFBFBF"/>
+                      </a:solidFill>
+                      <a:prstDash val="solid"/>
+                      <a:round/>
+                      <a:headEnd type="none" w="med" len="med"/>
+                      <a:tailEnd type="none" w="med" len="med"/>
+                    </a:lnL>
+                    <a:lnR w="12700" cap="flat" cmpd="sng" algn="ctr">
+                      <a:solidFill>
+                        <a:srgbClr val="BFBFBF"/>
+                      </a:solidFill>
+                      <a:prstDash val="solid"/>
+                      <a:round/>
+                      <a:headEnd type="none" w="med" len="med"/>
+                      <a:tailEnd type="none" w="med" len="med"/>
+                    </a:lnR>
+                    <a:lnT w="12700" cap="flat" cmpd="sng" algn="ctr">
+                      <a:solidFill>
+                        <a:srgbClr val="BFBFBF"/>
+                      </a:solidFill>
+                      <a:prstDash val="solid"/>
+                      <a:round/>
+                      <a:headEnd type="none" w="med" len="med"/>
+                      <a:tailEnd type="none" w="med" len="med"/>
+                    </a:lnT>
+                    <a:lnB w="12700" cap="flat" cmpd="sng" algn="ctr">
+                      <a:solidFill>
+                        <a:srgbClr val="BFBFBF"/>
+                      </a:solidFill>
+                      <a:prstDash val="solid"/>
+                      <a:round/>
+                      <a:headEnd type="none" w="med" len="med"/>
+                      <a:tailEnd type="none" w="med" len="med"/>
+                    </a:lnB>
+                    <a:solidFill>
+                      <a:srgbClr val="1F3864"/>
+                    </a:solidFill>
+                  </a:tcPr>
+                </a:tc>
+                <a:tc>
+                  <a:txBody>
+                    <a:bodyPr/>
+                    <a:lstStyle/>
+                    <a:p>
+                      <a:pPr algn="ctr"/>
+                      <a:r>
+                        <a:rPr sz="1600" b="1">
+                          <a:solidFill>
+                            <a:srgbClr val="FFFFFF"/>
+                          </a:solidFill>
+                          <a:latin typeface="Calibri"/>
+                        </a:rPr>
+                        <a:t>Growth (20%)</a:t>
+                      </a:r>
+                    </a:p>
+                  </a:txBody>
+                  <a:tcPr anchor="ctr">
+                    <a:lnL w="12700" cap="flat" cmpd="sng" algn="ctr">
+                      <a:solidFill>
+                        <a:srgbClr val="BFBFBF"/>
+                      </a:solidFill>
+                      <a:prstDash val="solid"/>
+                      <a:round/>
+                      <a:headEnd type="none" w="med" len="med"/>
+                      <a:tailEnd type="none" w="med" len="med"/>
+                    </a:lnL>
+                    <a:lnR w="12700" cap="flat" cmpd="sng" algn="ctr">
+                      <a:solidFill>
+                        <a:srgbClr val="BFBFBF"/>
+                      </a:solidFill>
+                      <a:prstDash val="solid"/>
+                      <a:round/>
+                      <a:headEnd type="none" w="med" len="med"/>
+                      <a:tailEnd type="none" w="med" len="med"/>
+                    </a:lnR>
+                    <a:lnT w="12700" cap="flat" cmpd="sng" algn="ctr">
+                      <a:solidFill>
+                        <a:srgbClr val="BFBFBF"/>
+                      </a:solidFill>
+                      <a:prstDash val="solid"/>
+                      <a:round/>
+                      <a:headEnd type="none" w="med" len="med"/>
+                      <a:tailEnd type="none" w="med" len="med"/>
+                    </a:lnT>
+                    <a:lnB w="12700" cap="flat" cmpd="sng" algn="ctr">
+                      <a:solidFill>
+                        <a:srgbClr val="BFBFBF"/>
+                      </a:solidFill>
+                      <a:prstDash val="solid"/>
+                      <a:round/>
+                      <a:headEnd type="none" w="med" len="med"/>
+                      <a:tailEnd type="none" w="med" len="med"/>
+                    </a:lnB>
+                    <a:solidFill>
+                      <a:srgbClr val="1F3864"/>
+                    </a:solidFill>
+                  </a:tcPr>
+                </a:tc>
+                <a:tc>
+                  <a:txBody>
+                    <a:bodyPr/>
+                    <a:lstStyle/>
+                    <a:p>
+                      <a:pPr algn="ctr"/>
+                      <a:r>
+                        <a:rPr sz="1600" b="1">
+                          <a:solidFill>
+                            <a:srgbClr val="FFFFFF"/>
+                          </a:solidFill>
+                          <a:latin typeface="Calibri"/>
+                        </a:rPr>
+                        <a:t>Spread (15%)</a:t>
+                      </a:r>
+                    </a:p>
+                  </a:txBody>
+                  <a:tcPr anchor="ctr">
+                    <a:lnL w="12700" cap="flat" cmpd="sng" algn="ctr">
+                      <a:solidFill>
+                        <a:srgbClr val="BFBFBF"/>
+                      </a:solidFill>
+                      <a:prstDash val="solid"/>
+                      <a:round/>
+                      <a:headEnd type="none" w="med" len="med"/>
+                      <a:tailEnd type="none" w="med" len="med"/>
+                    </a:lnL>
+                    <a:lnR w="12700" cap="flat" cmpd="sng" algn="ctr">
+                      <a:solidFill>
+                        <a:srgbClr val="BFBFBF"/>
+                      </a:solidFill>
+                      <a:prstDash val="solid"/>
+                      <a:round/>
+                      <a:headEnd type="none" w="med" len="med"/>
+                      <a:tailEnd type="none" w="med" len="med"/>
+                    </a:lnR>
+                    <a:lnT w="12700" cap="flat" cmpd="sng" algn="ctr">
+                      <a:solidFill>
+                        <a:srgbClr val="BFBFBF"/>
+                      </a:solidFill>
+                      <a:prstDash val="solid"/>
+                      <a:round/>
+                      <a:headEnd type="none" w="med" len="med"/>
+                      <a:tailEnd type="none" w="med" len="med"/>
+                    </a:lnT>
+                    <a:lnB w="12700" cap="flat" cmpd="sng" algn="ctr">
+                      <a:solidFill>
+                        <a:srgbClr val="BFBFBF"/>
+                      </a:solidFill>
+                      <a:prstDash val="solid"/>
+                      <a:round/>
+                      <a:headEnd type="none" w="med" len="med"/>
+                      <a:tailEnd type="none" w="med" len="med"/>
+                    </a:lnB>
+                    <a:solidFill>
+                      <a:srgbClr val="1F3864"/>
+                    </a:solidFill>
+                  </a:tcPr>
+                </a:tc>
+                <a:tc>
+                  <a:txBody>
+                    <a:bodyPr/>
+                    <a:lstStyle/>
+                    <a:p>
+                      <a:pPr algn="ctr"/>
+                      <a:r>
+                        <a:rPr sz="1600" b="1">
+                          <a:solidFill>
+                            <a:srgbClr val="FFFFFF"/>
+                          </a:solidFill>
+                          <a:latin typeface="Calibri"/>
+                        </a:rPr>
+                        <a:t>Ability to pay (20%)</a:t>
+                      </a:r>
+                    </a:p>
+                  </a:txBody>
+                  <a:tcPr anchor="ctr">
+                    <a:lnL w="12700" cap="flat" cmpd="sng" algn="ctr">
+                      <a:solidFill>
+                        <a:srgbClr val="BFBFBF"/>
+                      </a:solidFill>
+                      <a:prstDash val="solid"/>
+                      <a:round/>
+                      <a:headEnd type="none" w="med" len="med"/>
+                      <a:tailEnd type="none" w="med" len="med"/>
+                    </a:lnL>
+                    <a:lnR w="12700" cap="flat" cmpd="sng" algn="ctr">
+                      <a:solidFill>
+                        <a:srgbClr val="BFBFBF"/>
+                      </a:solidFill>
+                      <a:prstDash val="solid"/>
+                      <a:round/>
+                      <a:headEnd type="none" w="med" len="med"/>
+                      <a:tailEnd type="none" w="med" len="med"/>
+                    </a:lnR>
+                    <a:lnT w="12700" cap="flat" cmpd="sng" algn="ctr">
+                      <a:solidFill>
+                        <a:srgbClr val="BFBFBF"/>
+                      </a:solidFill>
+                      <a:prstDash val="solid"/>
+                      <a:round/>
+                      <a:headEnd type="none" w="med" len="med"/>
+                      <a:tailEnd type="none" w="med" len="med"/>
+                    </a:lnT>
+                    <a:lnB w="12700" cap="flat" cmpd="sng" algn="ctr">
+                      <a:solidFill>
+                        <a:srgbClr val="BFBFBF"/>
+                      </a:solidFill>
+                      <a:prstDash val="solid"/>
+                      <a:round/>
+                      <a:headEnd type="none" w="med" len="med"/>
+                      <a:tailEnd type="none" w="med" len="med"/>
+                    </a:lnB>
+                    <a:solidFill>
+                      <a:srgbClr val="1F3864"/>
+                    </a:solidFill>
+                  </a:tcPr>
+                </a:tc>
+                <a:tc>
+                  <a:txBody>
+                    <a:bodyPr/>
+                    <a:lstStyle/>
+                    <a:p>
+                      <a:pPr algn="ctr"/>
+                      <a:r>
+                        <a:rPr sz="1600" b="1">
+                          <a:solidFill>
+                            <a:srgbClr val="FFFFFF"/>
+                          </a:solidFill>
+                          <a:latin typeface="Calibri"/>
+                        </a:rPr>
+                        <a:t>Competition (15%)</a:t>
+                      </a:r>
+                    </a:p>
+                  </a:txBody>
+                  <a:tcPr anchor="ctr">
+                    <a:lnL w="12700" cap="flat" cmpd="sng" algn="ctr">
+                      <a:solidFill>
+                        <a:srgbClr val="BFBFBF"/>
+                      </a:solidFill>
+                      <a:prstDash val="solid"/>
+                      <a:round/>
+                      <a:headEnd type="none" w="med" len="med"/>
+                      <a:tailEnd type="none" w="med" len="med"/>
+                    </a:lnL>
+                    <a:lnR w="12700" cap="flat" cmpd="sng" algn="ctr">
+                      <a:solidFill>
+                        <a:srgbClr val="BFBFBF"/>
+                      </a:solidFill>
+                      <a:prstDash val="solid"/>
+                      <a:round/>
+                      <a:headEnd type="none" w="med" len="med"/>
+                      <a:tailEnd type="none" w="med" len="med"/>
+                    </a:lnR>
+                    <a:lnT w="12700" cap="flat" cmpd="sng" algn="ctr">
+                      <a:solidFill>
+                        <a:srgbClr val="BFBFBF"/>
+                      </a:solidFill>
+                      <a:prstDash val="solid"/>
+                      <a:round/>
+                      <a:headEnd type="none" w="med" len="med"/>
+                      <a:tailEnd type="none" w="med" len="med"/>
+                    </a:lnT>
+                    <a:lnB w="12700" cap="flat" cmpd="sng" algn="ctr">
+                      <a:solidFill>
+                        <a:srgbClr val="BFBFBF"/>
+                      </a:solidFill>
+                      <a:prstDash val="solid"/>
+                      <a:round/>
+                      <a:headEnd type="none" w="med" len="med"/>
+                      <a:tailEnd type="none" w="med" len="med"/>
+                    </a:lnB>
+                    <a:solidFill>
+                      <a:srgbClr val="1F3864"/>
+                    </a:solidFill>
+                  </a:tcPr>
+                </a:tc>
+                <a:tc>
+                  <a:txBody>
+                    <a:bodyPr/>
+                    <a:lstStyle/>
+                    <a:p>
+                      <a:pPr algn="ctr"/>
+                      <a:r>
+                        <a:rPr sz="1600" b="1">
+                          <a:solidFill>
+                            <a:srgbClr val="FFFFFF"/>
+                          </a:solidFill>
+                          <a:latin typeface="Calibri"/>
+                        </a:rPr>
+                        <a:t>Score (of 5)</a:t>
+                      </a:r>
+                    </a:p>
+                  </a:txBody>
+                  <a:tcPr anchor="ctr">
+                    <a:lnL w="12700" cap="flat" cmpd="sng" algn="ctr">
+                      <a:solidFill>
+                        <a:srgbClr val="BFBFBF"/>
+                      </a:solidFill>
+                      <a:prstDash val="solid"/>
+                      <a:round/>
+                      <a:headEnd type="none" w="med" len="med"/>
+                      <a:tailEnd type="none" w="med" len="med"/>
+                    </a:lnL>
+                    <a:lnR w="12700" cap="flat" cmpd="sng" algn="ctr">
+                      <a:solidFill>
+                        <a:srgbClr val="BFBFBF"/>
+                      </a:solidFill>
+                      <a:prstDash val="solid"/>
+                      <a:round/>
+                      <a:headEnd type="none" w="med" len="med"/>
+                      <a:tailEnd type="none" w="med" len="med"/>
+                    </a:lnR>
+                    <a:lnT w="12700" cap="flat" cmpd="sng" algn="ctr">
+                      <a:solidFill>
+                        <a:srgbClr val="BFBFBF"/>
+                      </a:solidFill>
+                      <a:prstDash val="solid"/>
+                      <a:round/>
+                      <a:headEnd type="none" w="med" len="med"/>
+                      <a:tailEnd type="none" w="med" len="med"/>
+                    </a:lnT>
+                    <a:lnB w="12700" cap="flat" cmpd="sng" algn="ctr">
+                      <a:solidFill>
+                        <a:srgbClr val="BFBFBF"/>
+                      </a:solidFill>
+                      <a:prstDash val="solid"/>
+                      <a:round/>
+                      <a:headEnd type="none" w="med" len="med"/>
+                      <a:tailEnd type="none" w="med" len="med"/>
+                    </a:lnB>
+                    <a:solidFill>
+                      <a:srgbClr val="1F3864"/>
+                    </a:solidFill>
+                  </a:tcPr>
+                </a:tc>
+              </a:tr>
+              <a:tr h="530352">
+                <a:tc>
+                  <a:txBody>
+                    <a:bodyPr/>
+                    <a:lstStyle/>
+                    <a:p>
+                      <a:pPr algn="l"/>
+                      <a:r>
+                        <a:rPr sz="1600" b="1">
+                          <a:solidFill>
+                            <a:srgbClr val="000000"/>
+                          </a:solidFill>
+                          <a:latin typeface="Calibri"/>
+                        </a:rPr>
+                        <a:t>Cybersecurity learners</a:t>
+                      </a:r>
+                    </a:p>
+                  </a:txBody>
+                  <a:tcPr anchor="ctr">
+                    <a:lnL w="12700" cap="flat" cmpd="sng" algn="ctr">
+                      <a:solidFill>
+                        <a:srgbClr val="BFBFBF"/>
+                      </a:solidFill>
+                      <a:prstDash val="solid"/>
+                      <a:round/>
+                      <a:headEnd type="none" w="med" len="med"/>
+                      <a:tailEnd type="none" w="med" len="med"/>
+                    </a:lnL>
+                    <a:lnR w="12700" cap="flat" cmpd="sng" algn="ctr">
+                      <a:solidFill>
+                        <a:srgbClr val="BFBFBF"/>
+                      </a:solidFill>
+                      <a:prstDash val="solid"/>
+                      <a:round/>
+                      <a:headEnd type="none" w="med" len="med"/>
+                      <a:tailEnd type="none" w="med" len="med"/>
+                    </a:lnR>
+                    <a:lnT w="12700" cap="flat" cmpd="sng" algn="ctr">
+                      <a:solidFill>
+                        <a:srgbClr val="BFBFBF"/>
+                      </a:solidFill>
+                      <a:prstDash val="solid"/>
+                      <a:round/>
+                      <a:headEnd type="none" w="med" len="med"/>
+                      <a:tailEnd type="none" w="med" len="med"/>
+                    </a:lnT>
+                    <a:lnB w="12700" cap="flat" cmpd="sng" algn="ctr">
+                      <a:solidFill>
+                        <a:srgbClr val="BFBFBF"/>
+                      </a:solidFill>
+                      <a:prstDash val="solid"/>
+                      <a:round/>
+                      <a:headEnd type="none" w="med" len="med"/>
+                      <a:tailEnd type="none" w="med" len="med"/>
+                    </a:lnB>
+                    <a:noFill/>
+                  </a:tcPr>
+                </a:tc>
+                <a:tc>
+                  <a:txBody>
+                    <a:bodyPr/>
+                    <a:lstStyle/>
+                    <a:p>
+                      <a:pPr algn="ctr"/>
+                      <a:r>
+                        <a:rPr sz="1600" b="1">
+                          <a:solidFill>
+                            <a:srgbClr val="000000"/>
+                          </a:solidFill>
+                          <a:latin typeface="Calibri"/>
+                        </a:rPr>
+                        <a:t>5</a:t>
+                      </a:r>
+                    </a:p>
+                  </a:txBody>
+                  <a:tcPr anchor="ctr">
+                    <a:lnL w="12700" cap="flat" cmpd="sng" algn="ctr">
+                      <a:solidFill>
+                        <a:srgbClr val="BFBFBF"/>
+                      </a:solidFill>
+                      <a:prstDash val="solid"/>
+                      <a:round/>
+                      <a:headEnd type="none" w="med" len="med"/>
+                      <a:tailEnd type="none" w="med" len="med"/>
+                    </a:lnL>
+                    <a:lnR w="12700" cap="flat" cmpd="sng" algn="ctr">
+                      <a:solidFill>
+                        <a:srgbClr val="BFBFBF"/>
+                      </a:solidFill>
+                      <a:prstDash val="solid"/>
+                      <a:round/>
+                      <a:headEnd type="none" w="med" len="med"/>
+                      <a:tailEnd type="none" w="med" len="med"/>
+                    </a:lnR>
+                    <a:lnT w="12700" cap="flat" cmpd="sng" algn="ctr">
+                      <a:solidFill>
+                        <a:srgbClr val="BFBFBF"/>
+                      </a:solidFill>
+                      <a:prstDash val="solid"/>
+                      <a:round/>
+                      <a:headEnd type="none" w="med" len="med"/>
+                      <a:tailEnd type="none" w="med" len="med"/>
+                    </a:lnT>
+                    <a:lnB w="12700" cap="flat" cmpd="sng" algn="ctr">
+                      <a:solidFill>
+                        <a:srgbClr val="BFBFBF"/>
+                      </a:solidFill>
+                      <a:prstDash val="solid"/>
+                      <a:round/>
+                      <a:headEnd type="none" w="med" len="med"/>
+                      <a:tailEnd type="none" w="med" len="med"/>
+                    </a:lnB>
+                    <a:noFill/>
+                  </a:tcPr>
+                </a:tc>
+                <a:tc>
+                  <a:txBody>
+                    <a:bodyPr/>
+                    <a:lstStyle/>
+                    <a:p>
+                      <a:pPr algn="ctr"/>
+                      <a:r>
+                        <a:rPr sz="1600" b="1">
+                          <a:solidFill>
+                            <a:srgbClr val="000000"/>
+                          </a:solidFill>
+                          <a:latin typeface="Calibri"/>
+                        </a:rPr>
+                        <a:t>5</a:t>
+                      </a:r>
+                    </a:p>
+                  </a:txBody>
+                  <a:tcPr anchor="ctr">
+                    <a:lnL w="12700" cap="flat" cmpd="sng" algn="ctr">
+                      <a:solidFill>
+                        <a:srgbClr val="BFBFBF"/>
+                      </a:solidFill>
+                      <a:prstDash val="solid"/>
+                      <a:round/>
+                      <a:headEnd type="none" w="med" len="med"/>
+                      <a:tailEnd type="none" w="med" len="med"/>
+                    </a:lnL>
+                    <a:lnR w="12700" cap="flat" cmpd="sng" algn="ctr">
+                      <a:solidFill>
+                        <a:srgbClr val="BFBFBF"/>
+                      </a:solidFill>
+                      <a:prstDash val="solid"/>
+                      <a:round/>
+                      <a:headEnd type="none" w="med" len="med"/>
+                      <a:tailEnd type="none" w="med" len="med"/>
+                    </a:lnR>
+                    <a:lnT w="12700" cap="flat" cmpd="sng" algn="ctr">
+                      <a:solidFill>
+                        <a:srgbClr val="BFBFBF"/>
+                      </a:solidFill>
+                      <a:prstDash val="solid"/>
+                      <a:round/>
+                      <a:headEnd type="none" w="med" len="med"/>
+                      <a:tailEnd type="none" w="med" len="med"/>
+                    </a:lnT>
+                    <a:lnB w="12700" cap="flat" cmpd="sng" algn="ctr">
+                      <a:solidFill>
+                        <a:srgbClr val="BFBFBF"/>
+                      </a:solidFill>
+                      <a:prstDash val="solid"/>
+                      <a:round/>
+                      <a:headEnd type="none" w="med" len="med"/>
+                      <a:tailEnd type="none" w="med" len="med"/>
+                    </a:lnB>
+                    <a:noFill/>
+                  </a:tcPr>
+                </a:tc>
+                <a:tc>
+                  <a:txBody>
+                    <a:bodyPr/>
+                    <a:lstStyle/>
+                    <a:p>
+                      <a:pPr algn="ctr"/>
+                      <a:r>
+                        <a:rPr sz="1600" b="1">
+                          <a:solidFill>
+                            <a:srgbClr val="000000"/>
+                          </a:solidFill>
+                          <a:latin typeface="Calibri"/>
+                        </a:rPr>
+                        <a:t>5</a:t>
+                      </a:r>
+                    </a:p>
+                  </a:txBody>
+                  <a:tcPr anchor="ctr">
+                    <a:lnL w="12700" cap="flat" cmpd="sng" algn="ctr">
+                      <a:solidFill>
+                        <a:srgbClr val="BFBFBF"/>
+                      </a:solidFill>
+                      <a:prstDash val="solid"/>
+                      <a:round/>
+                      <a:headEnd type="none" w="med" len="med"/>
+                      <a:tailEnd type="none" w="med" len="med"/>
+                    </a:lnL>
+                    <a:lnR w="12700" cap="flat" cmpd="sng" algn="ctr">
+                      <a:solidFill>
+                        <a:srgbClr val="BFBFBF"/>
+                      </a:solidFill>
+                      <a:prstDash val="solid"/>
+                      <a:round/>
+                      <a:headEnd type="none" w="med" len="med"/>
+                      <a:tailEnd type="none" w="med" len="med"/>
+                    </a:lnR>
+                    <a:lnT w="12700" cap="flat" cmpd="sng" algn="ctr">
+                      <a:solidFill>
+                        <a:srgbClr val="BFBFBF"/>
+                      </a:solidFill>
+                      <a:prstDash val="solid"/>
+                      <a:round/>
+                      <a:headEnd type="none" w="med" len="med"/>
+                      <a:tailEnd type="none" w="med" len="med"/>
+                    </a:lnT>
+                    <a:lnB w="12700" cap="flat" cmpd="sng" algn="ctr">
+                      <a:solidFill>
+                        <a:srgbClr val="BFBFBF"/>
+                      </a:solidFill>
+                      <a:prstDash val="solid"/>
+                      <a:round/>
+                      <a:headEnd type="none" w="med" len="med"/>
+                      <a:tailEnd type="none" w="med" len="med"/>
+                    </a:lnB>
+                    <a:noFill/>
+                  </a:tcPr>
+                </a:tc>
+                <a:tc>
+                  <a:txBody>
+                    <a:bodyPr/>
+                    <a:lstStyle/>
+                    <a:p>
+                      <a:pPr algn="ctr"/>
+                      <a:r>
+                        <a:rPr sz="1600" b="1">
+                          <a:solidFill>
+                            <a:srgbClr val="000000"/>
+                          </a:solidFill>
+                          <a:latin typeface="Calibri"/>
+                        </a:rPr>
+                        <a:t>4</a:t>
+                      </a:r>
+                    </a:p>
+                  </a:txBody>
+                  <a:tcPr anchor="ctr">
+                    <a:lnL w="12700" cap="flat" cmpd="sng" algn="ctr">
+                      <a:solidFill>
+                        <a:srgbClr val="BFBFBF"/>
+                      </a:solidFill>
+                      <a:prstDash val="solid"/>
+                      <a:round/>
+                      <a:headEnd type="none" w="med" len="med"/>
+                      <a:tailEnd type="none" w="med" len="med"/>
+                    </a:lnL>
+                    <a:lnR w="12700" cap="flat" cmpd="sng" algn="ctr">
+                      <a:solidFill>
+                        <a:srgbClr val="BFBFBF"/>
+                      </a:solidFill>
+                      <a:prstDash val="solid"/>
+                      <a:round/>
+                      <a:headEnd type="none" w="med" len="med"/>
+                      <a:tailEnd type="none" w="med" len="med"/>
+                    </a:lnR>
+                    <a:lnT w="12700" cap="flat" cmpd="sng" algn="ctr">
+                      <a:solidFill>
+                        <a:srgbClr val="BFBFBF"/>
+                      </a:solidFill>
+                      <a:prstDash val="solid"/>
+                      <a:round/>
+                      <a:headEnd type="none" w="med" len="med"/>
+                      <a:tailEnd type="none" w="med" len="med"/>
+                    </a:lnT>
+                    <a:lnB w="12700" cap="flat" cmpd="sng" algn="ctr">
+                      <a:solidFill>
+                        <a:srgbClr val="BFBFBF"/>
+                      </a:solidFill>
+                      <a:prstDash val="solid"/>
+                      <a:round/>
+                      <a:headEnd type="none" w="med" len="med"/>
+                      <a:tailEnd type="none" w="med" len="med"/>
+                    </a:lnB>
+                    <a:noFill/>
+                  </a:tcPr>
+                </a:tc>
+                <a:tc>
+                  <a:txBody>
+                    <a:bodyPr/>
+                    <a:lstStyle/>
+                    <a:p>
+                      <a:pPr algn="ctr"/>
+                      <a:r>
+                        <a:rPr sz="1600" b="1">
+                          <a:solidFill>
+                            <a:srgbClr val="000000"/>
+                          </a:solidFill>
+                          <a:latin typeface="Calibri"/>
+                        </a:rPr>
+                        <a:t>3</a:t>
+                      </a:r>
+                    </a:p>
+                  </a:txBody>
+                  <a:tcPr anchor="ctr">
+                    <a:lnL w="12700" cap="flat" cmpd="sng" algn="ctr">
+                      <a:solidFill>
+                        <a:srgbClr val="BFBFBF"/>
+                      </a:solidFill>
+                      <a:prstDash val="solid"/>
+                      <a:round/>
+                      <a:headEnd type="none" w="med" len="med"/>
+                      <a:tailEnd type="none" w="med" len="med"/>
+                    </a:lnL>
+                    <a:lnR w="12700" cap="flat" cmpd="sng" algn="ctr">
+                      <a:solidFill>
+                        <a:srgbClr val="BFBFBF"/>
+                      </a:solidFill>
+                      <a:prstDash val="solid"/>
+                      <a:round/>
+                      <a:headEnd type="none" w="med" len="med"/>
+                      <a:tailEnd type="none" w="med" len="med"/>
+                    </a:lnR>
+                    <a:lnT w="12700" cap="flat" cmpd="sng" algn="ctr">
+                      <a:solidFill>
+                        <a:srgbClr val="BFBFBF"/>
+                      </a:solidFill>
+                      <a:prstDash val="solid"/>
+                      <a:round/>
+                      <a:headEnd type="none" w="med" len="med"/>
+                      <a:tailEnd type="none" w="med" len="med"/>
+                    </a:lnT>
+                    <a:lnB w="12700" cap="flat" cmpd="sng" algn="ctr">
+                      <a:solidFill>
+                        <a:srgbClr val="BFBFBF"/>
+                      </a:solidFill>
+                      <a:prstDash val="solid"/>
+                      <a:round/>
+                      <a:headEnd type="none" w="med" len="med"/>
+                      <a:tailEnd type="none" w="med" len="med"/>
+                    </a:lnB>
+                    <a:noFill/>
+                  </a:tcPr>
+                </a:tc>
+                <a:tc>
+                  <a:txBody>
+                    <a:bodyPr/>
+                    <a:lstStyle/>
+                    <a:p>
+                      <a:pPr algn="ctr"/>
+                      <a:r>
+                        <a:rPr sz="1600" b="1">
+                          <a:solidFill>
+                            <a:srgbClr val="000000"/>
+                          </a:solidFill>
+                          <a:latin typeface="Calibri"/>
+                        </a:rPr>
+                        <a:t>4.50</a:t>
+                      </a:r>
+                    </a:p>
+                  </a:txBody>
+                  <a:tcPr anchor="ctr">
+                    <a:lnL w="12700" cap="flat" cmpd="sng" algn="ctr">
+                      <a:solidFill>
+                        <a:srgbClr val="BFBFBF"/>
+                      </a:solidFill>
+                      <a:prstDash val="solid"/>
+                      <a:round/>
+                      <a:headEnd type="none" w="med" len="med"/>
+                      <a:tailEnd type="none" w="med" len="med"/>
+                    </a:lnL>
+                    <a:lnR w="12700" cap="flat" cmpd="sng" algn="ctr">
+                      <a:solidFill>
+                        <a:srgbClr val="BFBFBF"/>
+                      </a:solidFill>
+                      <a:prstDash val="solid"/>
+                      <a:round/>
+                      <a:headEnd type="none" w="med" len="med"/>
+                      <a:tailEnd type="none" w="med" len="med"/>
+                    </a:lnR>
+                    <a:lnT w="12700" cap="flat" cmpd="sng" algn="ctr">
+                      <a:solidFill>
+                        <a:srgbClr val="BFBFBF"/>
+                      </a:solidFill>
+                      <a:prstDash val="solid"/>
+                      <a:round/>
+                      <a:headEnd type="none" w="med" len="med"/>
+                      <a:tailEnd type="none" w="med" len="med"/>
+                    </a:lnT>
+                    <a:lnB w="12700" cap="flat" cmpd="sng" algn="ctr">
+                      <a:solidFill>
+                        <a:srgbClr val="BFBFBF"/>
+                      </a:solidFill>
+                      <a:prstDash val="solid"/>
+                      <a:round/>
+                      <a:headEnd type="none" w="med" len="med"/>
+                      <a:tailEnd type="none" w="med" len="med"/>
+                    </a:lnB>
+                    <a:noFill/>
+                  </a:tcPr>
+                </a:tc>
+              </a:tr>
+              <a:tr h="530352">
+                <a:tc>
+                  <a:txBody>
+                    <a:bodyPr/>
+                    <a:lstStyle/>
+                    <a:p>
+                      <a:pPr algn="l"/>
+                      <a:r>
+                        <a:rPr sz="1600" b="0">
+                          <a:solidFill>
+                            <a:srgbClr val="000000"/>
+                          </a:solidFill>
+                          <a:latin typeface="Calibri"/>
+                        </a:rPr>
+                        <a:t>Digital marketing learners</a:t>
+                      </a:r>
+                    </a:p>
+                  </a:txBody>
+                  <a:tcPr anchor="ctr">
+                    <a:lnL w="12700" cap="flat" cmpd="sng" algn="ctr">
+                      <a:solidFill>
+                        <a:srgbClr val="BFBFBF"/>
+                      </a:solidFill>
+                      <a:prstDash val="solid"/>
+                      <a:round/>
+                      <a:headEnd type="none" w="med" len="med"/>
+                      <a:tailEnd type="none" w="med" len="med"/>
+                    </a:lnL>
+                    <a:lnR w="12700" cap="flat" cmpd="sng" algn="ctr">
+                      <a:solidFill>
+                        <a:srgbClr val="BFBFBF"/>
+                      </a:solidFill>
+                      <a:prstDash val="solid"/>
+                      <a:round/>
+                      <a:headEnd type="none" w="med" len="med"/>
+                      <a:tailEnd type="none" w="med" len="med"/>
+                    </a:lnR>
+                    <a:lnT w="12700" cap="flat" cmpd="sng" algn="ctr">
+                      <a:solidFill>
+                        <a:srgbClr val="BFBFBF"/>
+                      </a:solidFill>
+                      <a:prstDash val="solid"/>
+                      <a:round/>
+                      <a:headEnd type="none" w="med" len="med"/>
+                      <a:tailEnd type="none" w="med" len="med"/>
+                    </a:lnT>
+                    <a:lnB w="12700" cap="flat" cmpd="sng" algn="ctr">
+                      <a:solidFill>
+                        <a:srgbClr val="BFBFBF"/>
+                      </a:solidFill>
+                      <a:prstDash val="solid"/>
+                      <a:round/>
+                      <a:headEnd type="none" w="med" len="med"/>
+                      <a:tailEnd type="none" w="med" len="med"/>
+                    </a:lnB>
+                    <a:solidFill>
+                      <a:srgbClr val="FBE5D6"/>
+                    </a:solidFill>
+                  </a:tcPr>
+                </a:tc>
+                <a:tc>
+                  <a:txBody>
+                    <a:bodyPr/>
+                    <a:lstStyle/>
+                    <a:p>
+                      <a:pPr algn="ctr"/>
+                      <a:r>
+                        <a:rPr sz="1600" b="0">
+                          <a:solidFill>
+                            <a:srgbClr val="000000"/>
+                          </a:solidFill>
+                          <a:latin typeface="Calibri"/>
+                        </a:rPr>
+                        <a:t>4</a:t>
+                      </a:r>
+                    </a:p>
+                  </a:txBody>
+                  <a:tcPr anchor="ctr">
+                    <a:lnL w="12700" cap="flat" cmpd="sng" algn="ctr">
+                      <a:solidFill>
+                        <a:srgbClr val="BFBFBF"/>
+                      </a:solidFill>
+                      <a:prstDash val="solid"/>
+                      <a:round/>
+                      <a:headEnd type="none" w="med" len="med"/>
+                      <a:tailEnd type="none" w="med" len="med"/>
+                    </a:lnL>
+                    <a:lnR w="12700" cap="flat" cmpd="sng" algn="ctr">
+                      <a:solidFill>
+                        <a:srgbClr val="BFBFBF"/>
+                      </a:solidFill>
+                      <a:prstDash val="solid"/>
+                      <a:round/>
+                      <a:headEnd type="none" w="med" len="med"/>
+                      <a:tailEnd type="none" w="med" len="med"/>
+                    </a:lnR>
+                    <a:lnT w="12700" cap="flat" cmpd="sng" algn="ctr">
+                      <a:solidFill>
+                        <a:srgbClr val="BFBFBF"/>
+                      </a:solidFill>
+                      <a:prstDash val="solid"/>
+                      <a:round/>
+                      <a:headEnd type="none" w="med" len="med"/>
+                      <a:tailEnd type="none" w="med" len="med"/>
+                    </a:lnT>
+                    <a:lnB w="12700" cap="flat" cmpd="sng" algn="ctr">
+                      <a:solidFill>
+                        <a:srgbClr val="BFBFBF"/>
+                      </a:solidFill>
+                      <a:prstDash val="solid"/>
+                      <a:round/>
+                      <a:headEnd type="none" w="med" len="med"/>
+                      <a:tailEnd type="none" w="med" len="med"/>
+                    </a:lnB>
+                    <a:solidFill>
+                      <a:srgbClr val="FBE5D6"/>
+                    </a:solidFill>
+                  </a:tcPr>
+                </a:tc>
+                <a:tc>
+                  <a:txBody>
+                    <a:bodyPr/>
+                    <a:lstStyle/>
+                    <a:p>
+                      <a:pPr algn="ctr"/>
+                      <a:r>
+                        <a:rPr sz="1600" b="0">
+                          <a:solidFill>
+                            <a:srgbClr val="000000"/>
+                          </a:solidFill>
+                          <a:latin typeface="Calibri"/>
+                        </a:rPr>
+                        <a:t>3</a:t>
+                      </a:r>
+                    </a:p>
+                  </a:txBody>
+                  <a:tcPr anchor="ctr">
+                    <a:lnL w="12700" cap="flat" cmpd="sng" algn="ctr">
+                      <a:solidFill>
+                        <a:srgbClr val="BFBFBF"/>
+                      </a:solidFill>
+                      <a:prstDash val="solid"/>
+                      <a:round/>
+                      <a:headEnd type="none" w="med" len="med"/>
+                      <a:tailEnd type="none" w="med" len="med"/>
+                    </a:lnL>
+                    <a:lnR w="12700" cap="flat" cmpd="sng" algn="ctr">
+                      <a:solidFill>
+                        <a:srgbClr val="BFBFBF"/>
+                      </a:solidFill>
+                      <a:prstDash val="solid"/>
+                      <a:round/>
+                      <a:headEnd type="none" w="med" len="med"/>
+                      <a:tailEnd type="none" w="med" len="med"/>
+                    </a:lnR>
+                    <a:lnT w="12700" cap="flat" cmpd="sng" algn="ctr">
+                      <a:solidFill>
+                        <a:srgbClr val="BFBFBF"/>
+                      </a:solidFill>
+                      <a:prstDash val="solid"/>
+                      <a:round/>
+                      <a:headEnd type="none" w="med" len="med"/>
+                      <a:tailEnd type="none" w="med" len="med"/>
+                    </a:lnT>
+                    <a:lnB w="12700" cap="flat" cmpd="sng" algn="ctr">
+                      <a:solidFill>
+                        <a:srgbClr val="BFBFBF"/>
+                      </a:solidFill>
+                      <a:prstDash val="solid"/>
+                      <a:round/>
+                      <a:headEnd type="none" w="med" len="med"/>
+                      <a:tailEnd type="none" w="med" len="med"/>
+                    </a:lnB>
+                    <a:solidFill>
+                      <a:srgbClr val="FBE5D6"/>
+                    </a:solidFill>
+                  </a:tcPr>
+                </a:tc>
+                <a:tc>
+                  <a:txBody>
+                    <a:bodyPr/>
+                    <a:lstStyle/>
+                    <a:p>
+                      <a:pPr algn="ctr"/>
+                      <a:r>
+                        <a:rPr sz="1600" b="0">
+                          <a:solidFill>
+                            <a:srgbClr val="000000"/>
+                          </a:solidFill>
+                          <a:latin typeface="Calibri"/>
+                        </a:rPr>
+                        <a:t>4</a:t>
+                      </a:r>
+                    </a:p>
+                  </a:txBody>
+                  <a:tcPr anchor="ctr">
+                    <a:lnL w="12700" cap="flat" cmpd="sng" algn="ctr">
+                      <a:solidFill>
+                        <a:srgbClr val="BFBFBF"/>
+                      </a:solidFill>
+                      <a:prstDash val="solid"/>
+                      <a:round/>
+                      <a:headEnd type="none" w="med" len="med"/>
+                      <a:tailEnd type="none" w="med" len="med"/>
+                    </a:lnL>
+                    <a:lnR w="12700" cap="flat" cmpd="sng" algn="ctr">
+                      <a:solidFill>
+                        <a:srgbClr val="BFBFBF"/>
+                      </a:solidFill>
+                      <a:prstDash val="solid"/>
+                      <a:round/>
+                      <a:headEnd type="none" w="med" len="med"/>
+                      <a:tailEnd type="none" w="med" len="med"/>
+                    </a:lnR>
+                    <a:lnT w="12700" cap="flat" cmpd="sng" algn="ctr">
+                      <a:solidFill>
+                        <a:srgbClr val="BFBFBF"/>
+                      </a:solidFill>
+                      <a:prstDash val="solid"/>
+                      <a:round/>
+                      <a:headEnd type="none" w="med" len="med"/>
+                      <a:tailEnd type="none" w="med" len="med"/>
+                    </a:lnT>
+                    <a:lnB w="12700" cap="flat" cmpd="sng" algn="ctr">
+                      <a:solidFill>
+                        <a:srgbClr val="BFBFBF"/>
+                      </a:solidFill>
+                      <a:prstDash val="solid"/>
+                      <a:round/>
+                      <a:headEnd type="none" w="med" len="med"/>
+                      <a:tailEnd type="none" w="med" len="med"/>
+                    </a:lnB>
+                    <a:solidFill>
+                      <a:srgbClr val="FBE5D6"/>
+                    </a:solidFill>
+                  </a:tcPr>
+                </a:tc>
+                <a:tc>
+                  <a:txBody>
+                    <a:bodyPr/>
+                    <a:lstStyle/>
+                    <a:p>
+                      <a:pPr algn="ctr"/>
+                      <a:r>
+                        <a:rPr sz="1600" b="0">
+                          <a:solidFill>
+                            <a:srgbClr val="000000"/>
+                          </a:solidFill>
+                          <a:latin typeface="Calibri"/>
+                        </a:rPr>
+                        <a:t>4</a:t>
+                      </a:r>
+                    </a:p>
+                  </a:txBody>
+                  <a:tcPr anchor="ctr">
+                    <a:lnL w="12700" cap="flat" cmpd="sng" algn="ctr">
+                      <a:solidFill>
+                        <a:srgbClr val="BFBFBF"/>
+                      </a:solidFill>
+                      <a:prstDash val="solid"/>
+                      <a:round/>
+                      <a:headEnd type="none" w="med" len="med"/>
+                      <a:tailEnd type="none" w="med" len="med"/>
+                    </a:lnL>
+                    <a:lnR w="12700" cap="flat" cmpd="sng" algn="ctr">
+                      <a:solidFill>
+                        <a:srgbClr val="BFBFBF"/>
+                      </a:solidFill>
+                      <a:prstDash val="solid"/>
+                      <a:round/>
+                      <a:headEnd type="none" w="med" len="med"/>
+                      <a:tailEnd type="none" w="med" len="med"/>
+                    </a:lnR>
+                    <a:lnT w="12700" cap="flat" cmpd="sng" algn="ctr">
+                      <a:solidFill>
+                        <a:srgbClr val="BFBFBF"/>
+                      </a:solidFill>
+                      <a:prstDash val="solid"/>
+                      <a:round/>
+                      <a:headEnd type="none" w="med" len="med"/>
+                      <a:tailEnd type="none" w="med" len="med"/>
+                    </a:lnT>
+                    <a:lnB w="12700" cap="flat" cmpd="sng" algn="ctr">
+                      <a:solidFill>
+                        <a:srgbClr val="BFBFBF"/>
+                      </a:solidFill>
+                      <a:prstDash val="solid"/>
+                      <a:round/>
+                      <a:headEnd type="none" w="med" len="med"/>
+                      <a:tailEnd type="none" w="med" len="med"/>
+                    </a:lnB>
+                    <a:solidFill>
+                      <a:srgbClr val="FBE5D6"/>
+                    </a:solidFill>
+                  </a:tcPr>
+                </a:tc>
+                <a:tc>
+                  <a:txBody>
+                    <a:bodyPr/>
+                    <a:lstStyle/>
+                    <a:p>
+                      <a:pPr algn="ctr"/>
+                      <a:r>
+                        <a:rPr sz="1600" b="0">
+                          <a:solidFill>
+                            <a:srgbClr val="000000"/>
+                          </a:solidFill>
+                          <a:latin typeface="Calibri"/>
+                        </a:rPr>
+                        <a:t>2</a:t>
+                      </a:r>
+                    </a:p>
+                  </a:txBody>
+                  <a:tcPr anchor="ctr">
+                    <a:lnL w="12700" cap="flat" cmpd="sng" algn="ctr">
+                      <a:solidFill>
+                        <a:srgbClr val="BFBFBF"/>
+                      </a:solidFill>
+                      <a:prstDash val="solid"/>
+                      <a:round/>
+                      <a:headEnd type="none" w="med" len="med"/>
+                      <a:tailEnd type="none" w="med" len="med"/>
+                    </a:lnL>
+                    <a:lnR w="12700" cap="flat" cmpd="sng" algn="ctr">
+                      <a:solidFill>
+                        <a:srgbClr val="BFBFBF"/>
+                      </a:solidFill>
+                      <a:prstDash val="solid"/>
+                      <a:round/>
+                      <a:headEnd type="none" w="med" len="med"/>
+                      <a:tailEnd type="none" w="med" len="med"/>
+                    </a:lnR>
+                    <a:lnT w="12700" cap="flat" cmpd="sng" algn="ctr">
+                      <a:solidFill>
+                        <a:srgbClr val="BFBFBF"/>
+                      </a:solidFill>
+                      <a:prstDash val="solid"/>
+                      <a:round/>
+                      <a:headEnd type="none" w="med" len="med"/>
+                      <a:tailEnd type="none" w="med" len="med"/>
+                    </a:lnT>
+                    <a:lnB w="12700" cap="flat" cmpd="sng" algn="ctr">
+                      <a:solidFill>
+                        <a:srgbClr val="BFBFBF"/>
+                      </a:solidFill>
+                      <a:prstDash val="solid"/>
+                      <a:round/>
+                      <a:headEnd type="none" w="med" len="med"/>
+                      <a:tailEnd type="none" w="med" len="med"/>
+                    </a:lnB>
+                    <a:solidFill>
+                      <a:srgbClr val="FBE5D6"/>
+                    </a:solidFill>
+                  </a:tcPr>
+                </a:tc>
+                <a:tc>
+                  <a:txBody>
+                    <a:bodyPr/>
+                    <a:lstStyle/>
+                    <a:p>
+                      <a:pPr algn="ctr"/>
+                      <a:r>
+                        <a:rPr sz="1600" b="0">
+                          <a:solidFill>
+                            <a:srgbClr val="000000"/>
+                          </a:solidFill>
+                          <a:latin typeface="Calibri"/>
+                        </a:rPr>
+                        <a:t>3.50</a:t>
+                      </a:r>
+                    </a:p>
+                  </a:txBody>
+                  <a:tcPr anchor="ctr">
+                    <a:lnL w="12700" cap="flat" cmpd="sng" algn="ctr">
+                      <a:solidFill>
+                        <a:srgbClr val="BFBFBF"/>
+                      </a:solidFill>
+                      <a:prstDash val="solid"/>
+                      <a:round/>
+                      <a:headEnd type="none" w="med" len="med"/>
+                      <a:tailEnd type="none" w="med" len="med"/>
+                    </a:lnL>
+                    <a:lnR w="12700" cap="flat" cmpd="sng" algn="ctr">
+                      <a:solidFill>
+                        <a:srgbClr val="BFBFBF"/>
+                      </a:solidFill>
+                      <a:prstDash val="solid"/>
+                      <a:round/>
+                      <a:headEnd type="none" w="med" len="med"/>
+                      <a:tailEnd type="none" w="med" len="med"/>
+                    </a:lnR>
+                    <a:lnT w="12700" cap="flat" cmpd="sng" algn="ctr">
+                      <a:solidFill>
+                        <a:srgbClr val="BFBFBF"/>
+                      </a:solidFill>
+                      <a:prstDash val="solid"/>
+                      <a:round/>
+                      <a:headEnd type="none" w="med" len="med"/>
+                      <a:tailEnd type="none" w="med" len="med"/>
+                    </a:lnT>
+                    <a:lnB w="12700" cap="flat" cmpd="sng" algn="ctr">
+                      <a:solidFill>
+                        <a:srgbClr val="BFBFBF"/>
+                      </a:solidFill>
+                      <a:prstDash val="solid"/>
+                      <a:round/>
+                      <a:headEnd type="none" w="med" len="med"/>
+                      <a:tailEnd type="none" w="med" len="med"/>
+                    </a:lnB>
+                    <a:solidFill>
+                      <a:srgbClr val="FBE5D6"/>
+                    </a:solidFill>
+                  </a:tcPr>
+                </a:tc>
+              </a:tr>
+              <a:tr h="530352">
+                <a:tc>
+                  <a:txBody>
+                    <a:bodyPr/>
+                    <a:lstStyle/>
+                    <a:p>
+                      <a:pPr algn="l"/>
+                      <a:r>
+                        <a:rPr sz="1600" b="0">
+                          <a:solidFill>
+                            <a:srgbClr val="000000"/>
+                          </a:solidFill>
+                          <a:latin typeface="Calibri"/>
+                        </a:rPr>
+                        <a:t>Data analytics learners</a:t>
+                      </a:r>
+                    </a:p>
+                  </a:txBody>
+                  <a:tcPr anchor="ctr">
+                    <a:lnL w="12700" cap="flat" cmpd="sng" algn="ctr">
+                      <a:solidFill>
+                        <a:srgbClr val="BFBFBF"/>
+                      </a:solidFill>
+                      <a:prstDash val="solid"/>
+                      <a:round/>
+                      <a:headEnd type="none" w="med" len="med"/>
+                      <a:tailEnd type="none" w="med" len="med"/>
+                    </a:lnL>
+                    <a:lnR w="12700" cap="flat" cmpd="sng" algn="ctr">
+                      <a:solidFill>
+                        <a:srgbClr val="BFBFBF"/>
+                      </a:solidFill>
+                      <a:prstDash val="solid"/>
+                      <a:round/>
+                      <a:headEnd type="none" w="med" len="med"/>
+                      <a:tailEnd type="none" w="med" len="med"/>
+                    </a:lnR>
+                    <a:lnT w="12700" cap="flat" cmpd="sng" algn="ctr">
+                      <a:solidFill>
+                        <a:srgbClr val="BFBFBF"/>
+                      </a:solidFill>
+                      <a:prstDash val="solid"/>
+                      <a:round/>
+                      <a:headEnd type="none" w="med" len="med"/>
+                      <a:tailEnd type="none" w="med" len="med"/>
+                    </a:lnT>
+                    <a:lnB w="12700" cap="flat" cmpd="sng" algn="ctr">
+                      <a:solidFill>
+                        <a:srgbClr val="BFBFBF"/>
+                      </a:solidFill>
+                      <a:prstDash val="solid"/>
+                      <a:round/>
+                      <a:headEnd type="none" w="med" len="med"/>
+                      <a:tailEnd type="none" w="med" len="med"/>
+                    </a:lnB>
+                    <a:noFill/>
+                  </a:tcPr>
+                </a:tc>
+                <a:tc>
+                  <a:txBody>
+                    <a:bodyPr/>
+                    <a:lstStyle/>
+                    <a:p>
+                      <a:pPr algn="ctr"/>
+                      <a:r>
+                        <a:rPr sz="1600" b="0">
+                          <a:solidFill>
+                            <a:srgbClr val="000000"/>
+                          </a:solidFill>
+                          <a:latin typeface="Calibri"/>
+                        </a:rPr>
+                        <a:t>2</a:t>
+                      </a:r>
+                    </a:p>
+                  </a:txBody>
+                  <a:tcPr anchor="ctr">
+                    <a:lnL w="12700" cap="flat" cmpd="sng" algn="ctr">
+                      <a:solidFill>
+                        <a:srgbClr val="BFBFBF"/>
+                      </a:solidFill>
+                      <a:prstDash val="solid"/>
+                      <a:round/>
+                      <a:headEnd type="none" w="med" len="med"/>
+                      <a:tailEnd type="none" w="med" len="med"/>
+                    </a:lnL>
+                    <a:lnR w="12700" cap="flat" cmpd="sng" algn="ctr">
+                      <a:solidFill>
+                        <a:srgbClr val="BFBFBF"/>
+                      </a:solidFill>
+                      <a:prstDash val="solid"/>
+                      <a:round/>
+                      <a:headEnd type="none" w="med" len="med"/>
+                      <a:tailEnd type="none" w="med" len="med"/>
+                    </a:lnR>
+                    <a:lnT w="12700" cap="flat" cmpd="sng" algn="ctr">
+                      <a:solidFill>
+                        <a:srgbClr val="BFBFBF"/>
+                      </a:solidFill>
+                      <a:prstDash val="solid"/>
+                      <a:round/>
+                      <a:headEnd type="none" w="med" len="med"/>
+                      <a:tailEnd type="none" w="med" len="med"/>
+                    </a:lnT>
+                    <a:lnB w="12700" cap="flat" cmpd="sng" algn="ctr">
+                      <a:solidFill>
+                        <a:srgbClr val="BFBFBF"/>
+                      </a:solidFill>
+                      <a:prstDash val="solid"/>
+                      <a:round/>
+                      <a:headEnd type="none" w="med" len="med"/>
+                      <a:tailEnd type="none" w="med" len="med"/>
+                    </a:lnB>
+                    <a:noFill/>
+                  </a:tcPr>
+                </a:tc>
+                <a:tc>
+                  <a:txBody>
+                    <a:bodyPr/>
+                    <a:lstStyle/>
+                    <a:p>
+                      <a:pPr algn="ctr"/>
+                      <a:r>
+                        <a:rPr sz="1600" b="0">
+                          <a:solidFill>
+                            <a:srgbClr val="000000"/>
+                          </a:solidFill>
+                          <a:latin typeface="Calibri"/>
+                        </a:rPr>
+                        <a:t>3</a:t>
+                      </a:r>
+                    </a:p>
+                  </a:txBody>
+                  <a:tcPr anchor="ctr">
+                    <a:lnL w="12700" cap="flat" cmpd="sng" algn="ctr">
+                      <a:solidFill>
+                        <a:srgbClr val="BFBFBF"/>
+                      </a:solidFill>
+                      <a:prstDash val="solid"/>
+                      <a:round/>
+                      <a:headEnd type="none" w="med" len="med"/>
+                      <a:tailEnd type="none" w="med" len="med"/>
+                    </a:lnL>
+                    <a:lnR w="12700" cap="flat" cmpd="sng" algn="ctr">
+                      <a:solidFill>
+                        <a:srgbClr val="BFBFBF"/>
+                      </a:solidFill>
+                      <a:prstDash val="solid"/>
+                      <a:round/>
+                      <a:headEnd type="none" w="med" len="med"/>
+                      <a:tailEnd type="none" w="med" len="med"/>
+                    </a:lnR>
+                    <a:lnT w="12700" cap="flat" cmpd="sng" algn="ctr">
+                      <a:solidFill>
+                        <a:srgbClr val="BFBFBF"/>
+                      </a:solidFill>
+                      <a:prstDash val="solid"/>
+                      <a:round/>
+                      <a:headEnd type="none" w="med" len="med"/>
+                      <a:tailEnd type="none" w="med" len="med"/>
+                    </a:lnT>
+                    <a:lnB w="12700" cap="flat" cmpd="sng" algn="ctr">
+                      <a:solidFill>
+                        <a:srgbClr val="BFBFBF"/>
+                      </a:solidFill>
+                      <a:prstDash val="solid"/>
+                      <a:round/>
+                      <a:headEnd type="none" w="med" len="med"/>
+                      <a:tailEnd type="none" w="med" len="med"/>
+                    </a:lnB>
+                    <a:noFill/>
+                  </a:tcPr>
+                </a:tc>
+                <a:tc>
+                  <a:txBody>
+                    <a:bodyPr/>
+                    <a:lstStyle/>
+                    <a:p>
+                      <a:pPr algn="ctr"/>
+                      <a:r>
+                        <a:rPr sz="1600" b="0">
+                          <a:solidFill>
+                            <a:srgbClr val="000000"/>
+                          </a:solidFill>
+                          <a:latin typeface="Calibri"/>
+                        </a:rPr>
+                        <a:t>2</a:t>
+                      </a:r>
+                    </a:p>
+                  </a:txBody>
+                  <a:tcPr anchor="ctr">
+                    <a:lnL w="12700" cap="flat" cmpd="sng" algn="ctr">
+                      <a:solidFill>
+                        <a:srgbClr val="BFBFBF"/>
+                      </a:solidFill>
+                      <a:prstDash val="solid"/>
+                      <a:round/>
+                      <a:headEnd type="none" w="med" len="med"/>
+                      <a:tailEnd type="none" w="med" len="med"/>
+                    </a:lnL>
+                    <a:lnR w="12700" cap="flat" cmpd="sng" algn="ctr">
+                      <a:solidFill>
+                        <a:srgbClr val="BFBFBF"/>
+                      </a:solidFill>
+                      <a:prstDash val="solid"/>
+                      <a:round/>
+                      <a:headEnd type="none" w="med" len="med"/>
+                      <a:tailEnd type="none" w="med" len="med"/>
+                    </a:lnR>
+                    <a:lnT w="12700" cap="flat" cmpd="sng" algn="ctr">
+                      <a:solidFill>
+                        <a:srgbClr val="BFBFBF"/>
+                      </a:solidFill>
+                      <a:prstDash val="solid"/>
+                      <a:round/>
+                      <a:headEnd type="none" w="med" len="med"/>
+                      <a:tailEnd type="none" w="med" len="med"/>
+                    </a:lnT>
+                    <a:lnB w="12700" cap="flat" cmpd="sng" algn="ctr">
+                      <a:solidFill>
+                        <a:srgbClr val="BFBFBF"/>
+                      </a:solidFill>
+                      <a:prstDash val="solid"/>
+                      <a:round/>
+                      <a:headEnd type="none" w="med" len="med"/>
+                      <a:tailEnd type="none" w="med" len="med"/>
+                    </a:lnB>
+                    <a:noFill/>
+                  </a:tcPr>
+                </a:tc>
+                <a:tc>
+                  <a:txBody>
+                    <a:bodyPr/>
+                    <a:lstStyle/>
+                    <a:p>
+                      <a:pPr algn="ctr"/>
+                      <a:r>
+                        <a:rPr sz="1600" b="0">
+                          <a:solidFill>
+                            <a:srgbClr val="000000"/>
+                          </a:solidFill>
+                          <a:latin typeface="Calibri"/>
+                        </a:rPr>
+                        <a:t>4</a:t>
+                      </a:r>
+                    </a:p>
+                  </a:txBody>
+                  <a:tcPr anchor="ctr">
+                    <a:lnL w="12700" cap="flat" cmpd="sng" algn="ctr">
+                      <a:solidFill>
+                        <a:srgbClr val="BFBFBF"/>
+                      </a:solidFill>
+                      <a:prstDash val="solid"/>
+                      <a:round/>
+                      <a:headEnd type="none" w="med" len="med"/>
+                      <a:tailEnd type="none" w="med" len="med"/>
+                    </a:lnL>
+                    <a:lnR w="12700" cap="flat" cmpd="sng" algn="ctr">
+                      <a:solidFill>
+                        <a:srgbClr val="BFBFBF"/>
+                      </a:solidFill>
+                      <a:prstDash val="solid"/>
+                      <a:round/>
+                      <a:headEnd type="none" w="med" len="med"/>
+                      <a:tailEnd type="none" w="med" len="med"/>
+                    </a:lnR>
+                    <a:lnT w="12700" cap="flat" cmpd="sng" algn="ctr">
+                      <a:solidFill>
+                        <a:srgbClr val="BFBFBF"/>
+                      </a:solidFill>
+                      <a:prstDash val="solid"/>
+                      <a:round/>
+                      <a:headEnd type="none" w="med" len="med"/>
+                      <a:tailEnd type="none" w="med" len="med"/>
+                    </a:lnT>
+                    <a:lnB w="12700" cap="flat" cmpd="sng" algn="ctr">
+                      <a:solidFill>
+                        <a:srgbClr val="BFBFBF"/>
+                      </a:solidFill>
+                      <a:prstDash val="solid"/>
+                      <a:round/>
+                      <a:headEnd type="none" w="med" len="med"/>
+                      <a:tailEnd type="none" w="med" len="med"/>
+                    </a:lnB>
+                    <a:noFill/>
+                  </a:tcPr>
+                </a:tc>
+                <a:tc>
+                  <a:txBody>
+                    <a:bodyPr/>
+                    <a:lstStyle/>
+                    <a:p>
+                      <a:pPr algn="ctr"/>
+                      <a:r>
+                        <a:rPr sz="1600" b="0">
+                          <a:solidFill>
+                            <a:srgbClr val="000000"/>
+                          </a:solidFill>
+                          <a:latin typeface="Calibri"/>
+                        </a:rPr>
+                        <a:t>3</a:t>
+                      </a:r>
+                    </a:p>
+                  </a:txBody>
+                  <a:tcPr anchor="ctr">
+                    <a:lnL w="12700" cap="flat" cmpd="sng" algn="ctr">
+                      <a:solidFill>
+                        <a:srgbClr val="BFBFBF"/>
+                      </a:solidFill>
+                      <a:prstDash val="solid"/>
+                      <a:round/>
+                      <a:headEnd type="none" w="med" len="med"/>
+                      <a:tailEnd type="none" w="med" len="med"/>
+                    </a:lnL>
+                    <a:lnR w="12700" cap="flat" cmpd="sng" algn="ctr">
+                      <a:solidFill>
+                        <a:srgbClr val="BFBFBF"/>
+                      </a:solidFill>
+                      <a:prstDash val="solid"/>
+                      <a:round/>
+                      <a:headEnd type="none" w="med" len="med"/>
+                      <a:tailEnd type="none" w="med" len="med"/>
+                    </a:lnR>
+                    <a:lnT w="12700" cap="flat" cmpd="sng" algn="ctr">
+                      <a:solidFill>
+                        <a:srgbClr val="BFBFBF"/>
+                      </a:solidFill>
+                      <a:prstDash val="solid"/>
+                      <a:round/>
+                      <a:headEnd type="none" w="med" len="med"/>
+                      <a:tailEnd type="none" w="med" len="med"/>
+                    </a:lnT>
+                    <a:lnB w="12700" cap="flat" cmpd="sng" algn="ctr">
+                      <a:solidFill>
+                        <a:srgbClr val="BFBFBF"/>
+                      </a:solidFill>
+                      <a:prstDash val="solid"/>
+                      <a:round/>
+                      <a:headEnd type="none" w="med" len="med"/>
+                      <a:tailEnd type="none" w="med" len="med"/>
+                    </a:lnB>
+                    <a:noFill/>
+                  </a:tcPr>
+                </a:tc>
+                <a:tc>
+                  <a:txBody>
+                    <a:bodyPr/>
+                    <a:lstStyle/>
+                    <a:p>
+                      <a:pPr algn="ctr"/>
+                      <a:r>
+                        <a:rPr sz="1600" b="0">
+                          <a:solidFill>
+                            <a:srgbClr val="000000"/>
+                          </a:solidFill>
+                          <a:latin typeface="Calibri"/>
+                        </a:rPr>
+                        <a:t>2.75</a:t>
+                      </a:r>
+                    </a:p>
+                  </a:txBody>
+                  <a:tcPr anchor="ctr">
+                    <a:lnL w="12700" cap="flat" cmpd="sng" algn="ctr">
+                      <a:solidFill>
+                        <a:srgbClr val="BFBFBF"/>
+                      </a:solidFill>
+                      <a:prstDash val="solid"/>
+                      <a:round/>
+                      <a:headEnd type="none" w="med" len="med"/>
+                      <a:tailEnd type="none" w="med" len="med"/>
+                    </a:lnL>
+                    <a:lnR w="12700" cap="flat" cmpd="sng" algn="ctr">
+                      <a:solidFill>
+                        <a:srgbClr val="BFBFBF"/>
+                      </a:solidFill>
+                      <a:prstDash val="solid"/>
+                      <a:round/>
+                      <a:headEnd type="none" w="med" len="med"/>
+                      <a:tailEnd type="none" w="med" len="med"/>
+                    </a:lnR>
+                    <a:lnT w="12700" cap="flat" cmpd="sng" algn="ctr">
+                      <a:solidFill>
+                        <a:srgbClr val="BFBFBF"/>
+                      </a:solidFill>
+                      <a:prstDash val="solid"/>
+                      <a:round/>
+                      <a:headEnd type="none" w="med" len="med"/>
+                      <a:tailEnd type="none" w="med" len="med"/>
+                    </a:lnT>
+                    <a:lnB w="12700" cap="flat" cmpd="sng" algn="ctr">
+                      <a:solidFill>
+                        <a:srgbClr val="BFBFBF"/>
+                      </a:solidFill>
+                      <a:prstDash val="solid"/>
+                      <a:round/>
+                      <a:headEnd type="none" w="med" len="med"/>
+                      <a:tailEnd type="none" w="med" len="med"/>
+                    </a:lnB>
+                    <a:noFill/>
+                  </a:tcPr>
+                </a:tc>
+              </a:tr>
+              <a:tr h="530352">
+                <a:tc>
+                  <a:txBody>
+                    <a:bodyPr/>
+                    <a:lstStyle/>
+                    <a:p>
+                      <a:pPr algn="l"/>
+                      <a:r>
+                        <a:rPr sz="1600" b="0">
+                          <a:solidFill>
+                            <a:srgbClr val="000000"/>
+                          </a:solidFill>
+                          <a:latin typeface="Calibri"/>
+                        </a:rPr>
+                        <a:t>Generative AI learners</a:t>
+                      </a:r>
+                    </a:p>
+                  </a:txBody>
+                  <a:tcPr anchor="ctr">
+                    <a:lnL w="12700" cap="flat" cmpd="sng" algn="ctr">
+                      <a:solidFill>
+                        <a:srgbClr val="BFBFBF"/>
+                      </a:solidFill>
+                      <a:prstDash val="solid"/>
+                      <a:round/>
+                      <a:headEnd type="none" w="med" len="med"/>
+                      <a:tailEnd type="none" w="med" len="med"/>
+                    </a:lnL>
+                    <a:lnR w="12700" cap="flat" cmpd="sng" algn="ctr">
+                      <a:solidFill>
+                        <a:srgbClr val="BFBFBF"/>
+                      </a:solidFill>
+                      <a:prstDash val="solid"/>
+                      <a:round/>
+                      <a:headEnd type="none" w="med" len="med"/>
+                      <a:tailEnd type="none" w="med" len="med"/>
+                    </a:lnR>
+                    <a:lnT w="12700" cap="flat" cmpd="sng" algn="ctr">
+                      <a:solidFill>
+                        <a:srgbClr val="BFBFBF"/>
+                      </a:solidFill>
+                      <a:prstDash val="solid"/>
+                      <a:round/>
+                      <a:headEnd type="none" w="med" len="med"/>
+                      <a:tailEnd type="none" w="med" len="med"/>
+                    </a:lnT>
+                    <a:lnB w="12700" cap="flat" cmpd="sng" algn="ctr">
+                      <a:solidFill>
+                        <a:srgbClr val="BFBFBF"/>
+                      </a:solidFill>
+                      <a:prstDash val="solid"/>
+                      <a:round/>
+                      <a:headEnd type="none" w="med" len="med"/>
+                      <a:tailEnd type="none" w="med" len="med"/>
+                    </a:lnB>
+                    <a:solidFill>
+                      <a:srgbClr val="FBE5D6"/>
+                    </a:solidFill>
+                  </a:tcPr>
+                </a:tc>
+                <a:tc>
+                  <a:txBody>
+                    <a:bodyPr/>
+                    <a:lstStyle/>
+                    <a:p>
+                      <a:pPr algn="ctr"/>
+                      <a:r>
+                        <a:rPr sz="1600" b="0">
+                          <a:solidFill>
+                            <a:srgbClr val="000000"/>
+                          </a:solidFill>
+                          <a:latin typeface="Calibri"/>
+                        </a:rPr>
+                        <a:t>2</a:t>
+                      </a:r>
+                    </a:p>
+                  </a:txBody>
+                  <a:tcPr anchor="ctr">
+                    <a:lnL w="12700" cap="flat" cmpd="sng" algn="ctr">
+                      <a:solidFill>
+                        <a:srgbClr val="BFBFBF"/>
+                      </a:solidFill>
+                      <a:prstDash val="solid"/>
+                      <a:round/>
+                      <a:headEnd type="none" w="med" len="med"/>
+                      <a:tailEnd type="none" w="med" len="med"/>
+                    </a:lnL>
+                    <a:lnR w="12700" cap="flat" cmpd="sng" algn="ctr">
+                      <a:solidFill>
+                        <a:srgbClr val="BFBFBF"/>
+                      </a:solidFill>
+                      <a:prstDash val="solid"/>
+                      <a:round/>
+                      <a:headEnd type="none" w="med" len="med"/>
+                      <a:tailEnd type="none" w="med" len="med"/>
+                    </a:lnR>
+                    <a:lnT w="12700" cap="flat" cmpd="sng" algn="ctr">
+                      <a:solidFill>
+                        <a:srgbClr val="BFBFBF"/>
+                      </a:solidFill>
+                      <a:prstDash val="solid"/>
+                      <a:round/>
+                      <a:headEnd type="none" w="med" len="med"/>
+                      <a:tailEnd type="none" w="med" len="med"/>
+                    </a:lnT>
+                    <a:lnB w="12700" cap="flat" cmpd="sng" algn="ctr">
+                      <a:solidFill>
+                        <a:srgbClr val="BFBFBF"/>
+                      </a:solidFill>
+                      <a:prstDash val="solid"/>
+                      <a:round/>
+                      <a:headEnd type="none" w="med" len="med"/>
+                      <a:tailEnd type="none" w="med" len="med"/>
+                    </a:lnB>
+                    <a:solidFill>
+                      <a:srgbClr val="FBE5D6"/>
+                    </a:solidFill>
+                  </a:tcPr>
+                </a:tc>
+                <a:tc>
+                  <a:txBody>
+                    <a:bodyPr/>
+                    <a:lstStyle/>
+                    <a:p>
+                      <a:pPr algn="ctr"/>
+                      <a:r>
+                        <a:rPr sz="1600" b="0">
+                          <a:solidFill>
+                            <a:srgbClr val="000000"/>
+                          </a:solidFill>
+                          <a:latin typeface="Calibri"/>
+                        </a:rPr>
+                        <a:t>3</a:t>
+                      </a:r>
+                    </a:p>
+                  </a:txBody>
+                  <a:tcPr anchor="ctr">
+                    <a:lnL w="12700" cap="flat" cmpd="sng" algn="ctr">
+                      <a:solidFill>
+                        <a:srgbClr val="BFBFBF"/>
+                      </a:solidFill>
+                      <a:prstDash val="solid"/>
+                      <a:round/>
+                      <a:headEnd type="none" w="med" len="med"/>
+                      <a:tailEnd type="none" w="med" len="med"/>
+                    </a:lnL>
+                    <a:lnR w="12700" cap="flat" cmpd="sng" algn="ctr">
+                      <a:solidFill>
+                        <a:srgbClr val="BFBFBF"/>
+                      </a:solidFill>
+                      <a:prstDash val="solid"/>
+                      <a:round/>
+                      <a:headEnd type="none" w="med" len="med"/>
+                      <a:tailEnd type="none" w="med" len="med"/>
+                    </a:lnR>
+                    <a:lnT w="12700" cap="flat" cmpd="sng" algn="ctr">
+                      <a:solidFill>
+                        <a:srgbClr val="BFBFBF"/>
+                      </a:solidFill>
+                      <a:prstDash val="solid"/>
+                      <a:round/>
+                      <a:headEnd type="none" w="med" len="med"/>
+                      <a:tailEnd type="none" w="med" len="med"/>
+                    </a:lnT>
+                    <a:lnB w="12700" cap="flat" cmpd="sng" algn="ctr">
+                      <a:solidFill>
+                        <a:srgbClr val="BFBFBF"/>
+                      </a:solidFill>
+                      <a:prstDash val="solid"/>
+                      <a:round/>
+                      <a:headEnd type="none" w="med" len="med"/>
+                      <a:tailEnd type="none" w="med" len="med"/>
+                    </a:lnB>
+                    <a:solidFill>
+                      <a:srgbClr val="FBE5D6"/>
+                    </a:solidFill>
+                  </a:tcPr>
+                </a:tc>
+                <a:tc>
+                  <a:txBody>
+                    <a:bodyPr/>
+                    <a:lstStyle/>
+                    <a:p>
+                      <a:pPr algn="ctr"/>
+                      <a:r>
+                        <a:rPr sz="1600" b="0">
+                          <a:solidFill>
+                            <a:srgbClr val="000000"/>
+                          </a:solidFill>
+                          <a:latin typeface="Calibri"/>
+                        </a:rPr>
+                        <a:t>3</a:t>
+                      </a:r>
+                    </a:p>
+                  </a:txBody>
+                  <a:tcPr anchor="ctr">
+                    <a:lnL w="12700" cap="flat" cmpd="sng" algn="ctr">
+                      <a:solidFill>
+                        <a:srgbClr val="BFBFBF"/>
+                      </a:solidFill>
+                      <a:prstDash val="solid"/>
+                      <a:round/>
+                      <a:headEnd type="none" w="med" len="med"/>
+                      <a:tailEnd type="none" w="med" len="med"/>
+                    </a:lnL>
+                    <a:lnR w="12700" cap="flat" cmpd="sng" algn="ctr">
+                      <a:solidFill>
+                        <a:srgbClr val="BFBFBF"/>
+                      </a:solidFill>
+                      <a:prstDash val="solid"/>
+                      <a:round/>
+                      <a:headEnd type="none" w="med" len="med"/>
+                      <a:tailEnd type="none" w="med" len="med"/>
+                    </a:lnR>
+                    <a:lnT w="12700" cap="flat" cmpd="sng" algn="ctr">
+                      <a:solidFill>
+                        <a:srgbClr val="BFBFBF"/>
+                      </a:solidFill>
+                      <a:prstDash val="solid"/>
+                      <a:round/>
+                      <a:headEnd type="none" w="med" len="med"/>
+                      <a:tailEnd type="none" w="med" len="med"/>
+                    </a:lnT>
+                    <a:lnB w="12700" cap="flat" cmpd="sng" algn="ctr">
+                      <a:solidFill>
+                        <a:srgbClr val="BFBFBF"/>
+                      </a:solidFill>
+                      <a:prstDash val="solid"/>
+                      <a:round/>
+                      <a:headEnd type="none" w="med" len="med"/>
+                      <a:tailEnd type="none" w="med" len="med"/>
+                    </a:lnB>
+                    <a:solidFill>
+                      <a:srgbClr val="FBE5D6"/>
+                    </a:solidFill>
+                  </a:tcPr>
+                </a:tc>
+                <a:tc>
+                  <a:txBody>
+                    <a:bodyPr/>
+                    <a:lstStyle/>
+                    <a:p>
+                      <a:pPr algn="ctr"/>
+                      <a:r>
+                        <a:rPr sz="1600" b="0">
+                          <a:solidFill>
+                            <a:srgbClr val="000000"/>
+                          </a:solidFill>
+                          <a:latin typeface="Calibri"/>
+                        </a:rPr>
+                        <a:t>3</a:t>
+                      </a:r>
+                    </a:p>
+                  </a:txBody>
+                  <a:tcPr anchor="ctr">
+                    <a:lnL w="12700" cap="flat" cmpd="sng" algn="ctr">
+                      <a:solidFill>
+                        <a:srgbClr val="BFBFBF"/>
+                      </a:solidFill>
+                      <a:prstDash val="solid"/>
+                      <a:round/>
+                      <a:headEnd type="none" w="med" len="med"/>
+                      <a:tailEnd type="none" w="med" len="med"/>
+                    </a:lnL>
+                    <a:lnR w="12700" cap="flat" cmpd="sng" algn="ctr">
+                      <a:solidFill>
+                        <a:srgbClr val="BFBFBF"/>
+                      </a:solidFill>
+                      <a:prstDash val="solid"/>
+                      <a:round/>
+                      <a:headEnd type="none" w="med" len="med"/>
+                      <a:tailEnd type="none" w="med" len="med"/>
+                    </a:lnR>
+                    <a:lnT w="12700" cap="flat" cmpd="sng" algn="ctr">
+                      <a:solidFill>
+                        <a:srgbClr val="BFBFBF"/>
+                      </a:solidFill>
+                      <a:prstDash val="solid"/>
+                      <a:round/>
+                      <a:headEnd type="none" w="med" len="med"/>
+                      <a:tailEnd type="none" w="med" len="med"/>
+                    </a:lnT>
+                    <a:lnB w="12700" cap="flat" cmpd="sng" algn="ctr">
+                      <a:solidFill>
+                        <a:srgbClr val="BFBFBF"/>
+                      </a:solidFill>
+                      <a:prstDash val="solid"/>
+                      <a:round/>
+                      <a:headEnd type="none" w="med" len="med"/>
+                      <a:tailEnd type="none" w="med" len="med"/>
+                    </a:lnB>
+                    <a:solidFill>
+                      <a:srgbClr val="FBE5D6"/>
+                    </a:solidFill>
+                  </a:tcPr>
+                </a:tc>
+                <a:tc>
+                  <a:txBody>
+                    <a:bodyPr/>
+                    <a:lstStyle/>
+                    <a:p>
+                      <a:pPr algn="ctr"/>
+                      <a:r>
+                        <a:rPr sz="1600" b="0">
+                          <a:solidFill>
+                            <a:srgbClr val="000000"/>
+                          </a:solidFill>
+                          <a:latin typeface="Calibri"/>
+                        </a:rPr>
+                        <a:t>4</a:t>
+                      </a:r>
+                    </a:p>
+                  </a:txBody>
+                  <a:tcPr anchor="ctr">
+                    <a:lnL w="12700" cap="flat" cmpd="sng" algn="ctr">
+                      <a:solidFill>
+                        <a:srgbClr val="BFBFBF"/>
+                      </a:solidFill>
+                      <a:prstDash val="solid"/>
+                      <a:round/>
+                      <a:headEnd type="none" w="med" len="med"/>
+                      <a:tailEnd type="none" w="med" len="med"/>
+                    </a:lnL>
+                    <a:lnR w="12700" cap="flat" cmpd="sng" algn="ctr">
+                      <a:solidFill>
+                        <a:srgbClr val="BFBFBF"/>
+                      </a:solidFill>
+                      <a:prstDash val="solid"/>
+                      <a:round/>
+                      <a:headEnd type="none" w="med" len="med"/>
+                      <a:tailEnd type="none" w="med" len="med"/>
+                    </a:lnR>
+                    <a:lnT w="12700" cap="flat" cmpd="sng" algn="ctr">
+                      <a:solidFill>
+                        <a:srgbClr val="BFBFBF"/>
+                      </a:solidFill>
+                      <a:prstDash val="solid"/>
+                      <a:round/>
+                      <a:headEnd type="none" w="med" len="med"/>
+                      <a:tailEnd type="none" w="med" len="med"/>
+                    </a:lnT>
+                    <a:lnB w="12700" cap="flat" cmpd="sng" algn="ctr">
+                      <a:solidFill>
+                        <a:srgbClr val="BFBFBF"/>
+                      </a:solidFill>
+                      <a:prstDash val="solid"/>
+                      <a:round/>
+                      <a:headEnd type="none" w="med" len="med"/>
+                      <a:tailEnd type="none" w="med" len="med"/>
+                    </a:lnB>
+                    <a:solidFill>
+                      <a:srgbClr val="FBE5D6"/>
+                    </a:solidFill>
+                  </a:tcPr>
+                </a:tc>
+                <a:tc>
+                  <a:txBody>
+                    <a:bodyPr/>
+                    <a:lstStyle/>
+                    <a:p>
+                      <a:pPr algn="ctr"/>
+                      <a:r>
+                        <a:rPr sz="1600" b="0">
+                          <a:solidFill>
+                            <a:srgbClr val="000000"/>
+                          </a:solidFill>
+                          <a:latin typeface="Calibri"/>
+                        </a:rPr>
+                        <a:t>2.85</a:t>
+                      </a:r>
+                    </a:p>
+                  </a:txBody>
+                  <a:tcPr anchor="ctr">
+                    <a:lnL w="12700" cap="flat" cmpd="sng" algn="ctr">
+                      <a:solidFill>
+                        <a:srgbClr val="BFBFBF"/>
+                      </a:solidFill>
+                      <a:prstDash val="solid"/>
+                      <a:round/>
+                      <a:headEnd type="none" w="med" len="med"/>
+                      <a:tailEnd type="none" w="med" len="med"/>
+                    </a:lnL>
+                    <a:lnR w="12700" cap="flat" cmpd="sng" algn="ctr">
+                      <a:solidFill>
+                        <a:srgbClr val="BFBFBF"/>
+                      </a:solidFill>
+                      <a:prstDash val="solid"/>
+                      <a:round/>
+                      <a:headEnd type="none" w="med" len="med"/>
+                      <a:tailEnd type="none" w="med" len="med"/>
+                    </a:lnR>
+                    <a:lnT w="12700" cap="flat" cmpd="sng" algn="ctr">
+                      <a:solidFill>
+                        <a:srgbClr val="BFBFBF"/>
+                      </a:solidFill>
+                      <a:prstDash val="solid"/>
+                      <a:round/>
+                      <a:headEnd type="none" w="med" len="med"/>
+                      <a:tailEnd type="none" w="med" len="med"/>
+                    </a:lnT>
+                    <a:lnB w="12700" cap="flat" cmpd="sng" algn="ctr">
+                      <a:solidFill>
+                        <a:srgbClr val="BFBFBF"/>
+                      </a:solidFill>
+                      <a:prstDash val="solid"/>
+                      <a:round/>
+                      <a:headEnd type="none" w="med" len="med"/>
+                      <a:tailEnd type="none" w="med" len="med"/>
+                    </a:lnB>
+                    <a:solidFill>
+                      <a:srgbClr val="FBE5D6"/>
+                    </a:solidFill>
+                  </a:tcPr>
+                </a:tc>
+              </a:tr>
+              <a:tr h="530352">
+                <a:tc>
+                  <a:txBody>
+                    <a:bodyPr/>
+                    <a:lstStyle/>
+                    <a:p>
+                      <a:pPr algn="l"/>
+                      <a:r>
+                        <a:rPr sz="1600" b="0">
+                          <a:solidFill>
+                            <a:srgbClr val="000000"/>
+                          </a:solidFill>
+                          <a:latin typeface="Calibri"/>
+                        </a:rPr>
+                        <a:t>Web development learners</a:t>
+                      </a:r>
+                    </a:p>
+                  </a:txBody>
+                  <a:tcPr anchor="ctr">
+                    <a:lnL w="12700" cap="flat" cmpd="sng" algn="ctr">
+                      <a:solidFill>
+                        <a:srgbClr val="BFBFBF"/>
+                      </a:solidFill>
+                      <a:prstDash val="solid"/>
+                      <a:round/>
+                      <a:headEnd type="none" w="med" len="med"/>
+                      <a:tailEnd type="none" w="med" len="med"/>
+                    </a:lnL>
+                    <a:lnR w="12700" cap="flat" cmpd="sng" algn="ctr">
+                      <a:solidFill>
+                        <a:srgbClr val="BFBFBF"/>
+                      </a:solidFill>
+                      <a:prstDash val="solid"/>
+                      <a:round/>
+                      <a:headEnd type="none" w="med" len="med"/>
+                      <a:tailEnd type="none" w="med" len="med"/>
+                    </a:lnR>
+                    <a:lnT w="12700" cap="flat" cmpd="sng" algn="ctr">
+                      <a:solidFill>
+                        <a:srgbClr val="BFBFBF"/>
+                      </a:solidFill>
+                      <a:prstDash val="solid"/>
+                      <a:round/>
+                      <a:headEnd type="none" w="med" len="med"/>
+                      <a:tailEnd type="none" w="med" len="med"/>
+                    </a:lnT>
+                    <a:lnB w="12700" cap="flat" cmpd="sng" algn="ctr">
+                      <a:solidFill>
+                        <a:srgbClr val="BFBFBF"/>
+                      </a:solidFill>
+                      <a:prstDash val="solid"/>
+                      <a:round/>
+                      <a:headEnd type="none" w="med" len="med"/>
+                      <a:tailEnd type="none" w="med" len="med"/>
+                    </a:lnB>
+                    <a:noFill/>
+                  </a:tcPr>
+                </a:tc>
+                <a:tc>
+                  <a:txBody>
+                    <a:bodyPr/>
+                    <a:lstStyle/>
+                    <a:p>
+                      <a:pPr algn="ctr"/>
+                      <a:r>
+                        <a:rPr sz="1600" b="0">
+                          <a:solidFill>
+                            <a:srgbClr val="000000"/>
+                          </a:solidFill>
+                          <a:latin typeface="Calibri"/>
+                        </a:rPr>
+                        <a:t>2</a:t>
+                      </a:r>
+                    </a:p>
+                  </a:txBody>
+                  <a:tcPr anchor="ctr">
+                    <a:lnL w="12700" cap="flat" cmpd="sng" algn="ctr">
+                      <a:solidFill>
+                        <a:srgbClr val="BFBFBF"/>
+                      </a:solidFill>
+                      <a:prstDash val="solid"/>
+                      <a:round/>
+                      <a:headEnd type="none" w="med" len="med"/>
+                      <a:tailEnd type="none" w="med" len="med"/>
+                    </a:lnL>
+                    <a:lnR w="12700" cap="flat" cmpd="sng" algn="ctr">
+                      <a:solidFill>
+                        <a:srgbClr val="BFBFBF"/>
+                      </a:solidFill>
+                      <a:prstDash val="solid"/>
+                      <a:round/>
+                      <a:headEnd type="none" w="med" len="med"/>
+                      <a:tailEnd type="none" w="med" len="med"/>
+                    </a:lnR>
+                    <a:lnT w="12700" cap="flat" cmpd="sng" algn="ctr">
+                      <a:solidFill>
+                        <a:srgbClr val="BFBFBF"/>
+                      </a:solidFill>
+                      <a:prstDash val="solid"/>
+                      <a:round/>
+                      <a:headEnd type="none" w="med" len="med"/>
+                      <a:tailEnd type="none" w="med" len="med"/>
+                    </a:lnT>
+                    <a:lnB w="12700" cap="flat" cmpd="sng" algn="ctr">
+                      <a:solidFill>
+                        <a:srgbClr val="BFBFBF"/>
+                      </a:solidFill>
+                      <a:prstDash val="solid"/>
+                      <a:round/>
+                      <a:headEnd type="none" w="med" len="med"/>
+                      <a:tailEnd type="none" w="med" len="med"/>
+                    </a:lnB>
+                    <a:noFill/>
+                  </a:tcPr>
+                </a:tc>
+                <a:tc>
+                  <a:txBody>
+                    <a:bodyPr/>
+                    <a:lstStyle/>
+                    <a:p>
+                      <a:pPr algn="ctr"/>
+                      <a:r>
+                        <a:rPr sz="1600" b="0">
+                          <a:solidFill>
+                            <a:srgbClr val="000000"/>
+                          </a:solidFill>
+                          <a:latin typeface="Calibri"/>
+                        </a:rPr>
+                        <a:t>2</a:t>
+                      </a:r>
+                    </a:p>
+                  </a:txBody>
+                  <a:tcPr anchor="ctr">
+                    <a:lnL w="12700" cap="flat" cmpd="sng" algn="ctr">
+                      <a:solidFill>
+                        <a:srgbClr val="BFBFBF"/>
+                      </a:solidFill>
+                      <a:prstDash val="solid"/>
+                      <a:round/>
+                      <a:headEnd type="none" w="med" len="med"/>
+                      <a:tailEnd type="none" w="med" len="med"/>
+                    </a:lnL>
+                    <a:lnR w="12700" cap="flat" cmpd="sng" algn="ctr">
+                      <a:solidFill>
+                        <a:srgbClr val="BFBFBF"/>
+                      </a:solidFill>
+                      <a:prstDash val="solid"/>
+                      <a:round/>
+                      <a:headEnd type="none" w="med" len="med"/>
+                      <a:tailEnd type="none" w="med" len="med"/>
+                    </a:lnR>
+                    <a:lnT w="12700" cap="flat" cmpd="sng" algn="ctr">
+                      <a:solidFill>
+                        <a:srgbClr val="BFBFBF"/>
+                      </a:solidFill>
+                      <a:prstDash val="solid"/>
+                      <a:round/>
+                      <a:headEnd type="none" w="med" len="med"/>
+                      <a:tailEnd type="none" w="med" len="med"/>
+                    </a:lnT>
+                    <a:lnB w="12700" cap="flat" cmpd="sng" algn="ctr">
+                      <a:solidFill>
+                        <a:srgbClr val="BFBFBF"/>
+                      </a:solidFill>
+                      <a:prstDash val="solid"/>
+                      <a:round/>
+                      <a:headEnd type="none" w="med" len="med"/>
+                      <a:tailEnd type="none" w="med" len="med"/>
+                    </a:lnB>
+                    <a:noFill/>
+                  </a:tcPr>
+                </a:tc>
+                <a:tc>
+                  <a:txBody>
+                    <a:bodyPr/>
+                    <a:lstStyle/>
+                    <a:p>
+                      <a:pPr algn="ctr"/>
+                      <a:r>
+                        <a:rPr sz="1600" b="0">
+                          <a:solidFill>
+                            <a:srgbClr val="000000"/>
+                          </a:solidFill>
+                          <a:latin typeface="Calibri"/>
+                        </a:rPr>
+                        <a:t>2</a:t>
+                      </a:r>
+                    </a:p>
+                  </a:txBody>
+                  <a:tcPr anchor="ctr">
+                    <a:lnL w="12700" cap="flat" cmpd="sng" algn="ctr">
+                      <a:solidFill>
+                        <a:srgbClr val="BFBFBF"/>
+                      </a:solidFill>
+                      <a:prstDash val="solid"/>
+                      <a:round/>
+                      <a:headEnd type="none" w="med" len="med"/>
+                      <a:tailEnd type="none" w="med" len="med"/>
+                    </a:lnL>
+                    <a:lnR w="12700" cap="flat" cmpd="sng" algn="ctr">
+                      <a:solidFill>
+                        <a:srgbClr val="BFBFBF"/>
+                      </a:solidFill>
+                      <a:prstDash val="solid"/>
+                      <a:round/>
+                      <a:headEnd type="none" w="med" len="med"/>
+                      <a:tailEnd type="none" w="med" len="med"/>
+                    </a:lnR>
+                    <a:lnT w="12700" cap="flat" cmpd="sng" algn="ctr">
+                      <a:solidFill>
+                        <a:srgbClr val="BFBFBF"/>
+                      </a:solidFill>
+                      <a:prstDash val="solid"/>
+                      <a:round/>
+                      <a:headEnd type="none" w="med" len="med"/>
+                      <a:tailEnd type="none" w="med" len="med"/>
+                    </a:lnT>
+                    <a:lnB w="12700" cap="flat" cmpd="sng" algn="ctr">
+                      <a:solidFill>
+                        <a:srgbClr val="BFBFBF"/>
+                      </a:solidFill>
+                      <a:prstDash val="solid"/>
+                      <a:round/>
+                      <a:headEnd type="none" w="med" len="med"/>
+                      <a:tailEnd type="none" w="med" len="med"/>
+                    </a:lnB>
+                    <a:noFill/>
+                  </a:tcPr>
+                </a:tc>
+                <a:tc>
+                  <a:txBody>
+                    <a:bodyPr/>
+                    <a:lstStyle/>
+                    <a:p>
+                      <a:pPr algn="ctr"/>
+                      <a:r>
+                        <a:rPr sz="1600" b="0">
+                          <a:solidFill>
+                            <a:srgbClr val="000000"/>
+                          </a:solidFill>
+                          <a:latin typeface="Calibri"/>
+                        </a:rPr>
+                        <a:t>3</a:t>
+                      </a:r>
+                    </a:p>
+                  </a:txBody>
+                  <a:tcPr anchor="ctr">
+                    <a:lnL w="12700" cap="flat" cmpd="sng" algn="ctr">
+                      <a:solidFill>
+                        <a:srgbClr val="BFBFBF"/>
+                      </a:solidFill>
+                      <a:prstDash val="solid"/>
+                      <a:round/>
+                      <a:headEnd type="none" w="med" len="med"/>
+                      <a:tailEnd type="none" w="med" len="med"/>
+                    </a:lnL>
+                    <a:lnR w="12700" cap="flat" cmpd="sng" algn="ctr">
+                      <a:solidFill>
+                        <a:srgbClr val="BFBFBF"/>
+                      </a:solidFill>
+                      <a:prstDash val="solid"/>
+                      <a:round/>
+                      <a:headEnd type="none" w="med" len="med"/>
+                      <a:tailEnd type="none" w="med" len="med"/>
+                    </a:lnR>
+                    <a:lnT w="12700" cap="flat" cmpd="sng" algn="ctr">
+                      <a:solidFill>
+                        <a:srgbClr val="BFBFBF"/>
+                      </a:solidFill>
+                      <a:prstDash val="solid"/>
+                      <a:round/>
+                      <a:headEnd type="none" w="med" len="med"/>
+                      <a:tailEnd type="none" w="med" len="med"/>
+                    </a:lnT>
+                    <a:lnB w="12700" cap="flat" cmpd="sng" algn="ctr">
+                      <a:solidFill>
+                        <a:srgbClr val="BFBFBF"/>
+                      </a:solidFill>
+                      <a:prstDash val="solid"/>
+                      <a:round/>
+                      <a:headEnd type="none" w="med" len="med"/>
+                      <a:tailEnd type="none" w="med" len="med"/>
+                    </a:lnB>
+                    <a:noFill/>
+                  </a:tcPr>
+                </a:tc>
+                <a:tc>
+                  <a:txBody>
+                    <a:bodyPr/>
+                    <a:lstStyle/>
+                    <a:p>
+                      <a:pPr algn="ctr"/>
+                      <a:r>
+                        <a:rPr sz="1600" b="0">
+                          <a:solidFill>
+                            <a:srgbClr val="000000"/>
+                          </a:solidFill>
+                          <a:latin typeface="Calibri"/>
+                        </a:rPr>
+                        <a:t>2</a:t>
+                      </a:r>
+                    </a:p>
+                  </a:txBody>
+                  <a:tcPr anchor="ctr">
+                    <a:lnL w="12700" cap="flat" cmpd="sng" algn="ctr">
+                      <a:solidFill>
+                        <a:srgbClr val="BFBFBF"/>
+                      </a:solidFill>
+                      <a:prstDash val="solid"/>
+                      <a:round/>
+                      <a:headEnd type="none" w="med" len="med"/>
+                      <a:tailEnd type="none" w="med" len="med"/>
+                    </a:lnL>
+                    <a:lnR w="12700" cap="flat" cmpd="sng" algn="ctr">
+                      <a:solidFill>
+                        <a:srgbClr val="BFBFBF"/>
+                      </a:solidFill>
+                      <a:prstDash val="solid"/>
+                      <a:round/>
+                      <a:headEnd type="none" w="med" len="med"/>
+                      <a:tailEnd type="none" w="med" len="med"/>
+                    </a:lnR>
+                    <a:lnT w="12700" cap="flat" cmpd="sng" algn="ctr">
+                      <a:solidFill>
+                        <a:srgbClr val="BFBFBF"/>
+                      </a:solidFill>
+                      <a:prstDash val="solid"/>
+                      <a:round/>
+                      <a:headEnd type="none" w="med" len="med"/>
+                      <a:tailEnd type="none" w="med" len="med"/>
+                    </a:lnT>
+                    <a:lnB w="12700" cap="flat" cmpd="sng" algn="ctr">
+                      <a:solidFill>
+                        <a:srgbClr val="BFBFBF"/>
+                      </a:solidFill>
+                      <a:prstDash val="solid"/>
+                      <a:round/>
+                      <a:headEnd type="none" w="med" len="med"/>
+                      <a:tailEnd type="none" w="med" len="med"/>
+                    </a:lnB>
+                    <a:noFill/>
+                  </a:tcPr>
+                </a:tc>
+                <a:tc>
+                  <a:txBody>
+                    <a:bodyPr/>
+                    <a:lstStyle/>
+                    <a:p>
+                      <a:pPr algn="ctr"/>
+                      <a:r>
+                        <a:rPr sz="1600" b="0">
+                          <a:solidFill>
+                            <a:srgbClr val="000000"/>
+                          </a:solidFill>
+                          <a:latin typeface="Calibri"/>
+                        </a:rPr>
+                        <a:t>2.20</a:t>
+                      </a:r>
+                    </a:p>
+                  </a:txBody>
+                  <a:tcPr anchor="ctr">
+                    <a:lnL w="12700" cap="flat" cmpd="sng" algn="ctr">
+                      <a:solidFill>
+                        <a:srgbClr val="BFBFBF"/>
+                      </a:solidFill>
+                      <a:prstDash val="solid"/>
+                      <a:round/>
+                      <a:headEnd type="none" w="med" len="med"/>
+                      <a:tailEnd type="none" w="med" len="med"/>
+                    </a:lnL>
+                    <a:lnR w="12700" cap="flat" cmpd="sng" algn="ctr">
+                      <a:solidFill>
+                        <a:srgbClr val="BFBFBF"/>
+                      </a:solidFill>
+                      <a:prstDash val="solid"/>
+                      <a:round/>
+                      <a:headEnd type="none" w="med" len="med"/>
+                      <a:tailEnd type="none" w="med" len="med"/>
+                    </a:lnR>
+                    <a:lnT w="12700" cap="flat" cmpd="sng" algn="ctr">
+                      <a:solidFill>
+                        <a:srgbClr val="BFBFBF"/>
+                      </a:solidFill>
+                      <a:prstDash val="solid"/>
+                      <a:round/>
+                      <a:headEnd type="none" w="med" len="med"/>
+                      <a:tailEnd type="none" w="med" len="med"/>
+                    </a:lnT>
+                    <a:lnB w="12700" cap="flat" cmpd="sng" algn="ctr">
+                      <a:solidFill>
+                        <a:srgbClr val="BFBFBF"/>
+                      </a:solidFill>
+                      <a:prstDash val="solid"/>
+                      <a:round/>
+                      <a:headEnd type="none" w="med" len="med"/>
+                      <a:tailEnd type="none" w="med" len="med"/>
+                    </a:lnB>
+                    <a:noFill/>
+                  </a:tcPr>
+                </a:tc>
+              </a:tr>
+            </a:tbl>
+          </a:graphicData>
+        </a:graphic>
+      </p:graphicFrame>
+      <p:cxnSp>
+        <p:nvCxnSpPr>
+          <p:cNvPr id="5" name="Straight Connector 4"/>
+          <p:cNvCxnSpPr/>
+          <p:nvPr/>
+        </p:nvCxnSpPr>
+        <p:spPr>
+          <a:xfrm>
+            <a:off x="914400" y="1298448"/>
+            <a:ext cx="10363200" cy="0"/>
+          </a:xfrm>
+          <a:prstGeom prst="line">
+            <a:avLst/>
+          </a:prstGeom>
+          <a:ln w="19050">
+            <a:solidFill>
+              <a:srgbClr val="C55A11"/>
+            </a:solidFill>
+          </a:ln>
+        </p:spPr>
+        <p:style>
+          <a:lnRef idx="2">
+            <a:schemeClr val="accent1"/>
+          </a:lnRef>
+          <a:fillRef idx="0">
+            <a:schemeClr val="accent1"/>
+          </a:fillRef>
+          <a:effectRef idx="1">
+            <a:schemeClr val="accent1"/>
+          </a:effectRef>
+          <a:fontRef idx="minor">
+            <a:schemeClr val="tx1"/>
+          </a:fontRef>
+        </p:style>
+      </p:cxnSp>
+      <p:sp>
+        <p:nvSpPr>
+          <p:cNvPr id="6" name="TextBox 5"/>
+          <p:cNvSpPr txBox="1"/>
+          <p:nvPr/>
+        </p:nvSpPr>
+        <p:spPr>
+          <a:xfrm>
+            <a:off x="731520" y="1371600"/>
+            <a:ext cx="10728960" cy="411480"/>
+          </a:xfrm>
+          <a:prstGeom prst="rect">
+            <a:avLst/>
+          </a:prstGeom>
+          <a:noFill/>
+        </p:spPr>
+        <p:txBody>
+          <a:bodyPr wrap="square">
+            <a:spAutoFit/>
+          </a:bodyPr>
+          <a:lstStyle/>
+          <a:p>
+            <a:pPr algn="ctr"/>
+            <a:r>
+              <a:rPr sz="1800" b="0">
+                <a:solidFill>
+                  <a:srgbClr val="404040"/>
+                </a:solidFill>
+                <a:latin typeface="Calibri"/>
+              </a:rPr>
               <a:t>Each factor is scored 1 (poor) to 5 (best); its weight is in brackets</a:t>
             </a:r>
           </a:p>
@@ -9556,13 +12155,271 @@
   <p:clrMapOvr>
     <a:masterClrMapping/>
   </p:clrMapOvr>
-  <p:transition spd="med">
-    <p:cover dir="l"/>
+  <p:transition spd="med" advTm="35000">
+    <p:fade/>
   </p:transition>
+  <p:timing>
+    <p:tnLst>
+      <p:par>
+        <p:cTn id="1" dur="indefinite" restart="never" nodeType="tmRoot">
+          <p:childTnLst>
+            <p:seq concurrent="1" nextAc="seek">
+              <p:cTn id="2" dur="indefinite" nodeType="mainSeq">
+                <p:childTnLst>
+                  <p:par>
+                    <p:cTn id="3" fill="hold">
+                      <p:stCondLst>
+                        <p:cond delay="indefinite"/>
+                        <p:cond evt="onBegin" delay="0">
+                          <p:tn val="2"/>
+                        </p:cond>
+                      </p:stCondLst>
+                      <p:childTnLst>
+                        <p:par>
+                          <p:cTn id="4" fill="hold">
+                            <p:stCondLst>
+                              <p:cond delay="0"/>
+                            </p:stCondLst>
+                            <p:childTnLst>
+                              <p:par>
+                                <p:cTn id="5" presetID="10" presetClass="entr" presetSubtype="0" fill="hold" grpId="0" nodeType="afterEffect">
+                                  <p:stCondLst>
+                                    <p:cond delay="0"/>
+                                  </p:stCondLst>
+                                  <p:childTnLst>
+                                    <p:set>
+                                      <p:cBhvr>
+                                        <p:cTn id="6" dur="1" fill="hold">
+                                          <p:stCondLst>
+                                            <p:cond delay="0"/>
+                                          </p:stCondLst>
+                                        </p:cTn>
+                                        <p:tgtEl>
+                                          <p:spTgt spid="2"/>
+                                        </p:tgtEl>
+                                        <p:attrNameLst>
+                                          <p:attrName>style.visibility</p:attrName>
+                                        </p:attrNameLst>
+                                      </p:cBhvr>
+                                      <p:to>
+                                        <p:strVal val="visible"/>
+                                      </p:to>
+                                    </p:set>
+                                    <p:animEffect transition="in" filter="fade">
+                                      <p:cBhvr>
+                                        <p:cTn id="7" dur="500"/>
+                                        <p:tgtEl>
+                                          <p:spTgt spid="2"/>
+                                        </p:tgtEl>
+                                      </p:cBhvr>
+                                    </p:animEffect>
+                                  </p:childTnLst>
+                                </p:cTn>
+                              </p:par>
+                              <p:par>
+                                <p:cTn id="8" presetID="22" presetClass="entr" presetSubtype="8" fill="hold" nodeType="withEffect">
+                                  <p:stCondLst>
+                                    <p:cond delay="0"/>
+                                  </p:stCondLst>
+                                  <p:childTnLst>
+                                    <p:set>
+                                      <p:cBhvr>
+                                        <p:cTn id="9" dur="1" fill="hold">
+                                          <p:stCondLst>
+                                            <p:cond delay="0"/>
+                                          </p:stCondLst>
+                                        </p:cTn>
+                                        <p:tgtEl>
+                                          <p:spTgt spid="5"/>
+                                        </p:tgtEl>
+                                        <p:attrNameLst>
+                                          <p:attrName>style.visibility</p:attrName>
+                                        </p:attrNameLst>
+                                      </p:cBhvr>
+                                      <p:to>
+                                        <p:strVal val="visible"/>
+                                      </p:to>
+                                    </p:set>
+                                    <p:animEffect transition="in" filter="wipe(right)">
+                                      <p:cBhvr>
+                                        <p:cTn id="10" dur="500"/>
+                                        <p:tgtEl>
+                                          <p:spTgt spid="5"/>
+                                        </p:tgtEl>
+                                      </p:cBhvr>
+                                    </p:animEffect>
+                                  </p:childTnLst>
+                                </p:cTn>
+                              </p:par>
+                            </p:childTnLst>
+                          </p:cTn>
+                        </p:par>
+                        <p:par>
+                          <p:cTn id="11" fill="hold">
+                            <p:stCondLst>
+                              <p:cond delay="500"/>
+                            </p:stCondLst>
+                            <p:childTnLst>
+                              <p:par>
+                                <p:cTn id="12" presetID="10" presetClass="entr" presetSubtype="0" fill="hold" grpId="0" nodeType="afterEffect">
+                                  <p:stCondLst>
+                                    <p:cond delay="0"/>
+                                  </p:stCondLst>
+                                  <p:childTnLst>
+                                    <p:set>
+                                      <p:cBhvr>
+                                        <p:cTn id="13" dur="1" fill="hold">
+                                          <p:stCondLst>
+                                            <p:cond delay="0"/>
+                                          </p:stCondLst>
+                                        </p:cTn>
+                                        <p:tgtEl>
+                                          <p:spTgt spid="6"/>
+                                        </p:tgtEl>
+                                        <p:attrNameLst>
+                                          <p:attrName>style.visibility</p:attrName>
+                                        </p:attrNameLst>
+                                      </p:cBhvr>
+                                      <p:to>
+                                        <p:strVal val="visible"/>
+                                      </p:to>
+                                    </p:set>
+                                    <p:animEffect transition="in" filter="fade">
+                                      <p:cBhvr>
+                                        <p:cTn id="14" dur="500"/>
+                                        <p:tgtEl>
+                                          <p:spTgt spid="6"/>
+                                        </p:tgtEl>
+                                      </p:cBhvr>
+                                    </p:animEffect>
+                                  </p:childTnLst>
+                                </p:cTn>
+                              </p:par>
+                            </p:childTnLst>
+                          </p:cTn>
+                        </p:par>
+                        <p:par>
+                          <p:cTn id="15" fill="hold">
+                            <p:stCondLst>
+                              <p:cond delay="1000"/>
+                            </p:stCondLst>
+                            <p:childTnLst>
+                              <p:par>
+                                <p:cTn id="16" presetID="22" presetClass="entr" presetSubtype="1" fill="hold" nodeType="afterEffect">
+                                  <p:stCondLst>
+                                    <p:cond delay="0"/>
+                                  </p:stCondLst>
+                                  <p:childTnLst>
+                                    <p:set>
+                                      <p:cBhvr>
+                                        <p:cTn id="17" dur="1" fill="hold">
+                                          <p:stCondLst>
+                                            <p:cond delay="0"/>
+                                          </p:stCondLst>
+                                        </p:cTn>
+                                        <p:tgtEl>
+                                          <p:spTgt spid="3"/>
+                                        </p:tgtEl>
+                                        <p:attrNameLst>
+                                          <p:attrName>style.visibility</p:attrName>
+                                        </p:attrNameLst>
+                                      </p:cBhvr>
+                                      <p:to>
+                                        <p:strVal val="visible"/>
+                                      </p:to>
+                                    </p:set>
+                                    <p:animEffect transition="in" filter="wipe(down)">
+                                      <p:cBhvr>
+                                        <p:cTn id="18" dur="500"/>
+                                        <p:tgtEl>
+                                          <p:spTgt spid="3"/>
+                                        </p:tgtEl>
+                                      </p:cBhvr>
+                                    </p:animEffect>
+                                  </p:childTnLst>
+                                </p:cTn>
+                              </p:par>
+                            </p:childTnLst>
+                          </p:cTn>
+                        </p:par>
+                        <p:par>
+                          <p:cTn id="19" fill="hold">
+                            <p:stCondLst>
+                              <p:cond delay="1500"/>
+                            </p:stCondLst>
+                            <p:childTnLst>
+                              <p:par>
+                                <p:cTn id="20" presetID="10" presetClass="entr" presetSubtype="0" fill="hold" grpId="0" nodeType="afterEffect">
+                                  <p:stCondLst>
+                                    <p:cond delay="0"/>
+                                  </p:stCondLst>
+                                  <p:childTnLst>
+                                    <p:set>
+                                      <p:cBhvr>
+                                        <p:cTn id="21" dur="1" fill="hold">
+                                          <p:stCondLst>
+                                            <p:cond delay="0"/>
+                                          </p:stCondLst>
+                                        </p:cTn>
+                                        <p:tgtEl>
+                                          <p:spTgt spid="7"/>
+                                        </p:tgtEl>
+                                        <p:attrNameLst>
+                                          <p:attrName>style.visibility</p:attrName>
+                                        </p:attrNameLst>
+                                      </p:cBhvr>
+                                      <p:to>
+                                        <p:strVal val="visible"/>
+                                      </p:to>
+                                    </p:set>
+                                    <p:animEffect transition="in" filter="fade">
+                                      <p:cBhvr>
+                                        <p:cTn id="22" dur="500"/>
+                                        <p:tgtEl>
+                                          <p:spTgt spid="7"/>
+                                        </p:tgtEl>
+                                      </p:cBhvr>
+                                    </p:animEffect>
+                                  </p:childTnLst>
+                                </p:cTn>
+                              </p:par>
+                            </p:childTnLst>
+                          </p:cTn>
+                        </p:par>
+                      </p:childTnLst>
+                    </p:cTn>
+                  </p:par>
+                </p:childTnLst>
+              </p:cTn>
+              <p:prevCondLst>
+                <p:cond evt="onPrev" delay="0">
+                  <p:tgtEl>
+                    <p:sldTgt/>
+                  </p:tgtEl>
+                </p:cond>
+              </p:prevCondLst>
+              <p:nextCondLst>
+                <p:cond evt="onNext" delay="0">
+                  <p:tgtEl>
+                    <p:sldTgt/>
+                  </p:tgtEl>
+                </p:cond>
+              </p:nextCondLst>
+            </p:seq>
+          </p:childTnLst>
+        </p:cTn>
+      </p:par>
+    </p:tnLst>
+    <p:bldLst>
+      <p:bldP spid="2" grpId="0" animBg="1"/>
+      <p:bldP spid="6" grpId="0" animBg="1"/>
+      <p:bldP spid="7" grpId="0" animBg="1"/>
+    </p:bldLst>
+  </p:timing>
 </p:sld>
 </file>
 
-<file path=ppt/slides/slide6.xml><?xml version="1.0" encoding="utf-8"?>
+<file path=ppt/slides/slide7.xml><?xml version="1.0" encoding="utf-8"?>
 <p:sld xmlns:a="http://schemas.openxmlformats.org/drawingml/2006/main" xmlns:p="http://schemas.openxmlformats.org/presentationml/2006/main" xmlns:r="http://schemas.openxmlformats.org/officeDocument/2006/relationships">
   <p:cSld>
     <p:spTree>
@@ -9891,13 +12748,310 @@
   <p:clrMapOvr>
     <a:masterClrMapping/>
   </p:clrMapOvr>
-  <p:transition spd="med">
-    <p:fade/>
+  <p:transition spd="med" advTm="25000">
+    <p:push dir="u"/>
   </p:transition>
+  <p:timing>
+    <p:tnLst>
+      <p:par>
+        <p:cTn id="1" dur="indefinite" restart="never" nodeType="tmRoot">
+          <p:childTnLst>
+            <p:seq concurrent="1" nextAc="seek">
+              <p:cTn id="2" dur="indefinite" nodeType="mainSeq">
+                <p:childTnLst>
+                  <p:par>
+                    <p:cTn id="3" fill="hold">
+                      <p:stCondLst>
+                        <p:cond delay="indefinite"/>
+                        <p:cond evt="onBegin" delay="0">
+                          <p:tn val="2"/>
+                        </p:cond>
+                      </p:stCondLst>
+                      <p:childTnLst>
+                        <p:par>
+                          <p:cTn id="4" fill="hold">
+                            <p:stCondLst>
+                              <p:cond delay="0"/>
+                            </p:stCondLst>
+                            <p:childTnLst>
+                              <p:par>
+                                <p:cTn id="5" presetID="10" presetClass="entr" presetSubtype="0" fill="hold" grpId="0" nodeType="afterEffect">
+                                  <p:stCondLst>
+                                    <p:cond delay="0"/>
+                                  </p:stCondLst>
+                                  <p:childTnLst>
+                                    <p:set>
+                                      <p:cBhvr>
+                                        <p:cTn id="6" dur="1" fill="hold">
+                                          <p:stCondLst>
+                                            <p:cond delay="0"/>
+                                          </p:stCondLst>
+                                        </p:cTn>
+                                        <p:tgtEl>
+                                          <p:spTgt spid="2"/>
+                                        </p:tgtEl>
+                                        <p:attrNameLst>
+                                          <p:attrName>style.visibility</p:attrName>
+                                        </p:attrNameLst>
+                                      </p:cBhvr>
+                                      <p:to>
+                                        <p:strVal val="visible"/>
+                                      </p:to>
+                                    </p:set>
+                                    <p:animEffect transition="in" filter="fade">
+                                      <p:cBhvr>
+                                        <p:cTn id="7" dur="500"/>
+                                        <p:tgtEl>
+                                          <p:spTgt spid="2"/>
+                                        </p:tgtEl>
+                                      </p:cBhvr>
+                                    </p:animEffect>
+                                  </p:childTnLst>
+                                </p:cTn>
+                              </p:par>
+                              <p:par>
+                                <p:cTn id="8" presetID="22" presetClass="entr" presetSubtype="8" fill="hold" nodeType="withEffect">
+                                  <p:stCondLst>
+                                    <p:cond delay="0"/>
+                                  </p:stCondLst>
+                                  <p:childTnLst>
+                                    <p:set>
+                                      <p:cBhvr>
+                                        <p:cTn id="9" dur="1" fill="hold">
+                                          <p:stCondLst>
+                                            <p:cond delay="0"/>
+                                          </p:stCondLst>
+                                        </p:cTn>
+                                        <p:tgtEl>
+                                          <p:spTgt spid="5"/>
+                                        </p:tgtEl>
+                                        <p:attrNameLst>
+                                          <p:attrName>style.visibility</p:attrName>
+                                        </p:attrNameLst>
+                                      </p:cBhvr>
+                                      <p:to>
+                                        <p:strVal val="visible"/>
+                                      </p:to>
+                                    </p:set>
+                                    <p:animEffect transition="in" filter="wipe(right)">
+                                      <p:cBhvr>
+                                        <p:cTn id="10" dur="500"/>
+                                        <p:tgtEl>
+                                          <p:spTgt spid="5"/>
+                                        </p:tgtEl>
+                                      </p:cBhvr>
+                                    </p:animEffect>
+                                  </p:childTnLst>
+                                </p:cTn>
+                              </p:par>
+                            </p:childTnLst>
+                          </p:cTn>
+                        </p:par>
+                        <p:par>
+                          <p:cTn id="11" fill="hold">
+                            <p:stCondLst>
+                              <p:cond delay="500"/>
+                            </p:stCondLst>
+                            <p:childTnLst>
+                              <p:par>
+                                <p:cTn id="12" presetID="10" presetClass="entr" presetSubtype="0" fill="hold" grpId="0" nodeType="afterEffect">
+                                  <p:stCondLst>
+                                    <p:cond delay="0"/>
+                                  </p:stCondLst>
+                                  <p:childTnLst>
+                                    <p:set>
+                                      <p:cBhvr>
+                                        <p:cTn id="13" dur="1" fill="hold">
+                                          <p:stCondLst>
+                                            <p:cond delay="0"/>
+                                          </p:stCondLst>
+                                        </p:cTn>
+                                        <p:tgtEl>
+                                          <p:spTgt spid="6"/>
+                                        </p:tgtEl>
+                                        <p:attrNameLst>
+                                          <p:attrName>style.visibility</p:attrName>
+                                        </p:attrNameLst>
+                                      </p:cBhvr>
+                                      <p:to>
+                                        <p:strVal val="visible"/>
+                                      </p:to>
+                                    </p:set>
+                                    <p:animEffect transition="in" filter="fade">
+                                      <p:cBhvr>
+                                        <p:cTn id="14" dur="500"/>
+                                        <p:tgtEl>
+                                          <p:spTgt spid="6"/>
+                                        </p:tgtEl>
+                                      </p:cBhvr>
+                                    </p:animEffect>
+                                  </p:childTnLst>
+                                </p:cTn>
+                              </p:par>
+                            </p:childTnLst>
+                          </p:cTn>
+                        </p:par>
+                        <p:par>
+                          <p:cTn id="15" fill="hold">
+                            <p:stCondLst>
+                              <p:cond delay="1000"/>
+                            </p:stCondLst>
+                            <p:childTnLst>
+                              <p:par>
+                                <p:cTn id="16" presetID="22" presetClass="entr" presetSubtype="8" fill="hold" grpId="0" nodeType="afterEffect">
+                                  <p:stCondLst>
+                                    <p:cond delay="0"/>
+                                  </p:stCondLst>
+                                  <p:childTnLst>
+                                    <p:set>
+                                      <p:cBhvr>
+                                        <p:cTn id="17" dur="1" fill="hold">
+                                          <p:stCondLst>
+                                            <p:cond delay="0"/>
+                                          </p:stCondLst>
+                                        </p:cTn>
+                                        <p:tgtEl>
+                                          <p:spTgt spid="3"/>
+                                        </p:tgtEl>
+                                        <p:attrNameLst>
+                                          <p:attrName>style.visibility</p:attrName>
+                                        </p:attrNameLst>
+                                      </p:cBhvr>
+                                      <p:to>
+                                        <p:strVal val="visible"/>
+                                      </p:to>
+                                    </p:set>
+                                    <p:animEffect transition="in" filter="wipe(right)">
+                                      <p:cBhvr>
+                                        <p:cTn id="18" dur="500"/>
+                                        <p:tgtEl>
+                                          <p:spTgt spid="3"/>
+                                        </p:tgtEl>
+                                      </p:cBhvr>
+                                    </p:animEffect>
+                                  </p:childTnLst>
+                                </p:cTn>
+                              </p:par>
+                            </p:childTnLst>
+                          </p:cTn>
+                        </p:par>
+                        <p:par>
+                          <p:cTn id="19" fill="hold">
+                            <p:stCondLst>
+                              <p:cond delay="1500"/>
+                            </p:stCondLst>
+                            <p:childTnLst>
+                              <p:par>
+                                <p:cTn id="20" presetID="10" presetClass="entr" presetSubtype="0" fill="hold" grpId="0" nodeType="afterEffect">
+                                  <p:stCondLst>
+                                    <p:cond delay="0"/>
+                                  </p:stCondLst>
+                                  <p:childTnLst>
+                                    <p:set>
+                                      <p:cBhvr>
+                                        <p:cTn id="21" dur="1" fill="hold">
+                                          <p:stCondLst>
+                                            <p:cond delay="0"/>
+                                          </p:stCondLst>
+                                        </p:cTn>
+                                        <p:tgtEl>
+                                          <p:spTgt spid="7"/>
+                                        </p:tgtEl>
+                                        <p:attrNameLst>
+                                          <p:attrName>style.visibility</p:attrName>
+                                        </p:attrNameLst>
+                                      </p:cBhvr>
+                                      <p:to>
+                                        <p:strVal val="visible"/>
+                                      </p:to>
+                                    </p:set>
+                                    <p:animEffect transition="in" filter="fade">
+                                      <p:cBhvr>
+                                        <p:cTn id="22" dur="500"/>
+                                        <p:tgtEl>
+                                          <p:spTgt spid="7"/>
+                                        </p:tgtEl>
+                                      </p:cBhvr>
+                                    </p:animEffect>
+                                  </p:childTnLst>
+                                </p:cTn>
+                              </p:par>
+                              <p:par>
+                                <p:cTn id="23" presetID="10" presetClass="entr" presetSubtype="0" fill="hold" grpId="0" nodeType="withEffect">
+                                  <p:stCondLst>
+                                    <p:cond delay="0"/>
+                                  </p:stCondLst>
+                                  <p:childTnLst>
+                                    <p:set>
+                                      <p:cBhvr>
+                                        <p:cTn id="24" dur="1" fill="hold">
+                                          <p:stCondLst>
+                                            <p:cond delay="0"/>
+                                          </p:stCondLst>
+                                        </p:cTn>
+                                        <p:tgtEl>
+                                          <p:spTgt spid="8"/>
+                                        </p:tgtEl>
+                                        <p:attrNameLst>
+                                          <p:attrName>style.visibility</p:attrName>
+                                        </p:attrNameLst>
+                                      </p:cBhvr>
+                                      <p:to>
+                                        <p:strVal val="visible"/>
+                                      </p:to>
+                                    </p:set>
+                                    <p:animEffect transition="in" filter="fade">
+                                      <p:cBhvr>
+                                        <p:cTn id="25" dur="500"/>
+                                        <p:tgtEl>
+                                          <p:spTgt spid="8"/>
+                                        </p:tgtEl>
+                                      </p:cBhvr>
+                                    </p:animEffect>
+                                  </p:childTnLst>
+                                </p:cTn>
+                              </p:par>
+                            </p:childTnLst>
+                          </p:cTn>
+                        </p:par>
+                      </p:childTnLst>
+                    </p:cTn>
+                  </p:par>
+                </p:childTnLst>
+              </p:cTn>
+              <p:prevCondLst>
+                <p:cond evt="onPrev" delay="0">
+                  <p:tgtEl>
+                    <p:sldTgt/>
+                  </p:tgtEl>
+                </p:cond>
+              </p:prevCondLst>
+              <p:nextCondLst>
+                <p:cond evt="onNext" delay="0">
+                  <p:tgtEl>
+                    <p:sldTgt/>
+                  </p:tgtEl>
+                </p:cond>
+              </p:nextCondLst>
+            </p:seq>
+          </p:childTnLst>
+        </p:cTn>
+      </p:par>
+    </p:tnLst>
+    <p:bldLst>
+      <p:bldP spid="2" grpId="0" animBg="1"/>
+      <p:bldP spid="6" grpId="0" animBg="1"/>
+      <p:bldGraphic spid="3" grpId="0">
+        <p:bldAsOne/>
+      </p:bldGraphic>
+      <p:bldP spid="7" grpId="0" animBg="1"/>
+      <p:bldP spid="8" grpId="0" animBg="1"/>
+    </p:bldLst>
+  </p:timing>
 </p:sld>
 </file>
 
-<file path=ppt/slides/slide7.xml><?xml version="1.0" encoding="utf-8"?>
+<file path=ppt/slides/slide8.xml><?xml version="1.0" encoding="utf-8"?>
 <p:sld xmlns:a="http://schemas.openxmlformats.org/drawingml/2006/main" xmlns:p="http://schemas.openxmlformats.org/presentationml/2006/main" xmlns:r="http://schemas.openxmlformats.org/officeDocument/2006/relationships">
   <p:cSld>
     <p:spTree>
@@ -10052,7 +13206,7 @@
               </a:spcAft>
             </a:pPr>
             <a:r>
-              <a:rPr sz="2100" b="1">
+              <a:rPr sz="2000" b="1">
                 <a:solidFill>
                   <a:srgbClr val="1F3864"/>
                 </a:solidFill>
@@ -10061,13 +13215,13 @@
               <a:t>Biggest demand: </a:t>
             </a:r>
             <a:r>
-              <a:rPr sz="2100" b="0">
+              <a:rPr sz="2000" b="0">
                 <a:solidFill>
                   <a:srgbClr val="000000"/>
                 </a:solidFill>
                 <a:latin typeface="Calibri"/>
               </a:rPr>
-              <a:t>the highest Google Trends interest (around 43).</a:t>
+              <a:t>the highest Google Trends interest (around 43), in most states.</a:t>
             </a:r>
           </a:p>
           <a:p>
@@ -10077,7 +13231,7 @@
               </a:spcAft>
             </a:pPr>
             <a:r>
-              <a:rPr sz="2100" b="1">
+              <a:rPr sz="2000" b="1">
                 <a:solidFill>
                   <a:srgbClr val="1F3864"/>
                 </a:solidFill>
@@ -10086,13 +13240,13 @@
               <a:t>Growing and urgent: </a:t>
             </a:r>
             <a:r>
-              <a:rPr sz="2100" b="0">
+              <a:rPr sz="2000" b="0">
                 <a:solidFill>
                   <a:srgbClr val="000000"/>
                 </a:solidFill>
                 <a:latin typeface="Calibri"/>
               </a:rPr>
-              <a:t>it reached 100 in April 2026 after news of a breach at the CAC.</a:t>
+              <a:t>it reached 100 in April 2026, when the CAC confirmed a cyber breach; attacks rose 47% in a year.</a:t>
             </a:r>
           </a:p>
           <a:p>
@@ -10102,22 +13256,22 @@
               </a:spcAft>
             </a:pPr>
             <a:r>
-              <a:rPr sz="2100" b="1">
+              <a:rPr sz="2000" b="1">
                 <a:solidFill>
                   <a:srgbClr val="1F3864"/>
                 </a:solidFill>
                 <a:latin typeface="Calibri"/>
               </a:rPr>
-              <a:t>Nationwide: </a:t>
+              <a:t>Too few experts: </a:t>
             </a:r>
             <a:r>
-              <a:rPr sz="2100" b="0">
+              <a:rPr sz="2000" b="0">
                 <a:solidFill>
                   <a:srgbClr val="000000"/>
                 </a:solidFill>
                 <a:latin typeface="Calibri"/>
               </a:rPr>
-              <a:t>it was the most searched programme in most states.</a:t>
+              <a:t>only about 8,352 cybersecurity professionals in Nigeria (2023), so employers need trained people.</a:t>
             </a:r>
           </a:p>
           <a:p>
@@ -10127,7 +13281,7 @@
               </a:spcAft>
             </a:pPr>
             <a:r>
-              <a:rPr sz="2100" b="1">
+              <a:rPr sz="2000" b="1">
                 <a:solidFill>
                   <a:srgbClr val="1F3864"/>
                 </a:solidFill>
@@ -10136,7 +13290,7 @@
               <a:t>Customers can pay: </a:t>
             </a:r>
             <a:r>
-              <a:rPr sz="2100" b="0">
+              <a:rPr sz="2000" b="0">
                 <a:solidFill>
                   <a:srgbClr val="000000"/>
                 </a:solidFill>
@@ -10152,7 +13306,7 @@
               </a:spcAft>
             </a:pPr>
             <a:r>
-              <a:rPr sz="2100" b="1">
+              <a:rPr sz="2000" b="1">
                 <a:solidFill>
                   <a:srgbClr val="1F3864"/>
                 </a:solidFill>
@@ -10161,7 +13315,7 @@
               <a:t>My plan: </a:t>
             </a:r>
             <a:r>
-              <a:rPr sz="2100" b="0">
+              <a:rPr sz="2000" b="0">
                 <a:solidFill>
                   <a:srgbClr val="000000"/>
                 </a:solidFill>
@@ -10237,7 +13391,7 @@
                 </a:solidFill>
                 <a:latin typeface="Calibri"/>
               </a:rPr>
-              <a:t>The reasons, from the Google Trends research and the scores</a:t>
+              <a:t>The reasons, from Google Trends, the other research and the scores</a:t>
             </a:r>
           </a:p>
         </p:txBody>
@@ -10247,13 +13401,263 @@
   <p:clrMapOvr>
     <a:masterClrMapping/>
   </p:clrMapOvr>
-  <p:transition spd="med">
-    <p:push dir="u"/>
+  <p:transition spd="med" advTm="35000">
+    <p:wipe dir="r"/>
   </p:transition>
+  <p:timing>
+    <p:tnLst>
+      <p:par>
+        <p:cTn id="1" dur="indefinite" restart="never" nodeType="tmRoot">
+          <p:childTnLst>
+            <p:seq concurrent="1" nextAc="seek">
+              <p:cTn id="2" dur="indefinite" nodeType="mainSeq">
+                <p:childTnLst>
+                  <p:par>
+                    <p:cTn id="3" fill="hold">
+                      <p:stCondLst>
+                        <p:cond delay="indefinite"/>
+                        <p:cond evt="onBegin" delay="0">
+                          <p:tn val="2"/>
+                        </p:cond>
+                      </p:stCondLst>
+                      <p:childTnLst>
+                        <p:par>
+                          <p:cTn id="4" fill="hold">
+                            <p:stCondLst>
+                              <p:cond delay="0"/>
+                            </p:stCondLst>
+                            <p:childTnLst>
+                              <p:par>
+                                <p:cTn id="5" presetID="10" presetClass="entr" presetSubtype="0" fill="hold" grpId="0" nodeType="afterEffect">
+                                  <p:stCondLst>
+                                    <p:cond delay="0"/>
+                                  </p:stCondLst>
+                                  <p:childTnLst>
+                                    <p:set>
+                                      <p:cBhvr>
+                                        <p:cTn id="6" dur="1" fill="hold">
+                                          <p:stCondLst>
+                                            <p:cond delay="0"/>
+                                          </p:stCondLst>
+                                        </p:cTn>
+                                        <p:tgtEl>
+                                          <p:spTgt spid="2"/>
+                                        </p:tgtEl>
+                                        <p:attrNameLst>
+                                          <p:attrName>style.visibility</p:attrName>
+                                        </p:attrNameLst>
+                                      </p:cBhvr>
+                                      <p:to>
+                                        <p:strVal val="visible"/>
+                                      </p:to>
+                                    </p:set>
+                                    <p:animEffect transition="in" filter="fade">
+                                      <p:cBhvr>
+                                        <p:cTn id="7" dur="500"/>
+                                        <p:tgtEl>
+                                          <p:spTgt spid="2"/>
+                                        </p:tgtEl>
+                                      </p:cBhvr>
+                                    </p:animEffect>
+                                  </p:childTnLst>
+                                </p:cTn>
+                              </p:par>
+                              <p:par>
+                                <p:cTn id="8" presetID="22" presetClass="entr" presetSubtype="8" fill="hold" nodeType="withEffect">
+                                  <p:stCondLst>
+                                    <p:cond delay="0"/>
+                                  </p:stCondLst>
+                                  <p:childTnLst>
+                                    <p:set>
+                                      <p:cBhvr>
+                                        <p:cTn id="9" dur="1" fill="hold">
+                                          <p:stCondLst>
+                                            <p:cond delay="0"/>
+                                          </p:stCondLst>
+                                        </p:cTn>
+                                        <p:tgtEl>
+                                          <p:spTgt spid="5"/>
+                                        </p:tgtEl>
+                                        <p:attrNameLst>
+                                          <p:attrName>style.visibility</p:attrName>
+                                        </p:attrNameLst>
+                                      </p:cBhvr>
+                                      <p:to>
+                                        <p:strVal val="visible"/>
+                                      </p:to>
+                                    </p:set>
+                                    <p:animEffect transition="in" filter="wipe(right)">
+                                      <p:cBhvr>
+                                        <p:cTn id="10" dur="500"/>
+                                        <p:tgtEl>
+                                          <p:spTgt spid="5"/>
+                                        </p:tgtEl>
+                                      </p:cBhvr>
+                                    </p:animEffect>
+                                  </p:childTnLst>
+                                </p:cTn>
+                              </p:par>
+                            </p:childTnLst>
+                          </p:cTn>
+                        </p:par>
+                        <p:par>
+                          <p:cTn id="11" fill="hold">
+                            <p:stCondLst>
+                              <p:cond delay="500"/>
+                            </p:stCondLst>
+                            <p:childTnLst>
+                              <p:par>
+                                <p:cTn id="12" presetID="10" presetClass="entr" presetSubtype="0" fill="hold" grpId="0" nodeType="afterEffect">
+                                  <p:stCondLst>
+                                    <p:cond delay="0"/>
+                                  </p:stCondLst>
+                                  <p:childTnLst>
+                                    <p:set>
+                                      <p:cBhvr>
+                                        <p:cTn id="13" dur="1" fill="hold">
+                                          <p:stCondLst>
+                                            <p:cond delay="0"/>
+                                          </p:stCondLst>
+                                        </p:cTn>
+                                        <p:tgtEl>
+                                          <p:spTgt spid="6"/>
+                                        </p:tgtEl>
+                                        <p:attrNameLst>
+                                          <p:attrName>style.visibility</p:attrName>
+                                        </p:attrNameLst>
+                                      </p:cBhvr>
+                                      <p:to>
+                                        <p:strVal val="visible"/>
+                                      </p:to>
+                                    </p:set>
+                                    <p:animEffect transition="in" filter="fade">
+                                      <p:cBhvr>
+                                        <p:cTn id="14" dur="500"/>
+                                        <p:tgtEl>
+                                          <p:spTgt spid="6"/>
+                                        </p:tgtEl>
+                                      </p:cBhvr>
+                                    </p:animEffect>
+                                  </p:childTnLst>
+                                </p:cTn>
+                              </p:par>
+                            </p:childTnLst>
+                          </p:cTn>
+                        </p:par>
+                        <p:par>
+                          <p:cTn id="15" fill="hold">
+                            <p:stCondLst>
+                              <p:cond delay="1000"/>
+                            </p:stCondLst>
+                            <p:childTnLst>
+                              <p:par>
+                                <p:cTn id="16" presetID="10" presetClass="entr" presetSubtype="0" fill="hold" grpId="0" nodeType="afterEffect">
+                                  <p:stCondLst>
+                                    <p:cond delay="0"/>
+                                  </p:stCondLst>
+                                  <p:childTnLst>
+                                    <p:set>
+                                      <p:cBhvr>
+                                        <p:cTn id="17" dur="1" fill="hold">
+                                          <p:stCondLst>
+                                            <p:cond delay="0"/>
+                                          </p:stCondLst>
+                                        </p:cTn>
+                                        <p:tgtEl>
+                                          <p:spTgt spid="7"/>
+                                        </p:tgtEl>
+                                        <p:attrNameLst>
+                                          <p:attrName>style.visibility</p:attrName>
+                                        </p:attrNameLst>
+                                      </p:cBhvr>
+                                      <p:to>
+                                        <p:strVal val="visible"/>
+                                      </p:to>
+                                    </p:set>
+                                    <p:animEffect transition="in" filter="fade">
+                                      <p:cBhvr>
+                                        <p:cTn id="18" dur="500"/>
+                                        <p:tgtEl>
+                                          <p:spTgt spid="7"/>
+                                        </p:tgtEl>
+                                      </p:cBhvr>
+                                    </p:animEffect>
+                                  </p:childTnLst>
+                                </p:cTn>
+                              </p:par>
+                              <p:par>
+                                <p:cTn id="19" presetID="10" presetClass="entr" presetSubtype="0" fill="hold" grpId="0" nodeType="withEffect">
+                                  <p:stCondLst>
+                                    <p:cond delay="0"/>
+                                  </p:stCondLst>
+                                  <p:childTnLst>
+                                    <p:set>
+                                      <p:cBhvr>
+                                        <p:cTn id="20" dur="1" fill="hold">
+                                          <p:stCondLst>
+                                            <p:cond delay="0"/>
+                                          </p:stCondLst>
+                                        </p:cTn>
+                                        <p:tgtEl>
+                                          <p:spTgt spid="3"/>
+                                        </p:tgtEl>
+                                        <p:attrNameLst>
+                                          <p:attrName>style.visibility</p:attrName>
+                                        </p:attrNameLst>
+                                      </p:cBhvr>
+                                      <p:to>
+                                        <p:strVal val="visible"/>
+                                      </p:to>
+                                    </p:set>
+                                    <p:animEffect transition="in" filter="fade">
+                                      <p:cBhvr>
+                                        <p:cTn id="21" dur="500"/>
+                                        <p:tgtEl>
+                                          <p:spTgt spid="3"/>
+                                        </p:tgtEl>
+                                      </p:cBhvr>
+                                    </p:animEffect>
+                                  </p:childTnLst>
+                                </p:cTn>
+                              </p:par>
+                            </p:childTnLst>
+                          </p:cTn>
+                        </p:par>
+                      </p:childTnLst>
+                    </p:cTn>
+                  </p:par>
+                </p:childTnLst>
+              </p:cTn>
+              <p:prevCondLst>
+                <p:cond evt="onPrev" delay="0">
+                  <p:tgtEl>
+                    <p:sldTgt/>
+                  </p:tgtEl>
+                </p:cond>
+              </p:prevCondLst>
+              <p:nextCondLst>
+                <p:cond evt="onNext" delay="0">
+                  <p:tgtEl>
+                    <p:sldTgt/>
+                  </p:tgtEl>
+                </p:cond>
+              </p:nextCondLst>
+            </p:seq>
+          </p:childTnLst>
+        </p:cTn>
+      </p:par>
+    </p:tnLst>
+    <p:bldLst>
+      <p:bldP spid="2" grpId="0" animBg="1"/>
+      <p:bldP spid="6" grpId="0" animBg="1"/>
+      <p:bldP spid="7" grpId="0" animBg="1"/>
+      <p:bldP spid="3" grpId="0" animBg="1"/>
+    </p:bldLst>
+  </p:timing>
 </p:sld>
 </file>
 
-<file path=ppt/slides/slide8.xml><?xml version="1.0" encoding="utf-8"?>
+<file path=ppt/slides/slide9.xml><?xml version="1.0" encoding="utf-8"?>
 <p:sld xmlns:a="http://schemas.openxmlformats.org/drawingml/2006/main" xmlns:p="http://schemas.openxmlformats.org/presentationml/2006/main" xmlns:r="http://schemas.openxmlformats.org/officeDocument/2006/relationships">
   <p:cSld>
     <p:bg>
@@ -10594,9 +13998,187 @@
   <p:clrMapOvr>
     <a:masterClrMapping/>
   </p:clrMapOvr>
-  <p:transition spd="med">
-    <p:wipe dir="r"/>
+  <p:transition spd="med" advTm="10000">
+    <p:split orient="vert" dir="out"/>
   </p:transition>
+  <p:timing>
+    <p:tnLst>
+      <p:par>
+        <p:cTn id="1" dur="indefinite" restart="never" nodeType="tmRoot">
+          <p:childTnLst>
+            <p:seq concurrent="1" nextAc="seek">
+              <p:cTn id="2" dur="indefinite" nodeType="mainSeq">
+                <p:childTnLst>
+                  <p:par>
+                    <p:cTn id="3" fill="hold">
+                      <p:stCondLst>
+                        <p:cond delay="indefinite"/>
+                        <p:cond evt="onBegin" delay="0">
+                          <p:tn val="2"/>
+                        </p:cond>
+                      </p:stCondLst>
+                      <p:childTnLst>
+                        <p:par>
+                          <p:cTn id="4" fill="hold">
+                            <p:stCondLst>
+                              <p:cond delay="0"/>
+                            </p:stCondLst>
+                            <p:childTnLst>
+                              <p:par>
+                                <p:cTn id="5" presetID="10" presetClass="entr" presetSubtype="0" fill="hold" grpId="0" nodeType="afterEffect">
+                                  <p:stCondLst>
+                                    <p:cond delay="0"/>
+                                  </p:stCondLst>
+                                  <p:childTnLst>
+                                    <p:set>
+                                      <p:cBhvr>
+                                        <p:cTn id="6" dur="1" fill="hold">
+                                          <p:stCondLst>
+                                            <p:cond delay="0"/>
+                                          </p:stCondLst>
+                                        </p:cTn>
+                                        <p:tgtEl>
+                                          <p:spTgt spid="2"/>
+                                        </p:tgtEl>
+                                        <p:attrNameLst>
+                                          <p:attrName>style.visibility</p:attrName>
+                                        </p:attrNameLst>
+                                      </p:cBhvr>
+                                      <p:to>
+                                        <p:strVal val="visible"/>
+                                      </p:to>
+                                    </p:set>
+                                    <p:animEffect transition="in" filter="fade">
+                                      <p:cBhvr>
+                                        <p:cTn id="7" dur="500"/>
+                                        <p:tgtEl>
+                                          <p:spTgt spid="2"/>
+                                        </p:tgtEl>
+                                      </p:cBhvr>
+                                    </p:animEffect>
+                                  </p:childTnLst>
+                                </p:cTn>
+                              </p:par>
+                            </p:childTnLst>
+                          </p:cTn>
+                        </p:par>
+                        <p:par>
+                          <p:cTn id="8" fill="hold">
+                            <p:stCondLst>
+                              <p:cond delay="500"/>
+                            </p:stCondLst>
+                            <p:childTnLst>
+                              <p:par>
+                                <p:cTn id="9" presetID="22" presetClass="entr" presetSubtype="8" fill="hold" nodeType="afterEffect">
+                                  <p:stCondLst>
+                                    <p:cond delay="0"/>
+                                  </p:stCondLst>
+                                  <p:childTnLst>
+                                    <p:set>
+                                      <p:cBhvr>
+                                        <p:cTn id="10" dur="1" fill="hold">
+                                          <p:stCondLst>
+                                            <p:cond delay="0"/>
+                                          </p:stCondLst>
+                                        </p:cTn>
+                                        <p:tgtEl>
+                                          <p:spTgt spid="8"/>
+                                        </p:tgtEl>
+                                        <p:attrNameLst>
+                                          <p:attrName>style.visibility</p:attrName>
+                                        </p:attrNameLst>
+                                      </p:cBhvr>
+                                      <p:to>
+                                        <p:strVal val="visible"/>
+                                      </p:to>
+                                    </p:set>
+                                    <p:animEffect transition="in" filter="wipe(right)">
+                                      <p:cBhvr>
+                                        <p:cTn id="11" dur="500"/>
+                                        <p:tgtEl>
+                                          <p:spTgt spid="8"/>
+                                        </p:tgtEl>
+                                      </p:cBhvr>
+                                    </p:animEffect>
+                                  </p:childTnLst>
+                                </p:cTn>
+                              </p:par>
+                            </p:childTnLst>
+                          </p:cTn>
+                        </p:par>
+                        <p:par>
+                          <p:cTn id="12" fill="hold">
+                            <p:stCondLst>
+                              <p:cond delay="1000"/>
+                            </p:stCondLst>
+                            <p:childTnLst>
+                              <p:par>
+                                <p:cTn id="13" presetID="10" presetClass="entr" presetSubtype="0" fill="hold" grpId="0" nodeType="afterEffect">
+                                  <p:stCondLst>
+                                    <p:cond delay="0"/>
+                                  </p:stCondLst>
+                                  <p:childTnLst>
+                                    <p:set>
+                                      <p:cBhvr>
+                                        <p:cTn id="14" dur="1" fill="hold">
+                                          <p:stCondLst>
+                                            <p:cond delay="0"/>
+                                          </p:stCondLst>
+                                        </p:cTn>
+                                        <p:tgtEl>
+                                          <p:spTgt spid="3"/>
+                                        </p:tgtEl>
+                                        <p:attrNameLst>
+                                          <p:attrName>style.visibility</p:attrName>
+                                        </p:attrNameLst>
+                                      </p:cBhvr>
+                                      <p:to>
+                                        <p:strVal val="visible"/>
+                                      </p:to>
+                                    </p:set>
+                                    <p:animEffect transition="in" filter="fade">
+                                      <p:cBhvr>
+                                        <p:cTn id="15" dur="500"/>
+                                        <p:tgtEl>
+                                          <p:spTgt spid="3"/>
+                                        </p:tgtEl>
+                                      </p:cBhvr>
+                                    </p:animEffect>
+                                  </p:childTnLst>
+                                </p:cTn>
+                              </p:par>
+                            </p:childTnLst>
+                          </p:cTn>
+                        </p:par>
+                      </p:childTnLst>
+                    </p:cTn>
+                  </p:par>
+                </p:childTnLst>
+              </p:cTn>
+              <p:prevCondLst>
+                <p:cond evt="onPrev" delay="0">
+                  <p:tgtEl>
+                    <p:sldTgt/>
+                  </p:tgtEl>
+                </p:cond>
+              </p:prevCondLst>
+              <p:nextCondLst>
+                <p:cond evt="onNext" delay="0">
+                  <p:tgtEl>
+                    <p:sldTgt/>
+                  </p:tgtEl>
+                </p:cond>
+              </p:nextCondLst>
+            </p:seq>
+          </p:childTnLst>
+        </p:cTn>
+      </p:par>
+    </p:tnLst>
+    <p:bldLst>
+      <p:bldP spid="2" grpId="0" animBg="1"/>
+      <p:bldP spid="3" grpId="0" animBg="1"/>
+    </p:bldLst>
+  </p:timing>
 </p:sld>
 </file>
 
